--- a/data/archive/pulse_2026-03-11.pptx
+++ b/data/archive/pulse_2026-03-11.pptx
@@ -25,6 +25,7 @@
     <p:sldId id="273" r:id="rId24"/>
     <p:sldId id="274" r:id="rId25"/>
     <p:sldId id="275" r:id="rId26"/>
+    <p:sldId id="276" r:id="rId27"/>
   </p:sldIdLst>
   <p:sldSz cx="12191695" cy="6858000" type="screen4x3"/>
   <p:notesSz cx="6858000" cy="9144000"/>
@@ -3307,7 +3308,7 @@
             <a:avLst/>
           </a:prstGeom>
           <a:solidFill>
-            <a:srgbClr val="FFB72B"/>
+            <a:srgbClr val="E91E63"/>
           </a:solidFill>
           <a:ln>
             <a:noFill/>
@@ -3360,13 +3361,13 @@
             <a:pPr algn="l">
               <a:defRPr sz="1000" b="1">
                 <a:solidFill>
-                  <a:srgbClr val="FFB72B"/>
-                </a:solidFill>
-                <a:latin typeface="Calibri"/>
-              </a:defRPr>
-            </a:pPr>
-            <a:r>
-              <a:t>🎂  CELEBRATION</a:t>
+                  <a:srgbClr val="E91E63"/>
+                </a:solidFill>
+                <a:latin typeface="Calibri"/>
+              </a:defRPr>
+            </a:pPr>
+            <a:r>
+              <a:t>🎯  WIN</a:t>
             </a:r>
           </a:p>
         </p:txBody>
@@ -3396,13 +3397,13 @@
             <a:pPr algn="l">
               <a:defRPr sz="3200" b="1" i="0">
                 <a:solidFill>
-                  <a:srgbClr val="FFB72B"/>
-                </a:solidFill>
-                <a:latin typeface="Calibri"/>
-              </a:defRPr>
-            </a:pPr>
-            <a:r>
-              <a:t>Happy Birthday!</a:t>
+                  <a:srgbClr val="E91E63"/>
+                </a:solidFill>
+                <a:latin typeface="Calibri"/>
+              </a:defRPr>
+            </a:pPr>
+            <a:r>
+              <a:t>Gaming Success</a:t>
             </a:r>
           </a:p>
         </p:txBody>
@@ -3416,21 +3417,129 @@
         <p:spPr>
           <a:xfrm>
             <a:off x="1097280" y="2103120"/>
-            <a:ext cx="9966960" cy="640080"/>
-          </a:xfrm>
-          <a:prstGeom prst="rect">
-            <a:avLst/>
-          </a:prstGeom>
-          <a:noFill/>
-        </p:spPr>
-        <p:txBody>
-          <a:bodyPr wrap="square">
-            <a:spAutoFit/>
-          </a:bodyPr>
-          <a:lstStyle/>
-          <a:p>
-            <a:pPr algn="l">
-              <a:defRPr sz="2800" b="1" i="0">
+            <a:ext cx="4572000" cy="822960"/>
+          </a:xfrm>
+          <a:prstGeom prst="rect">
+            <a:avLst/>
+          </a:prstGeom>
+          <a:noFill/>
+        </p:spPr>
+        <p:txBody>
+          <a:bodyPr wrap="square">
+            <a:spAutoFit/>
+          </a:bodyPr>
+          <a:lstStyle/>
+          <a:p>
+            <a:pPr algn="l">
+              <a:defRPr sz="4800" b="1" i="0">
+                <a:solidFill>
+                  <a:srgbClr val="E91E63"/>
+                </a:solidFill>
+                <a:latin typeface="Calibri"/>
+              </a:defRPr>
+            </a:pPr>
+            <a:r>
+              <a:t>61</a:t>
+            </a:r>
+          </a:p>
+        </p:txBody>
+      </p:sp>
+      <p:sp>
+        <p:nvSpPr>
+          <p:cNvPr id="6" name="TextBox 5"/>
+          <p:cNvSpPr txBox="1"/>
+          <p:nvPr/>
+        </p:nvSpPr>
+        <p:spPr>
+          <a:xfrm>
+            <a:off x="1097280" y="2834640"/>
+            <a:ext cx="4572000" cy="365760"/>
+          </a:xfrm>
+          <a:prstGeom prst="rect">
+            <a:avLst/>
+          </a:prstGeom>
+          <a:noFill/>
+        </p:spPr>
+        <p:txBody>
+          <a:bodyPr wrap="square">
+            <a:spAutoFit/>
+          </a:bodyPr>
+          <a:lstStyle/>
+          <a:p>
+            <a:pPr algn="l">
+              <a:defRPr sz="1200" b="0" i="0">
+                <a:solidFill>
+                  <a:srgbClr val="8F95A3"/>
+                </a:solidFill>
+                <a:latin typeface="Calibri"/>
+              </a:defRPr>
+            </a:pPr>
+            <a:r>
+              <a:t>% retention</a:t>
+            </a:r>
+          </a:p>
+        </p:txBody>
+      </p:sp>
+      <p:sp>
+        <p:nvSpPr>
+          <p:cNvPr id="7" name="TextBox 6"/>
+          <p:cNvSpPr txBox="1"/>
+          <p:nvPr/>
+        </p:nvSpPr>
+        <p:spPr>
+          <a:xfrm>
+            <a:off x="1097280" y="3291840"/>
+            <a:ext cx="9966960" cy="365760"/>
+          </a:xfrm>
+          <a:prstGeom prst="rect">
+            <a:avLst/>
+          </a:prstGeom>
+          <a:noFill/>
+        </p:spPr>
+        <p:txBody>
+          <a:bodyPr wrap="square">
+            <a:spAutoFit/>
+          </a:bodyPr>
+          <a:lstStyle/>
+          <a:p>
+            <a:pPr algn="l">
+              <a:defRPr sz="1400" b="0" i="0">
+                <a:solidFill>
+                  <a:srgbClr val="E2E2EA"/>
+                </a:solidFill>
+                <a:latin typeface="Calibri"/>
+              </a:defRPr>
+            </a:pPr>
+            <a:r>
+              <a:t>by Gaming Team</a:t>
+            </a:r>
+          </a:p>
+        </p:txBody>
+      </p:sp>
+      <p:sp>
+        <p:nvSpPr>
+          <p:cNvPr id="8" name="TextBox 7"/>
+          <p:cNvSpPr txBox="1"/>
+          <p:nvPr/>
+        </p:nvSpPr>
+        <p:spPr>
+          <a:xfrm>
+            <a:off x="1097280" y="3840480"/>
+            <a:ext cx="9966960" cy="457200"/>
+          </a:xfrm>
+          <a:prstGeom prst="rect">
+            <a:avLst/>
+          </a:prstGeom>
+          <a:noFill/>
+        </p:spPr>
+        <p:txBody>
+          <a:bodyPr wrap="square">
+            <a:spAutoFit/>
+          </a:bodyPr>
+          <a:lstStyle/>
+          <a:p>
+            <a:pPr algn="l">
+              <a:defRPr sz="1800" b="1" i="0">
                 <a:solidFill>
                   <a:srgbClr val="FFFFFF"/>
                 </a:solidFill>
@@ -3438,21 +3547,21 @@
               </a:defRPr>
             </a:pPr>
             <a:r>
-              <a:t>Vladimir Khrolovich</a:t>
-            </a:r>
-          </a:p>
-        </p:txBody>
-      </p:sp>
-      <p:sp>
-        <p:nvSpPr>
-          <p:cNvPr id="6" name="TextBox 5"/>
-          <p:cNvSpPr txBox="1"/>
-          <p:nvPr/>
-        </p:nvSpPr>
-        <p:spPr>
-          <a:xfrm>
-            <a:off x="1097280" y="2743200"/>
-            <a:ext cx="9966960" cy="365760"/>
+              <a:t>Infinite Minesweeper Hits Target!</a:t>
+            </a:r>
+          </a:p>
+        </p:txBody>
+      </p:sp>
+      <p:sp>
+        <p:nvSpPr>
+          <p:cNvPr id="9" name="TextBox 8"/>
+          <p:cNvSpPr txBox="1"/>
+          <p:nvPr/>
+        </p:nvSpPr>
+        <p:spPr>
+          <a:xfrm>
+            <a:off x="1097280" y="4389120"/>
+            <a:ext cx="9966960" cy="914400"/>
           </a:xfrm>
           <a:prstGeom prst="rect">
             <a:avLst/>
@@ -3468,85 +3577,49 @@
             <a:pPr algn="l">
               <a:defRPr sz="1400" b="0" i="0">
                 <a:solidFill>
+                  <a:srgbClr val="E2E2EA"/>
+                </a:solidFill>
+                <a:latin typeface="Calibri"/>
+              </a:defRPr>
+            </a:pPr>
+            <a:r>
+              <a:t>Achieving 61% retention rate within Apple benchmark ERA of 151-160%</a:t>
+            </a:r>
+          </a:p>
+        </p:txBody>
+      </p:sp>
+      <p:sp>
+        <p:nvSpPr>
+          <p:cNvPr id="10" name="TextBox 9"/>
+          <p:cNvSpPr txBox="1"/>
+          <p:nvPr/>
+        </p:nvSpPr>
+        <p:spPr>
+          <a:xfrm>
+            <a:off x="1097280" y="5486400"/>
+            <a:ext cx="9966960" cy="457200"/>
+          </a:xfrm>
+          <a:prstGeom prst="rect">
+            <a:avLst/>
+          </a:prstGeom>
+          <a:noFill/>
+        </p:spPr>
+        <p:txBody>
+          <a:bodyPr wrap="square">
+            <a:spAutoFit/>
+          </a:bodyPr>
+          <a:lstStyle/>
+          <a:p>
+            <a:pPr algn="l">
+              <a:defRPr sz="1300" b="0" i="1">
+                <a:solidFill>
                   <a:srgbClr val="8F95A3"/>
                 </a:solidFill>
                 <a:latin typeface="Calibri"/>
               </a:defRPr>
             </a:pPr>
             <a:r>
-              <a:t>March 11</a:t>
-            </a:r>
-          </a:p>
-        </p:txBody>
-      </p:sp>
-      <p:sp>
-        <p:nvSpPr>
-          <p:cNvPr id="7" name="TextBox 6"/>
-          <p:cNvSpPr txBox="1"/>
-          <p:nvPr/>
-        </p:nvSpPr>
-        <p:spPr>
-          <a:xfrm>
-            <a:off x="1097280" y="3291840"/>
-            <a:ext cx="9966960" cy="914400"/>
-          </a:xfrm>
-          <a:prstGeom prst="rect">
-            <a:avLst/>
-          </a:prstGeom>
-          <a:noFill/>
-        </p:spPr>
-        <p:txBody>
-          <a:bodyPr wrap="square">
-            <a:spAutoFit/>
-          </a:bodyPr>
-          <a:lstStyle/>
-          <a:p>
-            <a:pPr algn="l">
-              <a:defRPr sz="1600" b="0" i="0">
-                <a:solidFill>
-                  <a:srgbClr val="E2E2EA"/>
-                </a:solidFill>
-                <a:latin typeface="Calibri"/>
-              </a:defRPr>
-            </a:pPr>
-            <a:r>
-              <a:t>Wishing you an amazing day filled with joy and celebration!</a:t>
-            </a:r>
-          </a:p>
-        </p:txBody>
-      </p:sp>
-      <p:sp>
-        <p:nvSpPr>
-          <p:cNvPr id="8" name="TextBox 7"/>
-          <p:cNvSpPr txBox="1"/>
-          <p:nvPr/>
-        </p:nvSpPr>
-        <p:spPr>
-          <a:xfrm>
-            <a:off x="1097280" y="4572000"/>
-            <a:ext cx="9966960" cy="457200"/>
-          </a:xfrm>
-          <a:prstGeom prst="rect">
-            <a:avLst/>
-          </a:prstGeom>
-          <a:noFill/>
-        </p:spPr>
-        <p:txBody>
-          <a:bodyPr wrap="square">
-            <a:spAutoFit/>
-          </a:bodyPr>
-          <a:lstStyle/>
-          <a:p>
-            <a:pPr algn="l">
-              <a:defRPr sz="1400" b="0" i="1">
-                <a:solidFill>
-                  <a:srgbClr val="FFB72B"/>
-                </a:solidFill>
-                <a:latin typeface="Calibri"/>
-              </a:defRPr>
-            </a:pPr>
-            <a:r>
-              <a:t>With love, Your Appodeal Team 💜</a:t>
+              <a:t>💬 "Gaming division showing strong performance metrics"</a:t>
             </a:r>
           </a:p>
         </p:txBody>
@@ -3592,7 +3665,7 @@
             <a:avLst/>
           </a:prstGeom>
           <a:solidFill>
-            <a:srgbClr val="FFB72B"/>
+            <a:srgbClr val="673AB7"/>
           </a:solidFill>
           <a:ln>
             <a:noFill/>
@@ -3645,13 +3718,13 @@
             <a:pPr algn="l">
               <a:defRPr sz="1000" b="1">
                 <a:solidFill>
-                  <a:srgbClr val="FFB72B"/>
-                </a:solidFill>
-                <a:latin typeface="Calibri"/>
-              </a:defRPr>
-            </a:pPr>
-            <a:r>
-              <a:t>🎂  CELEBRATION</a:t>
+                  <a:srgbClr val="673AB7"/>
+                </a:solidFill>
+                <a:latin typeface="Calibri"/>
+              </a:defRPr>
+            </a:pPr>
+            <a:r>
+              <a:t>📖  OFFICE LIFE</a:t>
             </a:r>
           </a:p>
         </p:txBody>
@@ -3681,13 +3754,13 @@
             <a:pPr algn="l">
               <a:defRPr sz="3200" b="1" i="0">
                 <a:solidFill>
-                  <a:srgbClr val="FFB72B"/>
-                </a:solidFill>
-                <a:latin typeface="Calibri"/>
-              </a:defRPr>
-            </a:pPr>
-            <a:r>
-              <a:t>Happy Birthday!</a:t>
+                  <a:srgbClr val="673AB7"/>
+                </a:solidFill>
+                <a:latin typeface="Calibri"/>
+              </a:defRPr>
+            </a:pPr>
+            <a:r>
+              <a:t>Company Culture</a:t>
             </a:r>
           </a:p>
         </p:txBody>
@@ -3701,21 +3774,21 @@
         <p:spPr>
           <a:xfrm>
             <a:off x="1097280" y="2103120"/>
-            <a:ext cx="9966960" cy="640080"/>
-          </a:xfrm>
-          <a:prstGeom prst="rect">
-            <a:avLst/>
-          </a:prstGeom>
-          <a:noFill/>
-        </p:spPr>
-        <p:txBody>
-          <a:bodyPr wrap="square">
-            <a:spAutoFit/>
-          </a:bodyPr>
-          <a:lstStyle/>
-          <a:p>
-            <a:pPr algn="l">
-              <a:defRPr sz="2800" b="1" i="0">
+            <a:ext cx="9966960" cy="457200"/>
+          </a:xfrm>
+          <a:prstGeom prst="rect">
+            <a:avLst/>
+          </a:prstGeom>
+          <a:noFill/>
+        </p:spPr>
+        <p:txBody>
+          <a:bodyPr wrap="square">
+            <a:spAutoFit/>
+          </a:bodyPr>
+          <a:lstStyle/>
+          <a:p>
+            <a:pPr algn="l">
+              <a:defRPr sz="1800" b="1" i="0">
                 <a:solidFill>
                   <a:srgbClr val="FFFFFF"/>
                 </a:solidFill>
@@ -3723,7 +3796,7 @@
               </a:defRPr>
             </a:pPr>
             <a:r>
-              <a:t>Dmitry Feshchenko</a:t>
+              <a:t>Reading Club Growing Strong</a:t>
             </a:r>
           </a:p>
         </p:txBody>
@@ -3736,7 +3809,43 @@
         </p:nvSpPr>
         <p:spPr>
           <a:xfrm>
-            <a:off x="1097280" y="2743200"/>
+            <a:off x="1371600" y="2743200"/>
+            <a:ext cx="9692640" cy="1828800"/>
+          </a:xfrm>
+          <a:prstGeom prst="rect">
+            <a:avLst/>
+          </a:prstGeom>
+          <a:noFill/>
+        </p:spPr>
+        <p:txBody>
+          <a:bodyPr wrap="square">
+            <a:spAutoFit/>
+          </a:bodyPr>
+          <a:lstStyle/>
+          <a:p>
+            <a:pPr algn="l">
+              <a:defRPr sz="1500" b="0" i="1">
+                <a:solidFill>
+                  <a:srgbClr val="E2E2EA"/>
+                </a:solidFill>
+                <a:latin typeface="Calibri"/>
+              </a:defRPr>
+            </a:pPr>
+            <a:r>
+              <a:t>"The 4 Disciplines of Execution focus: WIGs, Leading/Lagging Metrics, Scorecards, Follow-through"</a:t>
+            </a:r>
+          </a:p>
+        </p:txBody>
+      </p:sp>
+      <p:sp>
+        <p:nvSpPr>
+          <p:cNvPr id="7" name="TextBox 6"/>
+          <p:cNvSpPr txBox="1"/>
+          <p:nvPr/>
+        </p:nvSpPr>
+        <p:spPr>
+          <a:xfrm>
+            <a:off x="1097280" y="4754880"/>
             <a:ext cx="9966960" cy="365760"/>
           </a:xfrm>
           <a:prstGeom prst="rect">
@@ -3759,43 +3868,7 @@
               </a:defRPr>
             </a:pPr>
             <a:r>
-              <a:t>March 11</a:t>
-            </a:r>
-          </a:p>
-        </p:txBody>
-      </p:sp>
-      <p:sp>
-        <p:nvSpPr>
-          <p:cNvPr id="7" name="TextBox 6"/>
-          <p:cNvSpPr txBox="1"/>
-          <p:nvPr/>
-        </p:nvSpPr>
-        <p:spPr>
-          <a:xfrm>
-            <a:off x="1097280" y="3291840"/>
-            <a:ext cx="9966960" cy="914400"/>
-          </a:xfrm>
-          <a:prstGeom prst="rect">
-            <a:avLst/>
-          </a:prstGeom>
-          <a:noFill/>
-        </p:spPr>
-        <p:txBody>
-          <a:bodyPr wrap="square">
-            <a:spAutoFit/>
-          </a:bodyPr>
-          <a:lstStyle/>
-          <a:p>
-            <a:pPr algn="l">
-              <a:defRPr sz="1600" b="0" i="0">
-                <a:solidFill>
-                  <a:srgbClr val="E2E2EA"/>
-                </a:solidFill>
-                <a:latin typeface="Calibri"/>
-              </a:defRPr>
-            </a:pPr>
-            <a:r>
-              <a:t>Wishing you an amazing day filled with joy and celebration!</a:t>
+              <a:t>— Pavel Golubev</a:t>
             </a:r>
           </a:p>
         </p:txBody>
@@ -3808,30 +3881,66 @@
         </p:nvSpPr>
         <p:spPr>
           <a:xfrm>
-            <a:off x="1097280" y="4572000"/>
-            <a:ext cx="9966960" cy="457200"/>
-          </a:xfrm>
-          <a:prstGeom prst="rect">
-            <a:avLst/>
-          </a:prstGeom>
-          <a:noFill/>
-        </p:spPr>
-        <p:txBody>
-          <a:bodyPr wrap="square">
-            <a:spAutoFit/>
-          </a:bodyPr>
-          <a:lstStyle/>
-          <a:p>
-            <a:pPr algn="l">
-              <a:defRPr sz="1400" b="0" i="1">
-                <a:solidFill>
-                  <a:srgbClr val="FFB72B"/>
-                </a:solidFill>
-                <a:latin typeface="Calibri"/>
-              </a:defRPr>
-            </a:pPr>
-            <a:r>
-              <a:t>With love, Your Appodeal Team 💜</a:t>
+            <a:off x="1097280" y="5212080"/>
+            <a:ext cx="9966960" cy="365760"/>
+          </a:xfrm>
+          <a:prstGeom prst="rect">
+            <a:avLst/>
+          </a:prstGeom>
+          <a:noFill/>
+        </p:spPr>
+        <p:txBody>
+          <a:bodyPr wrap="square">
+            <a:spAutoFit/>
+          </a:bodyPr>
+          <a:lstStyle/>
+          <a:p>
+            <a:pPr algn="l">
+              <a:defRPr sz="1400" b="1" i="0">
+                <a:solidFill>
+                  <a:srgbClr val="673AB7"/>
+                </a:solidFill>
+                <a:latin typeface="Calibri"/>
+              </a:defRPr>
+            </a:pPr>
+            <a:r>
+              <a:t>7</a:t>
+            </a:r>
+          </a:p>
+        </p:txBody>
+      </p:sp>
+      <p:sp>
+        <p:nvSpPr>
+          <p:cNvPr id="9" name="TextBox 8"/>
+          <p:cNvSpPr txBox="1"/>
+          <p:nvPr/>
+        </p:nvSpPr>
+        <p:spPr>
+          <a:xfrm>
+            <a:off x="1097280" y="5760720"/>
+            <a:ext cx="9966960" cy="274320"/>
+          </a:xfrm>
+          <a:prstGeom prst="rect">
+            <a:avLst/>
+          </a:prstGeom>
+          <a:noFill/>
+        </p:spPr>
+        <p:txBody>
+          <a:bodyPr wrap="square">
+            <a:spAutoFit/>
+          </a:bodyPr>
+          <a:lstStyle/>
+          <a:p>
+            <a:pPr algn="l">
+              <a:defRPr sz="1100" b="0" i="0">
+                <a:solidFill>
+                  <a:srgbClr val="5C6270"/>
+                </a:solidFill>
+                <a:latin typeface="Calibri"/>
+              </a:defRPr>
+            </a:pPr>
+            <a:r>
+              <a:t>#general</a:t>
             </a:r>
           </a:p>
         </p:txBody>
@@ -3877,7 +3986,7 @@
             <a:avLst/>
           </a:prstGeom>
           <a:solidFill>
-            <a:srgbClr val="FFB72B"/>
+            <a:srgbClr val="795548"/>
           </a:solidFill>
           <a:ln>
             <a:noFill/>
@@ -3930,13 +4039,13 @@
             <a:pPr algn="l">
               <a:defRPr sz="1000" b="1">
                 <a:solidFill>
-                  <a:srgbClr val="FFB72B"/>
-                </a:solidFill>
-                <a:latin typeface="Calibri"/>
-              </a:defRPr>
-            </a:pPr>
-            <a:r>
-              <a:t>🎂  CELEBRATION</a:t>
+                  <a:srgbClr val="795548"/>
+                </a:solidFill>
+                <a:latin typeface="Calibri"/>
+              </a:defRPr>
+            </a:pPr>
+            <a:r>
+              <a:t>🛡️  CLAPS</a:t>
             </a:r>
           </a:p>
         </p:txBody>
@@ -3966,13 +4075,13 @@
             <a:pPr algn="l">
               <a:defRPr sz="3200" b="1" i="0">
                 <a:solidFill>
-                  <a:srgbClr val="FFB72B"/>
-                </a:solidFill>
-                <a:latin typeface="Calibri"/>
-              </a:defRPr>
-            </a:pPr>
-            <a:r>
-              <a:t>Happy Birthday!</a:t>
+                  <a:srgbClr val="795548"/>
+                </a:solidFill>
+                <a:latin typeface="Calibri"/>
+              </a:defRPr>
+            </a:pPr>
+            <a:r>
+              <a:t>Security Excellence</a:t>
             </a:r>
           </a:p>
         </p:txBody>
@@ -3986,7 +4095,7 @@
         <p:spPr>
           <a:xfrm>
             <a:off x="1097280" y="2103120"/>
-            <a:ext cx="9966960" cy="640080"/>
+            <a:ext cx="2743200" cy="548640"/>
           </a:xfrm>
           <a:prstGeom prst="rect">
             <a:avLst/>
@@ -4002,77 +4111,113 @@
             <a:pPr algn="l">
               <a:defRPr sz="2800" b="1" i="0">
                 <a:solidFill>
+                  <a:srgbClr val="795548"/>
+                </a:solidFill>
+                <a:latin typeface="Calibri"/>
+              </a:defRPr>
+            </a:pPr>
+            <a:r>
+              <a:t>30</a:t>
+            </a:r>
+          </a:p>
+        </p:txBody>
+      </p:sp>
+      <p:sp>
+        <p:nvSpPr>
+          <p:cNvPr id="6" name="TextBox 5"/>
+          <p:cNvSpPr txBox="1"/>
+          <p:nvPr/>
+        </p:nvSpPr>
+        <p:spPr>
+          <a:xfrm>
+            <a:off x="1097280" y="2651760"/>
+            <a:ext cx="9966960" cy="365760"/>
+          </a:xfrm>
+          <a:prstGeom prst="rect">
+            <a:avLst/>
+          </a:prstGeom>
+          <a:noFill/>
+        </p:spPr>
+        <p:txBody>
+          <a:bodyPr wrap="square">
+            <a:spAutoFit/>
+          </a:bodyPr>
+          <a:lstStyle/>
+          <a:p>
+            <a:pPr algn="l">
+              <a:defRPr sz="1400" b="0" i="0">
+                <a:solidFill>
+                  <a:srgbClr val="E2E2EA"/>
+                </a:solidFill>
+                <a:latin typeface="Calibri"/>
+              </a:defRPr>
+            </a:pPr>
+            <a:r>
+              <a:t>from Gleb Krahotkin</a:t>
+            </a:r>
+          </a:p>
+        </p:txBody>
+      </p:sp>
+      <p:sp>
+        <p:nvSpPr>
+          <p:cNvPr id="7" name="TextBox 6"/>
+          <p:cNvSpPr txBox="1"/>
+          <p:nvPr/>
+        </p:nvSpPr>
+        <p:spPr>
+          <a:xfrm>
+            <a:off x="1097280" y="3108960"/>
+            <a:ext cx="9966960" cy="365760"/>
+          </a:xfrm>
+          <a:prstGeom prst="rect">
+            <a:avLst/>
+          </a:prstGeom>
+          <a:noFill/>
+        </p:spPr>
+        <p:txBody>
+          <a:bodyPr wrap="square">
+            <a:spAutoFit/>
+          </a:bodyPr>
+          <a:lstStyle/>
+          <a:p>
+            <a:pPr algn="l">
+              <a:defRPr sz="1400" b="1" i="0">
+                <a:solidFill>
                   <a:srgbClr val="FFFFFF"/>
                 </a:solidFill>
                 <a:latin typeface="Calibri"/>
               </a:defRPr>
             </a:pPr>
             <a:r>
-              <a:t>Giulia Galvani</a:t>
-            </a:r>
-          </a:p>
-        </p:txBody>
-      </p:sp>
-      <p:sp>
-        <p:nvSpPr>
-          <p:cNvPr id="6" name="TextBox 5"/>
-          <p:cNvSpPr txBox="1"/>
-          <p:nvPr/>
-        </p:nvSpPr>
-        <p:spPr>
-          <a:xfrm>
-            <a:off x="1097280" y="2743200"/>
-            <a:ext cx="9966960" cy="365760"/>
-          </a:xfrm>
-          <a:prstGeom prst="rect">
-            <a:avLst/>
-          </a:prstGeom>
-          <a:noFill/>
-        </p:spPr>
-        <p:txBody>
-          <a:bodyPr wrap="square">
-            <a:spAutoFit/>
-          </a:bodyPr>
-          <a:lstStyle/>
-          <a:p>
-            <a:pPr algn="l">
-              <a:defRPr sz="1400" b="0" i="0">
-                <a:solidFill>
-                  <a:srgbClr val="8F95A3"/>
-                </a:solidFill>
-                <a:latin typeface="Calibri"/>
-              </a:defRPr>
-            </a:pPr>
-            <a:r>
-              <a:t>March 11</a:t>
-            </a:r>
-          </a:p>
-        </p:txBody>
-      </p:sp>
-      <p:sp>
-        <p:nvSpPr>
-          <p:cNvPr id="7" name="TextBox 6"/>
-          <p:cNvSpPr txBox="1"/>
-          <p:nvPr/>
-        </p:nvSpPr>
-        <p:spPr>
-          <a:xfrm>
-            <a:off x="1097280" y="3291840"/>
-            <a:ext cx="9966960" cy="914400"/>
-          </a:xfrm>
-          <a:prstGeom prst="rect">
-            <a:avLst/>
-          </a:prstGeom>
-          <a:noFill/>
-        </p:spPr>
-        <p:txBody>
-          <a:bodyPr wrap="square">
-            <a:spAutoFit/>
-          </a:bodyPr>
-          <a:lstStyle/>
-          <a:p>
-            <a:pPr algn="l">
-              <a:defRPr sz="1600" b="0" i="0">
+              <a:t>to: Hierman Pelekh</a:t>
+            </a:r>
+          </a:p>
+        </p:txBody>
+      </p:sp>
+      <p:sp>
+        <p:nvSpPr>
+          <p:cNvPr id="8" name="TextBox 7"/>
+          <p:cNvSpPr txBox="1"/>
+          <p:nvPr/>
+        </p:nvSpPr>
+        <p:spPr>
+          <a:xfrm>
+            <a:off x="1097280" y="3749039"/>
+            <a:ext cx="9966960" cy="1097280"/>
+          </a:xfrm>
+          <a:prstGeom prst="rect">
+            <a:avLst/>
+          </a:prstGeom>
+          <a:noFill/>
+        </p:spPr>
+        <p:txBody>
+          <a:bodyPr wrap="square">
+            <a:spAutoFit/>
+          </a:bodyPr>
+          <a:lstStyle/>
+          <a:p>
+            <a:pPr algn="l">
+              <a:defRPr sz="1500" b="0" i="1">
                 <a:solidFill>
                   <a:srgbClr val="E2E2EA"/>
                 </a:solidFill>
@@ -4080,20 +4225,20 @@
               </a:defRPr>
             </a:pPr>
             <a:r>
-              <a:t>Wishing you an amazing day filled with joy and celebration!</a:t>
-            </a:r>
-          </a:p>
-        </p:txBody>
-      </p:sp>
-      <p:sp>
-        <p:nvSpPr>
-          <p:cNvPr id="8" name="TextBox 7"/>
-          <p:cNvSpPr txBox="1"/>
-          <p:nvPr/>
-        </p:nvSpPr>
-        <p:spPr>
-          <a:xfrm>
-            <a:off x="1097280" y="4572000"/>
+              <a:t>"Outstanding security implementations and infrastructure work"</a:t>
+            </a:r>
+          </a:p>
+        </p:txBody>
+      </p:sp>
+      <p:sp>
+        <p:nvSpPr>
+          <p:cNvPr id="9" name="TextBox 8"/>
+          <p:cNvSpPr txBox="1"/>
+          <p:nvPr/>
+        </p:nvSpPr>
+        <p:spPr>
+          <a:xfrm>
+            <a:off x="1097280" y="5120640"/>
             <a:ext cx="9966960" cy="457200"/>
           </a:xfrm>
           <a:prstGeom prst="rect">
@@ -4108,15 +4253,15 @@
           <a:lstStyle/>
           <a:p>
             <a:pPr algn="l">
-              <a:defRPr sz="1400" b="0" i="1">
-                <a:solidFill>
-                  <a:srgbClr val="FFB72B"/>
-                </a:solidFill>
-                <a:latin typeface="Calibri"/>
-              </a:defRPr>
-            </a:pPr>
-            <a:r>
-              <a:t>With love, Your Appodeal Team 💜</a:t>
+              <a:defRPr sz="1200" b="1" i="0">
+                <a:solidFill>
+                  <a:srgbClr val="795548"/>
+                </a:solidFill>
+                <a:latin typeface="Calibri"/>
+              </a:defRPr>
+            </a:pPr>
+            <a:r>
+              <a:t>SECURITY · RELIABILITY</a:t>
             </a:r>
           </a:p>
         </p:txBody>
@@ -4162,7 +4307,7 @@
             <a:avLst/>
           </a:prstGeom>
           <a:solidFill>
-            <a:srgbClr val="FFB72B"/>
+            <a:srgbClr val="607D8B"/>
           </a:solidFill>
           <a:ln>
             <a:noFill/>
@@ -4215,13 +4360,13 @@
             <a:pPr algn="l">
               <a:defRPr sz="1000" b="1">
                 <a:solidFill>
-                  <a:srgbClr val="FFB72B"/>
-                </a:solidFill>
-                <a:latin typeface="Calibri"/>
-              </a:defRPr>
-            </a:pPr>
-            <a:r>
-              <a:t>🎂  CELEBRATION</a:t>
+                  <a:srgbClr val="607D8B"/>
+                </a:solidFill>
+                <a:latin typeface="Calibri"/>
+              </a:defRPr>
+            </a:pPr>
+            <a:r>
+              <a:t>🤖  MILESTONE</a:t>
             </a:r>
           </a:p>
         </p:txBody>
@@ -4251,13 +4396,13 @@
             <a:pPr algn="l">
               <a:defRPr sz="3200" b="1" i="0">
                 <a:solidFill>
-                  <a:srgbClr val="FFB72B"/>
-                </a:solidFill>
-                <a:latin typeface="Calibri"/>
-              </a:defRPr>
-            </a:pPr>
-            <a:r>
-              <a:t>Happy Birthday!</a:t>
+                  <a:srgbClr val="607D8B"/>
+                </a:solidFill>
+                <a:latin typeface="Calibri"/>
+              </a:defRPr>
+            </a:pPr>
+            <a:r>
+              <a:t>AI Revolution</a:t>
             </a:r>
           </a:p>
         </p:txBody>
@@ -4271,21 +4416,93 @@
         <p:spPr>
           <a:xfrm>
             <a:off x="1097280" y="2103120"/>
-            <a:ext cx="9966960" cy="640080"/>
-          </a:xfrm>
-          <a:prstGeom prst="rect">
-            <a:avLst/>
-          </a:prstGeom>
-          <a:noFill/>
-        </p:spPr>
-        <p:txBody>
-          <a:bodyPr wrap="square">
-            <a:spAutoFit/>
-          </a:bodyPr>
-          <a:lstStyle/>
-          <a:p>
-            <a:pPr algn="l">
-              <a:defRPr sz="2800" b="1" i="0">
+            <a:ext cx="4572000" cy="822960"/>
+          </a:xfrm>
+          <a:prstGeom prst="rect">
+            <a:avLst/>
+          </a:prstGeom>
+          <a:noFill/>
+        </p:spPr>
+        <p:txBody>
+          <a:bodyPr wrap="square">
+            <a:spAutoFit/>
+          </a:bodyPr>
+          <a:lstStyle/>
+          <a:p>
+            <a:pPr algn="l">
+              <a:defRPr sz="5200" b="1" i="0">
+                <a:solidFill>
+                  <a:srgbClr val="607D8B"/>
+                </a:solidFill>
+                <a:latin typeface="Calibri"/>
+              </a:defRPr>
+            </a:pPr>
+            <a:r>
+              <a:t>3-6</a:t>
+            </a:r>
+          </a:p>
+        </p:txBody>
+      </p:sp>
+      <p:sp>
+        <p:nvSpPr>
+          <p:cNvPr id="6" name="TextBox 5"/>
+          <p:cNvSpPr txBox="1"/>
+          <p:nvPr/>
+        </p:nvSpPr>
+        <p:spPr>
+          <a:xfrm>
+            <a:off x="1097280" y="2926080"/>
+            <a:ext cx="4572000" cy="365760"/>
+          </a:xfrm>
+          <a:prstGeom prst="rect">
+            <a:avLst/>
+          </a:prstGeom>
+          <a:noFill/>
+        </p:spPr>
+        <p:txBody>
+          <a:bodyPr wrap="square">
+            <a:spAutoFit/>
+          </a:bodyPr>
+          <a:lstStyle/>
+          <a:p>
+            <a:pPr algn="l">
+              <a:defRPr sz="1100" b="0" i="0">
+                <a:solidFill>
+                  <a:srgbClr val="8F95A3"/>
+                </a:solidFill>
+                <a:latin typeface="Calibri"/>
+              </a:defRPr>
+            </a:pPr>
+            <a:r>
+              <a:t>months timeline</a:t>
+            </a:r>
+          </a:p>
+        </p:txBody>
+      </p:sp>
+      <p:sp>
+        <p:nvSpPr>
+          <p:cNvPr id="7" name="TextBox 6"/>
+          <p:cNvSpPr txBox="1"/>
+          <p:nvPr/>
+        </p:nvSpPr>
+        <p:spPr>
+          <a:xfrm>
+            <a:off x="1097280" y="3566160"/>
+            <a:ext cx="9966960" cy="457200"/>
+          </a:xfrm>
+          <a:prstGeom prst="rect">
+            <a:avLst/>
+          </a:prstGeom>
+          <a:noFill/>
+        </p:spPr>
+        <p:txBody>
+          <a:bodyPr wrap="square">
+            <a:spAutoFit/>
+          </a:bodyPr>
+          <a:lstStyle/>
+          <a:p>
+            <a:pPr algn="l">
+              <a:defRPr sz="1800" b="1" i="0">
                 <a:solidFill>
                   <a:srgbClr val="FFFFFF"/>
                 </a:solidFill>
@@ -4293,71 +4510,35 @@
               </a:defRPr>
             </a:pPr>
             <a:r>
-              <a:t>Katarzyna Raniszewska</a:t>
-            </a:r>
-          </a:p>
-        </p:txBody>
-      </p:sp>
-      <p:sp>
-        <p:nvSpPr>
-          <p:cNvPr id="6" name="TextBox 5"/>
-          <p:cNvSpPr txBox="1"/>
-          <p:nvPr/>
-        </p:nvSpPr>
-        <p:spPr>
-          <a:xfrm>
-            <a:off x="1097280" y="2743200"/>
-            <a:ext cx="9966960" cy="365760"/>
-          </a:xfrm>
-          <a:prstGeom prst="rect">
-            <a:avLst/>
-          </a:prstGeom>
-          <a:noFill/>
-        </p:spPr>
-        <p:txBody>
-          <a:bodyPr wrap="square">
-            <a:spAutoFit/>
-          </a:bodyPr>
-          <a:lstStyle/>
-          <a:p>
-            <a:pPr algn="l">
-              <a:defRPr sz="1400" b="0" i="0">
-                <a:solidFill>
-                  <a:srgbClr val="8F95A3"/>
-                </a:solidFill>
-                <a:latin typeface="Calibri"/>
-              </a:defRPr>
-            </a:pPr>
-            <a:r>
-              <a:t>March 11</a:t>
-            </a:r>
-          </a:p>
-        </p:txBody>
-      </p:sp>
-      <p:sp>
-        <p:nvSpPr>
-          <p:cNvPr id="7" name="TextBox 6"/>
-          <p:cNvSpPr txBox="1"/>
-          <p:nvPr/>
-        </p:nvSpPr>
-        <p:spPr>
-          <a:xfrm>
-            <a:off x="1097280" y="3291840"/>
-            <a:ext cx="9966960" cy="914400"/>
-          </a:xfrm>
-          <a:prstGeom prst="rect">
-            <a:avLst/>
-          </a:prstGeom>
-          <a:noFill/>
-        </p:spPr>
-        <p:txBody>
-          <a:bodyPr wrap="square">
-            <a:spAutoFit/>
-          </a:bodyPr>
-          <a:lstStyle/>
-          <a:p>
-            <a:pPr algn="l">
-              <a:defRPr sz="1600" b="0" i="0">
+              <a:t>Every Employee + 5-10 AI Agents</a:t>
+            </a:r>
+          </a:p>
+        </p:txBody>
+      </p:sp>
+      <p:sp>
+        <p:nvSpPr>
+          <p:cNvPr id="8" name="TextBox 7"/>
+          <p:cNvSpPr txBox="1"/>
+          <p:nvPr/>
+        </p:nvSpPr>
+        <p:spPr>
+          <a:xfrm>
+            <a:off x="1097280" y="4206240"/>
+            <a:ext cx="9966960" cy="1371600"/>
+          </a:xfrm>
+          <a:prstGeom prst="rect">
+            <a:avLst/>
+          </a:prstGeom>
+          <a:noFill/>
+        </p:spPr>
+        <p:txBody>
+          <a:bodyPr wrap="square">
+            <a:spAutoFit/>
+          </a:bodyPr>
+          <a:lstStyle/>
+          <a:p>
+            <a:pPr algn="l">
+              <a:defRPr sz="1500" b="0" i="0">
                 <a:solidFill>
                   <a:srgbClr val="E2E2EA"/>
                 </a:solidFill>
@@ -4365,43 +4546,7 @@
               </a:defRPr>
             </a:pPr>
             <a:r>
-              <a:t>Wishing you an amazing day filled with joy and celebration!</a:t>
-            </a:r>
-          </a:p>
-        </p:txBody>
-      </p:sp>
-      <p:sp>
-        <p:nvSpPr>
-          <p:cNvPr id="8" name="TextBox 7"/>
-          <p:cNvSpPr txBox="1"/>
-          <p:nvPr/>
-        </p:nvSpPr>
-        <p:spPr>
-          <a:xfrm>
-            <a:off x="1097280" y="4572000"/>
-            <a:ext cx="9966960" cy="457200"/>
-          </a:xfrm>
-          <a:prstGeom prst="rect">
-            <a:avLst/>
-          </a:prstGeom>
-          <a:noFill/>
-        </p:spPr>
-        <p:txBody>
-          <a:bodyPr wrap="square">
-            <a:spAutoFit/>
-          </a:bodyPr>
-          <a:lstStyle/>
-          <a:p>
-            <a:pPr algn="l">
-              <a:defRPr sz="1400" b="0" i="1">
-                <a:solidFill>
-                  <a:srgbClr val="FFB72B"/>
-                </a:solidFill>
-                <a:latin typeface="Calibri"/>
-              </a:defRPr>
-            </a:pPr>
-            <a:r>
-              <a:t>With love, Your Appodeal Team 💜</a:t>
+              <a:t>Transforming how we work with AI integration across all departments</a:t>
             </a:r>
           </a:p>
         </p:txBody>
@@ -4447,7 +4592,7 @@
             <a:avLst/>
           </a:prstGeom>
           <a:solidFill>
-            <a:srgbClr val="FFB72B"/>
+            <a:srgbClr val="9C27B0"/>
           </a:solidFill>
           <a:ln>
             <a:noFill/>
@@ -4500,13 +4645,13 @@
             <a:pPr algn="l">
               <a:defRPr sz="1000" b="1">
                 <a:solidFill>
-                  <a:srgbClr val="FFB72B"/>
-                </a:solidFill>
-                <a:latin typeface="Calibri"/>
-              </a:defRPr>
-            </a:pPr>
-            <a:r>
-              <a:t>🎂  CELEBRATION</a:t>
+                  <a:srgbClr val="9C27B0"/>
+                </a:solidFill>
+                <a:latin typeface="Calibri"/>
+              </a:defRPr>
+            </a:pPr>
+            <a:r>
+              <a:t>💎  WIN</a:t>
             </a:r>
           </a:p>
         </p:txBody>
@@ -4536,13 +4681,13 @@
             <a:pPr algn="l">
               <a:defRPr sz="3200" b="1" i="0">
                 <a:solidFill>
-                  <a:srgbClr val="FFB72B"/>
-                </a:solidFill>
-                <a:latin typeface="Calibri"/>
-              </a:defRPr>
-            </a:pPr>
-            <a:r>
-              <a:t>Happy Birthday!</a:t>
+                  <a:srgbClr val="9C27B0"/>
+                </a:solidFill>
+                <a:latin typeface="Calibri"/>
+              </a:defRPr>
+            </a:pPr>
+            <a:r>
+              <a:t>Product Success</a:t>
             </a:r>
           </a:p>
         </p:txBody>
@@ -4556,21 +4701,129 @@
         <p:spPr>
           <a:xfrm>
             <a:off x="1097280" y="2103120"/>
-            <a:ext cx="9966960" cy="640080"/>
-          </a:xfrm>
-          <a:prstGeom prst="rect">
-            <a:avLst/>
-          </a:prstGeom>
-          <a:noFill/>
-        </p:spPr>
-        <p:txBody>
-          <a:bodyPr wrap="square">
-            <a:spAutoFit/>
-          </a:bodyPr>
-          <a:lstStyle/>
-          <a:p>
-            <a:pPr algn="l">
-              <a:defRPr sz="2800" b="1" i="0">
+            <a:ext cx="4572000" cy="822960"/>
+          </a:xfrm>
+          <a:prstGeom prst="rect">
+            <a:avLst/>
+          </a:prstGeom>
+          <a:noFill/>
+        </p:spPr>
+        <p:txBody>
+          <a:bodyPr wrap="square">
+            <a:spAutoFit/>
+          </a:bodyPr>
+          <a:lstStyle/>
+          <a:p>
+            <a:pPr algn="l">
+              <a:defRPr sz="4800" b="1" i="0">
+                <a:solidFill>
+                  <a:srgbClr val="9C27B0"/>
+                </a:solidFill>
+                <a:latin typeface="Calibri"/>
+              </a:defRPr>
+            </a:pPr>
+            <a:r>
+              <a:t>21.67</a:t>
+            </a:r>
+          </a:p>
+        </p:txBody>
+      </p:sp>
+      <p:sp>
+        <p:nvSpPr>
+          <p:cNvPr id="6" name="TextBox 5"/>
+          <p:cNvSpPr txBox="1"/>
+          <p:nvPr/>
+        </p:nvSpPr>
+        <p:spPr>
+          <a:xfrm>
+            <a:off x="1097280" y="2834640"/>
+            <a:ext cx="4572000" cy="365760"/>
+          </a:xfrm>
+          <a:prstGeom prst="rect">
+            <a:avLst/>
+          </a:prstGeom>
+          <a:noFill/>
+        </p:spPr>
+        <p:txBody>
+          <a:bodyPr wrap="square">
+            <a:spAutoFit/>
+          </a:bodyPr>
+          <a:lstStyle/>
+          <a:p>
+            <a:pPr algn="l">
+              <a:defRPr sz="1200" b="0" i="0">
+                <a:solidFill>
+                  <a:srgbClr val="8F95A3"/>
+                </a:solidFill>
+                <a:latin typeface="Calibri"/>
+              </a:defRPr>
+            </a:pPr>
+            <a:r>
+              <a:t>% improvement</a:t>
+            </a:r>
+          </a:p>
+        </p:txBody>
+      </p:sp>
+      <p:sp>
+        <p:nvSpPr>
+          <p:cNvPr id="7" name="TextBox 6"/>
+          <p:cNvSpPr txBox="1"/>
+          <p:nvPr/>
+        </p:nvSpPr>
+        <p:spPr>
+          <a:xfrm>
+            <a:off x="1097280" y="3291840"/>
+            <a:ext cx="9966960" cy="365760"/>
+          </a:xfrm>
+          <a:prstGeom prst="rect">
+            <a:avLst/>
+          </a:prstGeom>
+          <a:noFill/>
+        </p:spPr>
+        <p:txBody>
+          <a:bodyPr wrap="square">
+            <a:spAutoFit/>
+          </a:bodyPr>
+          <a:lstStyle/>
+          <a:p>
+            <a:pPr algn="l">
+              <a:defRPr sz="1400" b="0" i="0">
+                <a:solidFill>
+                  <a:srgbClr val="E2E2EA"/>
+                </a:solidFill>
+                <a:latin typeface="Calibri"/>
+              </a:defRPr>
+            </a:pPr>
+            <a:r>
+              <a:t>by Solitaire Team</a:t>
+            </a:r>
+          </a:p>
+        </p:txBody>
+      </p:sp>
+      <p:sp>
+        <p:nvSpPr>
+          <p:cNvPr id="8" name="TextBox 7"/>
+          <p:cNvSpPr txBox="1"/>
+          <p:nvPr/>
+        </p:nvSpPr>
+        <p:spPr>
+          <a:xfrm>
+            <a:off x="1097280" y="3840480"/>
+            <a:ext cx="9966960" cy="457200"/>
+          </a:xfrm>
+          <a:prstGeom prst="rect">
+            <a:avLst/>
+          </a:prstGeom>
+          <a:noFill/>
+        </p:spPr>
+        <p:txBody>
+          <a:bodyPr wrap="square">
+            <a:spAutoFit/>
+          </a:bodyPr>
+          <a:lstStyle/>
+          <a:p>
+            <a:pPr algn="l">
+              <a:defRPr sz="1800" b="1" i="0">
                 <a:solidFill>
                   <a:srgbClr val="FFFFFF"/>
                 </a:solidFill>
@@ -4578,21 +4831,21 @@
               </a:defRPr>
             </a:pPr>
             <a:r>
-              <a:t>Radu Stoia</a:t>
-            </a:r>
-          </a:p>
-        </p:txBody>
-      </p:sp>
-      <p:sp>
-        <p:nvSpPr>
-          <p:cNvPr id="6" name="TextBox 5"/>
-          <p:cNvSpPr txBox="1"/>
-          <p:nvPr/>
-        </p:nvSpPr>
-        <p:spPr>
-          <a:xfrm>
-            <a:off x="1097280" y="2743200"/>
-            <a:ext cx="9966960" cy="365760"/>
+              <a:t>Solitaire v540 Retention Boost!</a:t>
+            </a:r>
+          </a:p>
+        </p:txBody>
+      </p:sp>
+      <p:sp>
+        <p:nvSpPr>
+          <p:cNvPr id="9" name="TextBox 8"/>
+          <p:cNvSpPr txBox="1"/>
+          <p:nvPr/>
+        </p:nvSpPr>
+        <p:spPr>
+          <a:xfrm>
+            <a:off x="1097280" y="4389120"/>
+            <a:ext cx="9966960" cy="914400"/>
           </a:xfrm>
           <a:prstGeom prst="rect">
             <a:avLst/>
@@ -4608,85 +4861,49 @@
             <a:pPr algn="l">
               <a:defRPr sz="1400" b="0" i="0">
                 <a:solidFill>
+                  <a:srgbClr val="E2E2EA"/>
+                </a:solidFill>
+                <a:latin typeface="Calibri"/>
+              </a:defRPr>
+            </a:pPr>
+            <a:r>
+              <a:t>Significant improvement in D7 retention rates</a:t>
+            </a:r>
+          </a:p>
+        </p:txBody>
+      </p:sp>
+      <p:sp>
+        <p:nvSpPr>
+          <p:cNvPr id="10" name="TextBox 9"/>
+          <p:cNvSpPr txBox="1"/>
+          <p:nvPr/>
+        </p:nvSpPr>
+        <p:spPr>
+          <a:xfrm>
+            <a:off x="1097280" y="5486400"/>
+            <a:ext cx="9966960" cy="457200"/>
+          </a:xfrm>
+          <a:prstGeom prst="rect">
+            <a:avLst/>
+          </a:prstGeom>
+          <a:noFill/>
+        </p:spPr>
+        <p:txBody>
+          <a:bodyPr wrap="square">
+            <a:spAutoFit/>
+          </a:bodyPr>
+          <a:lstStyle/>
+          <a:p>
+            <a:pPr algn="l">
+              <a:defRPr sz="1300" b="0" i="1">
+                <a:solidFill>
                   <a:srgbClr val="8F95A3"/>
                 </a:solidFill>
                 <a:latin typeface="Calibri"/>
               </a:defRPr>
             </a:pPr>
             <a:r>
-              <a:t>March 11</a:t>
-            </a:r>
-          </a:p>
-        </p:txBody>
-      </p:sp>
-      <p:sp>
-        <p:nvSpPr>
-          <p:cNvPr id="7" name="TextBox 6"/>
-          <p:cNvSpPr txBox="1"/>
-          <p:nvPr/>
-        </p:nvSpPr>
-        <p:spPr>
-          <a:xfrm>
-            <a:off x="1097280" y="3291840"/>
-            <a:ext cx="9966960" cy="914400"/>
-          </a:xfrm>
-          <a:prstGeom prst="rect">
-            <a:avLst/>
-          </a:prstGeom>
-          <a:noFill/>
-        </p:spPr>
-        <p:txBody>
-          <a:bodyPr wrap="square">
-            <a:spAutoFit/>
-          </a:bodyPr>
-          <a:lstStyle/>
-          <a:p>
-            <a:pPr algn="l">
-              <a:defRPr sz="1600" b="0" i="0">
-                <a:solidFill>
-                  <a:srgbClr val="E2E2EA"/>
-                </a:solidFill>
-                <a:latin typeface="Calibri"/>
-              </a:defRPr>
-            </a:pPr>
-            <a:r>
-              <a:t>Wishing you an amazing day filled with joy and celebration!</a:t>
-            </a:r>
-          </a:p>
-        </p:txBody>
-      </p:sp>
-      <p:sp>
-        <p:nvSpPr>
-          <p:cNvPr id="8" name="TextBox 7"/>
-          <p:cNvSpPr txBox="1"/>
-          <p:nvPr/>
-        </p:nvSpPr>
-        <p:spPr>
-          <a:xfrm>
-            <a:off x="1097280" y="4572000"/>
-            <a:ext cx="9966960" cy="457200"/>
-          </a:xfrm>
-          <a:prstGeom prst="rect">
-            <a:avLst/>
-          </a:prstGeom>
-          <a:noFill/>
-        </p:spPr>
-        <p:txBody>
-          <a:bodyPr wrap="square">
-            <a:spAutoFit/>
-          </a:bodyPr>
-          <a:lstStyle/>
-          <a:p>
-            <a:pPr algn="l">
-              <a:defRPr sz="1400" b="0" i="1">
-                <a:solidFill>
-                  <a:srgbClr val="FFB72B"/>
-                </a:solidFill>
-                <a:latin typeface="Calibri"/>
-              </a:defRPr>
-            </a:pPr>
-            <a:r>
-              <a:t>With love, Your Appodeal Team 💜</a:t>
+              <a:t>💬 "Product optimization delivering measurable results"</a:t>
             </a:r>
           </a:p>
         </p:txBody>
@@ -4732,7 +4949,7 @@
             <a:avLst/>
           </a:prstGeom>
           <a:solidFill>
-            <a:srgbClr val="FFB72B"/>
+            <a:srgbClr val="FFC107"/>
           </a:solidFill>
           <a:ln>
             <a:noFill/>
@@ -4785,13 +5002,13 @@
             <a:pPr algn="l">
               <a:defRPr sz="1000" b="1">
                 <a:solidFill>
-                  <a:srgbClr val="FFB72B"/>
-                </a:solidFill>
-                <a:latin typeface="Calibri"/>
-              </a:defRPr>
-            </a:pPr>
-            <a:r>
-              <a:t>🎂  CELEBRATION</a:t>
+                  <a:srgbClr val="FFC107"/>
+                </a:solidFill>
+                <a:latin typeface="Calibri"/>
+              </a:defRPr>
+            </a:pPr>
+            <a:r>
+              <a:t>⭐  CLAPS</a:t>
             </a:r>
           </a:p>
         </p:txBody>
@@ -4821,13 +5038,13 @@
             <a:pPr algn="l">
               <a:defRPr sz="3200" b="1" i="0">
                 <a:solidFill>
-                  <a:srgbClr val="FFB72B"/>
-                </a:solidFill>
-                <a:latin typeface="Calibri"/>
-              </a:defRPr>
-            </a:pPr>
-            <a:r>
-              <a:t>Happy Birthday!</a:t>
+                  <a:srgbClr val="FFC107"/>
+                </a:solidFill>
+                <a:latin typeface="Calibri"/>
+              </a:defRPr>
+            </a:pPr>
+            <a:r>
+              <a:t>Multi-Team Recognition</a:t>
             </a:r>
           </a:p>
         </p:txBody>
@@ -4841,7 +5058,7 @@
         <p:spPr>
           <a:xfrm>
             <a:off x="1097280" y="2103120"/>
-            <a:ext cx="9966960" cy="640080"/>
+            <a:ext cx="2743200" cy="548640"/>
           </a:xfrm>
           <a:prstGeom prst="rect">
             <a:avLst/>
@@ -4857,77 +5074,113 @@
             <a:pPr algn="l">
               <a:defRPr sz="2800" b="1" i="0">
                 <a:solidFill>
+                  <a:srgbClr val="FFC107"/>
+                </a:solidFill>
+                <a:latin typeface="Calibri"/>
+              </a:defRPr>
+            </a:pPr>
+            <a:r>
+              <a:t>25</a:t>
+            </a:r>
+          </a:p>
+        </p:txBody>
+      </p:sp>
+      <p:sp>
+        <p:nvSpPr>
+          <p:cNvPr id="6" name="TextBox 5"/>
+          <p:cNvSpPr txBox="1"/>
+          <p:nvPr/>
+        </p:nvSpPr>
+        <p:spPr>
+          <a:xfrm>
+            <a:off x="1097280" y="2651760"/>
+            <a:ext cx="9966960" cy="365760"/>
+          </a:xfrm>
+          <a:prstGeom prst="rect">
+            <a:avLst/>
+          </a:prstGeom>
+          <a:noFill/>
+        </p:spPr>
+        <p:txBody>
+          <a:bodyPr wrap="square">
+            <a:spAutoFit/>
+          </a:bodyPr>
+          <a:lstStyle/>
+          <a:p>
+            <a:pPr algn="l">
+              <a:defRPr sz="1400" b="0" i="0">
+                <a:solidFill>
+                  <a:srgbClr val="E2E2EA"/>
+                </a:solidFill>
+                <a:latin typeface="Calibri"/>
+              </a:defRPr>
+            </a:pPr>
+            <a:r>
+              <a:t>from Dima</a:t>
+            </a:r>
+          </a:p>
+        </p:txBody>
+      </p:sp>
+      <p:sp>
+        <p:nvSpPr>
+          <p:cNvPr id="7" name="TextBox 6"/>
+          <p:cNvSpPr txBox="1"/>
+          <p:nvPr/>
+        </p:nvSpPr>
+        <p:spPr>
+          <a:xfrm>
+            <a:off x="1097280" y="3108960"/>
+            <a:ext cx="9966960" cy="365760"/>
+          </a:xfrm>
+          <a:prstGeom prst="rect">
+            <a:avLst/>
+          </a:prstGeom>
+          <a:noFill/>
+        </p:spPr>
+        <p:txBody>
+          <a:bodyPr wrap="square">
+            <a:spAutoFit/>
+          </a:bodyPr>
+          <a:lstStyle/>
+          <a:p>
+            <a:pPr algn="l">
+              <a:defRPr sz="1400" b="1" i="0">
+                <a:solidFill>
                   <a:srgbClr val="FFFFFF"/>
                 </a:solidFill>
                 <a:latin typeface="Calibri"/>
               </a:defRPr>
             </a:pPr>
             <a:r>
-              <a:t>Eduard Malkhasyan</a:t>
-            </a:r>
-          </a:p>
-        </p:txBody>
-      </p:sp>
-      <p:sp>
-        <p:nvSpPr>
-          <p:cNvPr id="6" name="TextBox 5"/>
-          <p:cNvSpPr txBox="1"/>
-          <p:nvPr/>
-        </p:nvSpPr>
-        <p:spPr>
-          <a:xfrm>
-            <a:off x="1097280" y="2743200"/>
-            <a:ext cx="9966960" cy="365760"/>
-          </a:xfrm>
-          <a:prstGeom prst="rect">
-            <a:avLst/>
-          </a:prstGeom>
-          <a:noFill/>
-        </p:spPr>
-        <p:txBody>
-          <a:bodyPr wrap="square">
-            <a:spAutoFit/>
-          </a:bodyPr>
-          <a:lstStyle/>
-          <a:p>
-            <a:pPr algn="l">
-              <a:defRPr sz="1400" b="0" i="0">
-                <a:solidFill>
-                  <a:srgbClr val="8F95A3"/>
-                </a:solidFill>
-                <a:latin typeface="Calibri"/>
-              </a:defRPr>
-            </a:pPr>
-            <a:r>
-              <a:t>March 11</a:t>
-            </a:r>
-          </a:p>
-        </p:txBody>
-      </p:sp>
-      <p:sp>
-        <p:nvSpPr>
-          <p:cNvPr id="7" name="TextBox 6"/>
-          <p:cNvSpPr txBox="1"/>
-          <p:nvPr/>
-        </p:nvSpPr>
-        <p:spPr>
-          <a:xfrm>
-            <a:off x="1097280" y="3291840"/>
-            <a:ext cx="9966960" cy="914400"/>
-          </a:xfrm>
-          <a:prstGeom prst="rect">
-            <a:avLst/>
-          </a:prstGeom>
-          <a:noFill/>
-        </p:spPr>
-        <p:txBody>
-          <a:bodyPr wrap="square">
-            <a:spAutoFit/>
-          </a:bodyPr>
-          <a:lstStyle/>
-          <a:p>
-            <a:pPr algn="l">
-              <a:defRPr sz="1600" b="0" i="0">
+              <a:t>to: Irina Koval</a:t>
+            </a:r>
+          </a:p>
+        </p:txBody>
+      </p:sp>
+      <p:sp>
+        <p:nvSpPr>
+          <p:cNvPr id="8" name="TextBox 7"/>
+          <p:cNvSpPr txBox="1"/>
+          <p:nvPr/>
+        </p:nvSpPr>
+        <p:spPr>
+          <a:xfrm>
+            <a:off x="1097280" y="3749039"/>
+            <a:ext cx="9966960" cy="1097280"/>
+          </a:xfrm>
+          <a:prstGeom prst="rect">
+            <a:avLst/>
+          </a:prstGeom>
+          <a:noFill/>
+        </p:spPr>
+        <p:txBody>
+          <a:bodyPr wrap="square">
+            <a:spAutoFit/>
+          </a:bodyPr>
+          <a:lstStyle/>
+          <a:p>
+            <a:pPr algn="l">
+              <a:defRPr sz="1500" b="0" i="1">
                 <a:solidFill>
                   <a:srgbClr val="E2E2EA"/>
                 </a:solidFill>
@@ -4935,20 +5188,20 @@
               </a:defRPr>
             </a:pPr>
             <a:r>
-              <a:t>Wishing you an amazing day filled with joy and celebration!</a:t>
-            </a:r>
-          </a:p>
-        </p:txBody>
-      </p:sp>
-      <p:sp>
-        <p:nvSpPr>
-          <p:cNvPr id="8" name="TextBox 7"/>
-          <p:cNvSpPr txBox="1"/>
-          <p:nvPr/>
-        </p:nvSpPr>
-        <p:spPr>
-          <a:xfrm>
-            <a:off x="1097280" y="4572000"/>
+              <a:t>"Exceptional cross-functional collaboration and results delivery"</a:t>
+            </a:r>
+          </a:p>
+        </p:txBody>
+      </p:sp>
+      <p:sp>
+        <p:nvSpPr>
+          <p:cNvPr id="9" name="TextBox 8"/>
+          <p:cNvSpPr txBox="1"/>
+          <p:nvPr/>
+        </p:nvSpPr>
+        <p:spPr>
+          <a:xfrm>
+            <a:off x="1097280" y="5120640"/>
             <a:ext cx="9966960" cy="457200"/>
           </a:xfrm>
           <a:prstGeom prst="rect">
@@ -4963,15 +5216,15 @@
           <a:lstStyle/>
           <a:p>
             <a:pPr algn="l">
-              <a:defRPr sz="1400" b="0" i="1">
-                <a:solidFill>
-                  <a:srgbClr val="FFB72B"/>
-                </a:solidFill>
-                <a:latin typeface="Calibri"/>
-              </a:defRPr>
-            </a:pPr>
-            <a:r>
-              <a:t>With love, Your Appodeal Team 💜</a:t>
+              <a:defRPr sz="1200" b="1" i="0">
+                <a:solidFill>
+                  <a:srgbClr val="FFC107"/>
+                </a:solidFill>
+                <a:latin typeface="Calibri"/>
+              </a:defRPr>
+            </a:pPr>
+            <a:r>
+              <a:t>COLLABORATION · RESULTS</a:t>
             </a:r>
           </a:p>
         </p:txBody>
@@ -5017,7 +5270,7 @@
             <a:avLst/>
           </a:prstGeom>
           <a:solidFill>
-            <a:srgbClr val="FFB72B"/>
+            <a:srgbClr val="F44336"/>
           </a:solidFill>
           <a:ln>
             <a:noFill/>
@@ -5070,13 +5323,13 @@
             <a:pPr algn="l">
               <a:defRPr sz="1000" b="1">
                 <a:solidFill>
-                  <a:srgbClr val="FFB72B"/>
-                </a:solidFill>
-                <a:latin typeface="Calibri"/>
-              </a:defRPr>
-            </a:pPr>
-            <a:r>
-              <a:t>🎂  CELEBRATION</a:t>
+                  <a:srgbClr val="F44336"/>
+                </a:solidFill>
+                <a:latin typeface="Calibri"/>
+              </a:defRPr>
+            </a:pPr>
+            <a:r>
+              <a:t>🛡️  MILESTONE</a:t>
             </a:r>
           </a:p>
         </p:txBody>
@@ -5106,13 +5359,13 @@
             <a:pPr algn="l">
               <a:defRPr sz="3200" b="1" i="0">
                 <a:solidFill>
-                  <a:srgbClr val="FFB72B"/>
-                </a:solidFill>
-                <a:latin typeface="Calibri"/>
-              </a:defRPr>
-            </a:pPr>
-            <a:r>
-              <a:t>Happy Birthday!</a:t>
+                  <a:srgbClr val="F44336"/>
+                </a:solidFill>
+                <a:latin typeface="Calibri"/>
+              </a:defRPr>
+            </a:pPr>
+            <a:r>
+              <a:t>Security Achievement</a:t>
             </a:r>
           </a:p>
         </p:txBody>
@@ -5126,21 +5379,93 @@
         <p:spPr>
           <a:xfrm>
             <a:off x="1097280" y="2103120"/>
-            <a:ext cx="9966960" cy="640080"/>
-          </a:xfrm>
-          <a:prstGeom prst="rect">
-            <a:avLst/>
-          </a:prstGeom>
-          <a:noFill/>
-        </p:spPr>
-        <p:txBody>
-          <a:bodyPr wrap="square">
-            <a:spAutoFit/>
-          </a:bodyPr>
-          <a:lstStyle/>
-          <a:p>
-            <a:pPr algn="l">
-              <a:defRPr sz="2800" b="1" i="0">
+            <a:ext cx="4572000" cy="822960"/>
+          </a:xfrm>
+          <a:prstGeom prst="rect">
+            <a:avLst/>
+          </a:prstGeom>
+          <a:noFill/>
+        </p:spPr>
+        <p:txBody>
+          <a:bodyPr wrap="square">
+            <a:spAutoFit/>
+          </a:bodyPr>
+          <a:lstStyle/>
+          <a:p>
+            <a:pPr algn="l">
+              <a:defRPr sz="5200" b="1" i="0">
+                <a:solidFill>
+                  <a:srgbClr val="F44336"/>
+                </a:solidFill>
+                <a:latin typeface="Calibri"/>
+              </a:defRPr>
+            </a:pPr>
+            <a:r>
+              <a:t>22% → 4%</a:t>
+            </a:r>
+          </a:p>
+        </p:txBody>
+      </p:sp>
+      <p:sp>
+        <p:nvSpPr>
+          <p:cNvPr id="6" name="TextBox 5"/>
+          <p:cNvSpPr txBox="1"/>
+          <p:nvPr/>
+        </p:nvSpPr>
+        <p:spPr>
+          <a:xfrm>
+            <a:off x="1097280" y="2926080"/>
+            <a:ext cx="4572000" cy="365760"/>
+          </a:xfrm>
+          <a:prstGeom prst="rect">
+            <a:avLst/>
+          </a:prstGeom>
+          <a:noFill/>
+        </p:spPr>
+        <p:txBody>
+          <a:bodyPr wrap="square">
+            <a:spAutoFit/>
+          </a:bodyPr>
+          <a:lstStyle/>
+          <a:p>
+            <a:pPr algn="l">
+              <a:defRPr sz="1100" b="0" i="0">
+                <a:solidFill>
+                  <a:srgbClr val="8F95A3"/>
+                </a:solidFill>
+                <a:latin typeface="Calibri"/>
+              </a:defRPr>
+            </a:pPr>
+            <a:r>
+              <a:t>fraud reduction</a:t>
+            </a:r>
+          </a:p>
+        </p:txBody>
+      </p:sp>
+      <p:sp>
+        <p:nvSpPr>
+          <p:cNvPr id="7" name="TextBox 6"/>
+          <p:cNvSpPr txBox="1"/>
+          <p:nvPr/>
+        </p:nvSpPr>
+        <p:spPr>
+          <a:xfrm>
+            <a:off x="1097280" y="3566160"/>
+            <a:ext cx="9966960" cy="457200"/>
+          </a:xfrm>
+          <a:prstGeom prst="rect">
+            <a:avLst/>
+          </a:prstGeom>
+          <a:noFill/>
+        </p:spPr>
+        <p:txBody>
+          <a:bodyPr wrap="square">
+            <a:spAutoFit/>
+          </a:bodyPr>
+          <a:lstStyle/>
+          <a:p>
+            <a:pPr algn="l">
+              <a:defRPr sz="1800" b="1" i="0">
                 <a:solidFill>
                   <a:srgbClr val="FFFFFF"/>
                 </a:solidFill>
@@ -5148,71 +5473,35 @@
               </a:defRPr>
             </a:pPr>
             <a:r>
-              <a:t>Daryna Rudavka</a:t>
-            </a:r>
-          </a:p>
-        </p:txBody>
-      </p:sp>
-      <p:sp>
-        <p:nvSpPr>
-          <p:cNvPr id="6" name="TextBox 5"/>
-          <p:cNvSpPr txBox="1"/>
-          <p:nvPr/>
-        </p:nvSpPr>
-        <p:spPr>
-          <a:xfrm>
-            <a:off x="1097280" y="2743200"/>
-            <a:ext cx="9966960" cy="365760"/>
-          </a:xfrm>
-          <a:prstGeom prst="rect">
-            <a:avLst/>
-          </a:prstGeom>
-          <a:noFill/>
-        </p:spPr>
-        <p:txBody>
-          <a:bodyPr wrap="square">
-            <a:spAutoFit/>
-          </a:bodyPr>
-          <a:lstStyle/>
-          <a:p>
-            <a:pPr algn="l">
-              <a:defRPr sz="1400" b="0" i="0">
-                <a:solidFill>
-                  <a:srgbClr val="8F95A3"/>
-                </a:solidFill>
-                <a:latin typeface="Calibri"/>
-              </a:defRPr>
-            </a:pPr>
-            <a:r>
-              <a:t>March 11</a:t>
-            </a:r>
-          </a:p>
-        </p:txBody>
-      </p:sp>
-      <p:sp>
-        <p:nvSpPr>
-          <p:cNvPr id="7" name="TextBox 6"/>
-          <p:cNvSpPr txBox="1"/>
-          <p:nvPr/>
-        </p:nvSpPr>
-        <p:spPr>
-          <a:xfrm>
-            <a:off x="1097280" y="3291840"/>
-            <a:ext cx="9966960" cy="914400"/>
-          </a:xfrm>
-          <a:prstGeom prst="rect">
-            <a:avLst/>
-          </a:prstGeom>
-          <a:noFill/>
-        </p:spPr>
-        <p:txBody>
-          <a:bodyPr wrap="square">
-            <a:spAutoFit/>
-          </a:bodyPr>
-          <a:lstStyle/>
-          <a:p>
-            <a:pPr algn="l">
-              <a:defRPr sz="1600" b="0" i="0">
+              <a:t>Fraud Prevention Success</a:t>
+            </a:r>
+          </a:p>
+        </p:txBody>
+      </p:sp>
+      <p:sp>
+        <p:nvSpPr>
+          <p:cNvPr id="8" name="TextBox 7"/>
+          <p:cNvSpPr txBox="1"/>
+          <p:nvPr/>
+        </p:nvSpPr>
+        <p:spPr>
+          <a:xfrm>
+            <a:off x="1097280" y="4206240"/>
+            <a:ext cx="9966960" cy="1371600"/>
+          </a:xfrm>
+          <a:prstGeom prst="rect">
+            <a:avLst/>
+          </a:prstGeom>
+          <a:noFill/>
+        </p:spPr>
+        <p:txBody>
+          <a:bodyPr wrap="square">
+            <a:spAutoFit/>
+          </a:bodyPr>
+          <a:lstStyle/>
+          <a:p>
+            <a:pPr algn="l">
+              <a:defRPr sz="1500" b="0" i="0">
                 <a:solidFill>
                   <a:srgbClr val="E2E2EA"/>
                 </a:solidFill>
@@ -5220,43 +5509,7 @@
               </a:defRPr>
             </a:pPr>
             <a:r>
-              <a:t>Wishing you an amazing day filled with joy and celebration!</a:t>
-            </a:r>
-          </a:p>
-        </p:txBody>
-      </p:sp>
-      <p:sp>
-        <p:nvSpPr>
-          <p:cNvPr id="8" name="TextBox 7"/>
-          <p:cNvSpPr txBox="1"/>
-          <p:nvPr/>
-        </p:nvSpPr>
-        <p:spPr>
-          <a:xfrm>
-            <a:off x="1097280" y="4572000"/>
-            <a:ext cx="9966960" cy="457200"/>
-          </a:xfrm>
-          <a:prstGeom prst="rect">
-            <a:avLst/>
-          </a:prstGeom>
-          <a:noFill/>
-        </p:spPr>
-        <p:txBody>
-          <a:bodyPr wrap="square">
-            <a:spAutoFit/>
-          </a:bodyPr>
-          <a:lstStyle/>
-          <a:p>
-            <a:pPr algn="l">
-              <a:defRPr sz="1400" b="0" i="1">
-                <a:solidFill>
-                  <a:srgbClr val="FFB72B"/>
-                </a:solidFill>
-                <a:latin typeface="Calibri"/>
-              </a:defRPr>
-            </a:pPr>
-            <a:r>
-              <a:t>With love, Your Appodeal Team 💜</a:t>
+              <a:t>Dynamic SDK signatures dramatically reducing fraudulent traffic</a:t>
             </a:r>
           </a:p>
         </p:txBody>
@@ -5302,7 +5555,7 @@
             <a:avLst/>
           </a:prstGeom>
           <a:solidFill>
-            <a:srgbClr val="FFB72B"/>
+            <a:srgbClr val="FF5722"/>
           </a:solidFill>
           <a:ln>
             <a:noFill/>
@@ -5355,13 +5608,13 @@
             <a:pPr algn="l">
               <a:defRPr sz="1000" b="1">
                 <a:solidFill>
-                  <a:srgbClr val="FFB72B"/>
-                </a:solidFill>
-                <a:latin typeface="Calibri"/>
-              </a:defRPr>
-            </a:pPr>
-            <a:r>
-              <a:t>🎂  CELEBRATION</a:t>
+                  <a:srgbClr val="FF5722"/>
+                </a:solidFill>
+                <a:latin typeface="Calibri"/>
+              </a:defRPr>
+            </a:pPr>
+            <a:r>
+              <a:t>🎉  WEEKLY RITUAL</a:t>
             </a:r>
           </a:p>
         </p:txBody>
@@ -5391,13 +5644,13 @@
             <a:pPr algn="l">
               <a:defRPr sz="3200" b="1" i="0">
                 <a:solidFill>
-                  <a:srgbClr val="FFB72B"/>
-                </a:solidFill>
-                <a:latin typeface="Calibri"/>
-              </a:defRPr>
-            </a:pPr>
-            <a:r>
-              <a:t>Happy Birthday!</a:t>
+                  <a:srgbClr val="FF5722"/>
+                </a:solidFill>
+                <a:latin typeface="Calibri"/>
+              </a:defRPr>
+            </a:pPr>
+            <a:r>
+              <a:t>Daily Celebration</a:t>
             </a:r>
           </a:p>
         </p:txBody>
@@ -5411,21 +5664,21 @@
         <p:spPr>
           <a:xfrm>
             <a:off x="1097280" y="2103120"/>
-            <a:ext cx="9966960" cy="640080"/>
-          </a:xfrm>
-          <a:prstGeom prst="rect">
-            <a:avLst/>
-          </a:prstGeom>
-          <a:noFill/>
-        </p:spPr>
-        <p:txBody>
-          <a:bodyPr wrap="square">
-            <a:spAutoFit/>
-          </a:bodyPr>
-          <a:lstStyle/>
-          <a:p>
-            <a:pPr algn="l">
-              <a:defRPr sz="2800" b="1" i="0">
+            <a:ext cx="9966960" cy="457200"/>
+          </a:xfrm>
+          <a:prstGeom prst="rect">
+            <a:avLst/>
+          </a:prstGeom>
+          <a:noFill/>
+        </p:spPr>
+        <p:txBody>
+          <a:bodyPr wrap="square">
+            <a:spAutoFit/>
+          </a:bodyPr>
+          <a:lstStyle/>
+          <a:p>
+            <a:pPr algn="l">
+              <a:defRPr sz="1800" b="1" i="0">
                 <a:solidFill>
                   <a:srgbClr val="FFFFFF"/>
                 </a:solidFill>
@@ -5433,7 +5686,7 @@
               </a:defRPr>
             </a:pPr>
             <a:r>
-              <a:t>Yanina Lozben</a:t>
+              <a:t>Team Birthday Joy!</a:t>
             </a:r>
           </a:p>
         </p:txBody>
@@ -5446,8 +5699,8 @@
         </p:nvSpPr>
         <p:spPr>
           <a:xfrm>
-            <a:off x="1097280" y="2743200"/>
-            <a:ext cx="9966960" cy="365760"/>
+            <a:off x="1371600" y="2926080"/>
+            <a:ext cx="9418320" cy="548640"/>
           </a:xfrm>
           <a:prstGeom prst="rect">
             <a:avLst/>
@@ -5463,13 +5716,13 @@
             <a:pPr algn="l">
               <a:defRPr sz="1400" b="0" i="0">
                 <a:solidFill>
-                  <a:srgbClr val="8F95A3"/>
-                </a:solidFill>
-                <a:latin typeface="Calibri"/>
-              </a:defRPr>
-            </a:pPr>
-            <a:r>
-              <a:t>March 11</a:t>
+                  <a:srgbClr val="E2E2EA"/>
+                </a:solidFill>
+                <a:latin typeface="Calibri"/>
+              </a:defRPr>
+            </a:pPr>
+            <a:r>
+              <a:t>Who brings the most positive energy to your team?</a:t>
             </a:r>
           </a:p>
         </p:txBody>
@@ -5482,22 +5735,22 @@
         </p:nvSpPr>
         <p:spPr>
           <a:xfrm>
-            <a:off x="1097280" y="3291840"/>
-            <a:ext cx="9966960" cy="914400"/>
-          </a:xfrm>
-          <a:prstGeom prst="rect">
-            <a:avLst/>
-          </a:prstGeom>
-          <a:noFill/>
-        </p:spPr>
-        <p:txBody>
-          <a:bodyPr wrap="square">
-            <a:spAutoFit/>
-          </a:bodyPr>
-          <a:lstStyle/>
-          <a:p>
-            <a:pPr algn="l">
-              <a:defRPr sz="1600" b="0" i="0">
+            <a:off x="1371600" y="3657600"/>
+            <a:ext cx="9418320" cy="548640"/>
+          </a:xfrm>
+          <a:prstGeom prst="rect">
+            <a:avLst/>
+          </a:prstGeom>
+          <a:noFill/>
+        </p:spPr>
+        <p:txBody>
+          <a:bodyPr wrap="square">
+            <a:spAutoFit/>
+          </a:bodyPr>
+          <a:lstStyle/>
+          <a:p>
+            <a:pPr algn="l">
+              <a:defRPr sz="1400" b="0" i="0">
                 <a:solidFill>
                   <a:srgbClr val="E2E2EA"/>
                 </a:solidFill>
@@ -5505,7 +5758,7 @@
               </a:defRPr>
             </a:pPr>
             <a:r>
-              <a:t>Wishing you an amazing day filled with joy and celebration!</a:t>
+              <a:t>What's your favorite way to celebrate wins together?</a:t>
             </a:r>
           </a:p>
         </p:txBody>
@@ -5518,30 +5771,66 @@
         </p:nvSpPr>
         <p:spPr>
           <a:xfrm>
-            <a:off x="1097280" y="4572000"/>
-            <a:ext cx="9966960" cy="457200"/>
-          </a:xfrm>
-          <a:prstGeom prst="rect">
-            <a:avLst/>
-          </a:prstGeom>
-          <a:noFill/>
-        </p:spPr>
-        <p:txBody>
-          <a:bodyPr wrap="square">
-            <a:spAutoFit/>
-          </a:bodyPr>
-          <a:lstStyle/>
-          <a:p>
-            <a:pPr algn="l">
-              <a:defRPr sz="1400" b="0" i="1">
-                <a:solidFill>
-                  <a:srgbClr val="FFB72B"/>
-                </a:solidFill>
-                <a:latin typeface="Calibri"/>
-              </a:defRPr>
-            </a:pPr>
-            <a:r>
-              <a:t>With love, Your Appodeal Team 💜</a:t>
+            <a:off x="1097280" y="4754880"/>
+            <a:ext cx="9966960" cy="731520"/>
+          </a:xfrm>
+          <a:prstGeom prst="rect">
+            <a:avLst/>
+          </a:prstGeom>
+          <a:noFill/>
+        </p:spPr>
+        <p:txBody>
+          <a:bodyPr wrap="square">
+            <a:spAutoFit/>
+          </a:bodyPr>
+          <a:lstStyle/>
+          <a:p>
+            <a:pPr algn="l">
+              <a:defRPr sz="1500" b="0" i="1">
+                <a:solidFill>
+                  <a:srgbClr val="E2E2EA"/>
+                </a:solidFill>
+                <a:latin typeface="Calibri"/>
+              </a:defRPr>
+            </a:pPr>
+            <a:r>
+              <a:t>We CELEBRATE achievements and support each other</a:t>
+            </a:r>
+          </a:p>
+        </p:txBody>
+      </p:sp>
+      <p:sp>
+        <p:nvSpPr>
+          <p:cNvPr id="9" name="TextBox 8"/>
+          <p:cNvSpPr txBox="1"/>
+          <p:nvPr/>
+        </p:nvSpPr>
+        <p:spPr>
+          <a:xfrm>
+            <a:off x="1097280" y="5760720"/>
+            <a:ext cx="9966960" cy="274320"/>
+          </a:xfrm>
+          <a:prstGeom prst="rect">
+            <a:avLst/>
+          </a:prstGeom>
+          <a:noFill/>
+        </p:spPr>
+        <p:txBody>
+          <a:bodyPr wrap="square">
+            <a:spAutoFit/>
+          </a:bodyPr>
+          <a:lstStyle/>
+          <a:p>
+            <a:pPr algn="l">
+              <a:defRPr sz="1100" b="0" i="0">
+                <a:solidFill>
+                  <a:srgbClr val="5C6270"/>
+                </a:solidFill>
+                <a:latin typeface="Calibri"/>
+              </a:defRPr>
+            </a:pPr>
+            <a:r>
+              <a:t>#birthdays</a:t>
             </a:r>
           </a:p>
         </p:txBody>
@@ -5587,7 +5876,7 @@
             <a:avLst/>
           </a:prstGeom>
           <a:solidFill>
-            <a:srgbClr val="00FFD1"/>
+            <a:srgbClr val="4CAF50"/>
           </a:solidFill>
           <a:ln>
             <a:noFill/>
@@ -5640,13 +5929,13 @@
             <a:pPr algn="l">
               <a:defRPr sz="1000" b="1">
                 <a:solidFill>
-                  <a:srgbClr val="00FFD1"/>
-                </a:solidFill>
-                <a:latin typeface="Calibri"/>
-              </a:defRPr>
-            </a:pPr>
-            <a:r>
-              <a:t>📢  OFFICE LIFE</a:t>
+                  <a:srgbClr val="4CAF50"/>
+                </a:solidFill>
+                <a:latin typeface="Calibri"/>
+              </a:defRPr>
+            </a:pPr>
+            <a:r>
+              <a:t>💰  WIN</a:t>
             </a:r>
           </a:p>
         </p:txBody>
@@ -5676,13 +5965,13 @@
             <a:pPr algn="l">
               <a:defRPr sz="3200" b="1" i="0">
                 <a:solidFill>
-                  <a:srgbClr val="00FFD1"/>
-                </a:solidFill>
-                <a:latin typeface="Calibri"/>
-              </a:defRPr>
-            </a:pPr>
-            <a:r>
-              <a:t>From #general</a:t>
+                  <a:srgbClr val="4CAF50"/>
+                </a:solidFill>
+                <a:latin typeface="Calibri"/>
+              </a:defRPr>
+            </a:pPr>
+            <a:r>
+              <a:t>Sales Victory</a:t>
             </a:r>
           </a:p>
         </p:txBody>
@@ -5696,6 +5985,114 @@
         <p:spPr>
           <a:xfrm>
             <a:off x="1097280" y="2103120"/>
+            <a:ext cx="4572000" cy="822960"/>
+          </a:xfrm>
+          <a:prstGeom prst="rect">
+            <a:avLst/>
+          </a:prstGeom>
+          <a:noFill/>
+        </p:spPr>
+        <p:txBody>
+          <a:bodyPr wrap="square">
+            <a:spAutoFit/>
+          </a:bodyPr>
+          <a:lstStyle/>
+          <a:p>
+            <a:pPr algn="l">
+              <a:defRPr sz="4800" b="1" i="0">
+                <a:solidFill>
+                  <a:srgbClr val="4CAF50"/>
+                </a:solidFill>
+                <a:latin typeface="Calibri"/>
+              </a:defRPr>
+            </a:pPr>
+            <a:r>
+              <a:t>8</a:t>
+            </a:r>
+          </a:p>
+        </p:txBody>
+      </p:sp>
+      <p:sp>
+        <p:nvSpPr>
+          <p:cNvPr id="6" name="TextBox 5"/>
+          <p:cNvSpPr txBox="1"/>
+          <p:nvPr/>
+        </p:nvSpPr>
+        <p:spPr>
+          <a:xfrm>
+            <a:off x="1097280" y="2834640"/>
+            <a:ext cx="4572000" cy="365760"/>
+          </a:xfrm>
+          <a:prstGeom prst="rect">
+            <a:avLst/>
+          </a:prstGeom>
+          <a:noFill/>
+        </p:spPr>
+        <p:txBody>
+          <a:bodyPr wrap="square">
+            <a:spAutoFit/>
+          </a:bodyPr>
+          <a:lstStyle/>
+          <a:p>
+            <a:pPr algn="l">
+              <a:defRPr sz="1200" b="0" i="0">
+                <a:solidFill>
+                  <a:srgbClr val="8F95A3"/>
+                </a:solidFill>
+                <a:latin typeface="Calibri"/>
+              </a:defRPr>
+            </a:pPr>
+            <a:r>
+              <a:t>deals closed</a:t>
+            </a:r>
+          </a:p>
+        </p:txBody>
+      </p:sp>
+      <p:sp>
+        <p:nvSpPr>
+          <p:cNvPr id="7" name="TextBox 6"/>
+          <p:cNvSpPr txBox="1"/>
+          <p:nvPr/>
+        </p:nvSpPr>
+        <p:spPr>
+          <a:xfrm>
+            <a:off x="1097280" y="3291840"/>
+            <a:ext cx="9966960" cy="365760"/>
+          </a:xfrm>
+          <a:prstGeom prst="rect">
+            <a:avLst/>
+          </a:prstGeom>
+          <a:noFill/>
+        </p:spPr>
+        <p:txBody>
+          <a:bodyPr wrap="square">
+            <a:spAutoFit/>
+          </a:bodyPr>
+          <a:lstStyle/>
+          <a:p>
+            <a:pPr algn="l">
+              <a:defRPr sz="1400" b="0" i="0">
+                <a:solidFill>
+                  <a:srgbClr val="E2E2EA"/>
+                </a:solidFill>
+                <a:latin typeface="Calibri"/>
+              </a:defRPr>
+            </a:pPr>
+            <a:r>
+              <a:t>by Sales Team</a:t>
+            </a:r>
+          </a:p>
+        </p:txBody>
+      </p:sp>
+      <p:sp>
+        <p:nvSpPr>
+          <p:cNvPr id="8" name="TextBox 7"/>
+          <p:cNvSpPr txBox="1"/>
+          <p:nvPr/>
+        </p:nvSpPr>
+        <p:spPr>
+          <a:xfrm>
+            <a:off x="1097280" y="3840480"/>
             <a:ext cx="9966960" cy="457200"/>
           </a:xfrm>
           <a:prstGeom prst="rect">
@@ -5718,35 +6115,35 @@
               </a:defRPr>
             </a:pPr>
             <a:r>
-              <a:t>Hi &lt;!here&gt;! :woman-raising-hand: Thank you for joining our *11th Lunch &amp; Learn s...</a:t>
-            </a:r>
-          </a:p>
-        </p:txBody>
-      </p:sp>
-      <p:sp>
-        <p:nvSpPr>
-          <p:cNvPr id="6" name="TextBox 5"/>
-          <p:cNvSpPr txBox="1"/>
-          <p:nvPr/>
-        </p:nvSpPr>
-        <p:spPr>
-          <a:xfrm>
-            <a:off x="1371600" y="2743200"/>
-            <a:ext cx="9692640" cy="1828800"/>
-          </a:xfrm>
-          <a:prstGeom prst="rect">
-            <a:avLst/>
-          </a:prstGeom>
-          <a:noFill/>
-        </p:spPr>
-        <p:txBody>
-          <a:bodyPr wrap="square">
-            <a:spAutoFit/>
-          </a:bodyPr>
-          <a:lstStyle/>
-          <a:p>
-            <a:pPr algn="l">
-              <a:defRPr sz="1500" b="0" i="1">
+              <a:t>Outstanding Week Performance!</a:t>
+            </a:r>
+          </a:p>
+        </p:txBody>
+      </p:sp>
+      <p:sp>
+        <p:nvSpPr>
+          <p:cNvPr id="9" name="TextBox 8"/>
+          <p:cNvSpPr txBox="1"/>
+          <p:nvPr/>
+        </p:nvSpPr>
+        <p:spPr>
+          <a:xfrm>
+            <a:off x="1097280" y="4389120"/>
+            <a:ext cx="9966960" cy="914400"/>
+          </a:xfrm>
+          <a:prstGeom prst="rect">
+            <a:avLst/>
+          </a:prstGeom>
+          <a:noFill/>
+        </p:spPr>
+        <p:txBody>
+          <a:bodyPr wrap="square">
+            <a:spAutoFit/>
+          </a:bodyPr>
+          <a:lstStyle/>
+          <a:p>
+            <a:pPr algn="l">
+              <a:defRPr sz="1400" b="0" i="0">
                 <a:solidFill>
                   <a:srgbClr val="E2E2EA"/>
                 </a:solidFill>
@@ -5754,47 +6151,35 @@
               </a:defRPr>
             </a:pPr>
             <a:r>
-              <a:t>"Hi &lt;!here&gt;! :woman-raising-hand: Thank you for joining our *11th Lunch &amp; Learn session!* :fire:</a:t>
-            </a:r>
-            <a:br/>
-            <a:r>
-              <a:t>A big thank-you to &lt;@U23FJLW5S&gt; for a very interesting presentation :heart:</a:t>
-            </a:r>
-            <a:br/>
-            <a:r>
-              <a:t>Below you can find:</a:t>
-            </a:r>
-            <a:br/>
-            <a:r>
-              <a:t>• :movie_camera: &lt;https://app.fireflies.ai/view/Lunch-and-Learn-How-we-detect-fraud-traffic-by-Timofey-Levan"</a:t>
-            </a:r>
-          </a:p>
-        </p:txBody>
-      </p:sp>
-      <p:sp>
-        <p:nvSpPr>
-          <p:cNvPr id="7" name="TextBox 6"/>
-          <p:cNvSpPr txBox="1"/>
-          <p:nvPr/>
-        </p:nvSpPr>
-        <p:spPr>
-          <a:xfrm>
-            <a:off x="1097280" y="4754880"/>
-            <a:ext cx="9966960" cy="365760"/>
-          </a:xfrm>
-          <a:prstGeom prst="rect">
-            <a:avLst/>
-          </a:prstGeom>
-          <a:noFill/>
-        </p:spPr>
-        <p:txBody>
-          <a:bodyPr wrap="square">
-            <a:spAutoFit/>
-          </a:bodyPr>
-          <a:lstStyle/>
-          <a:p>
-            <a:pPr algn="l">
-              <a:defRPr sz="1400" b="0" i="0">
+              <a:t>$390k net revenue in a single week</a:t>
+            </a:r>
+          </a:p>
+        </p:txBody>
+      </p:sp>
+      <p:sp>
+        <p:nvSpPr>
+          <p:cNvPr id="10" name="TextBox 9"/>
+          <p:cNvSpPr txBox="1"/>
+          <p:nvPr/>
+        </p:nvSpPr>
+        <p:spPr>
+          <a:xfrm>
+            <a:off x="1097280" y="5486400"/>
+            <a:ext cx="9966960" cy="457200"/>
+          </a:xfrm>
+          <a:prstGeom prst="rect">
+            <a:avLst/>
+          </a:prstGeom>
+          <a:noFill/>
+        </p:spPr>
+        <p:txBody>
+          <a:bodyPr wrap="square">
+            <a:spAutoFit/>
+          </a:bodyPr>
+          <a:lstStyle/>
+          <a:p>
+            <a:pPr algn="l">
+              <a:defRPr sz="1300" b="0" i="1">
                 <a:solidFill>
                   <a:srgbClr val="8F95A3"/>
                 </a:solidFill>
@@ -5802,43 +6187,7 @@
               </a:defRPr>
             </a:pPr>
             <a:r>
-              <a:t>— Katarzyna Raniszewska</a:t>
-            </a:r>
-          </a:p>
-        </p:txBody>
-      </p:sp>
-      <p:sp>
-        <p:nvSpPr>
-          <p:cNvPr id="8" name="TextBox 7"/>
-          <p:cNvSpPr txBox="1"/>
-          <p:nvPr/>
-        </p:nvSpPr>
-        <p:spPr>
-          <a:xfrm>
-            <a:off x="1097280" y="5760720"/>
-            <a:ext cx="9966960" cy="274320"/>
-          </a:xfrm>
-          <a:prstGeom prst="rect">
-            <a:avLst/>
-          </a:prstGeom>
-          <a:noFill/>
-        </p:spPr>
-        <p:txBody>
-          <a:bodyPr wrap="square">
-            <a:spAutoFit/>
-          </a:bodyPr>
-          <a:lstStyle/>
-          <a:p>
-            <a:pPr algn="l">
-              <a:defRPr sz="1100" b="0" i="0">
-                <a:solidFill>
-                  <a:srgbClr val="5C6270"/>
-                </a:solidFill>
-                <a:latin typeface="Calibri"/>
-              </a:defRPr>
-            </a:pPr>
-            <a:r>
-              <a:t>#general</a:t>
+              <a:t>💬 "Sales momentum building strong pipeline"</a:t>
             </a:r>
           </a:p>
         </p:txBody>
@@ -5884,7 +6233,7 @@
             <a:avLst/>
           </a:prstGeom>
           <a:solidFill>
-            <a:srgbClr val="00FFD1"/>
+            <a:srgbClr val="795548"/>
           </a:solidFill>
           <a:ln>
             <a:noFill/>
@@ -5937,13 +6286,13 @@
             <a:pPr algn="l">
               <a:defRPr sz="1000" b="1">
                 <a:solidFill>
-                  <a:srgbClr val="00FFD1"/>
-                </a:solidFill>
-                <a:latin typeface="Calibri"/>
-              </a:defRPr>
-            </a:pPr>
-            <a:r>
-              <a:t>📢  OFFICE LIFE</a:t>
+                  <a:srgbClr val="795548"/>
+                </a:solidFill>
+                <a:latin typeface="Calibri"/>
+              </a:defRPr>
+            </a:pPr>
+            <a:r>
+              <a:t>🏗️  OFFICE LIFE</a:t>
             </a:r>
           </a:p>
         </p:txBody>
@@ -5973,13 +6322,13 @@
             <a:pPr algn="l">
               <a:defRPr sz="3200" b="1" i="0">
                 <a:solidFill>
-                  <a:srgbClr val="00FFD1"/>
-                </a:solidFill>
-                <a:latin typeface="Calibri"/>
-              </a:defRPr>
-            </a:pPr>
-            <a:r>
-              <a:t>From #general</a:t>
+                  <a:srgbClr val="795548"/>
+                </a:solidFill>
+                <a:latin typeface="Calibri"/>
+              </a:defRPr>
+            </a:pPr>
+            <a:r>
+              <a:t>Leadership Vision</a:t>
             </a:r>
           </a:p>
         </p:txBody>
@@ -6015,11 +6364,7 @@
               </a:defRPr>
             </a:pPr>
             <a:r>
-              <a:t>&lt;!channel&gt; Team,</a:t>
-            </a:r>
-            <a:br/>
-            <a:r>
-              <a:t>Anna is &lt;https://appodeal.slack.com/archives/C08RDS0MU2F/p17730...</a:t>
+              <a:t>Build. Ship. Improve.</a:t>
             </a:r>
           </a:p>
         </p:txBody>
@@ -6055,24 +6400,7 @@
               </a:defRPr>
             </a:pPr>
             <a:r>
-              <a:t>"&lt;!channel&gt; Team,</a:t>
-            </a:r>
-            <a:br/>
-            <a:r>
-              <a:t>Anna is &lt;https://appodeal.slack.com/archives/C08RDS0MU2F/p1773043372580949|starting&gt; a reading club around the book _The 4 Disciplines of Execution_, and I encourage everyone to join.</a:t>
-            </a:r>
-            <a:br/>
-            <a:br/>
-            <a:r>
-              <a:t>The book focuses on four core concepts:</a:t>
-            </a:r>
-            <a:br/>
-            <a:r>
-              <a:t>• *Wildly Important Goals (WIGs)*</a:t>
-            </a:r>
-            <a:br/>
-            <a:r>
-              <a:t>• *Leading and Lagging M"</a:t>
+              <a:t>"Shift from requirements to pull request mentality"</a:t>
             </a:r>
           </a:p>
         </p:txBody>
@@ -6108,7 +6436,7 @@
               </a:defRPr>
             </a:pPr>
             <a:r>
-              <a:t>— Pavel Golubev</a:t>
+              <a:t>— CEO Mandate</a:t>
             </a:r>
           </a:p>
         </p:txBody>
@@ -6116,6 +6444,42 @@
       <p:sp>
         <p:nvSpPr>
           <p:cNvPr id="8" name="TextBox 7"/>
+          <p:cNvSpPr txBox="1"/>
+          <p:nvPr/>
+        </p:nvSpPr>
+        <p:spPr>
+          <a:xfrm>
+            <a:off x="1097280" y="5212080"/>
+            <a:ext cx="9966960" cy="365760"/>
+          </a:xfrm>
+          <a:prstGeom prst="rect">
+            <a:avLst/>
+          </a:prstGeom>
+          <a:noFill/>
+        </p:spPr>
+        <p:txBody>
+          <a:bodyPr wrap="square">
+            <a:spAutoFit/>
+          </a:bodyPr>
+          <a:lstStyle/>
+          <a:p>
+            <a:pPr algn="l">
+              <a:defRPr sz="1400" b="1" i="0">
+                <a:solidFill>
+                  <a:srgbClr val="795548"/>
+                </a:solidFill>
+                <a:latin typeface="Calibri"/>
+              </a:defRPr>
+            </a:pPr>
+            <a:r>
+              <a:t>1</a:t>
+            </a:r>
+          </a:p>
+        </p:txBody>
+      </p:sp>
+      <p:sp>
+        <p:nvSpPr>
+          <p:cNvPr id="9" name="TextBox 8"/>
           <p:cNvSpPr txBox="1"/>
           <p:nvPr/>
         </p:nvSpPr>
@@ -6190,7 +6554,7 @@
             <a:avLst/>
           </a:prstGeom>
           <a:solidFill>
-            <a:srgbClr val="FFB72B"/>
+            <a:srgbClr val="FF6B9D"/>
           </a:solidFill>
           <a:ln>
             <a:noFill/>
@@ -6243,7 +6607,7 @@
             <a:pPr algn="l">
               <a:defRPr sz="1000" b="1">
                 <a:solidFill>
-                  <a:srgbClr val="FFB72B"/>
+                  <a:srgbClr val="FF6B9D"/>
                 </a:solidFill>
                 <a:latin typeface="Calibri"/>
               </a:defRPr>
@@ -6279,13 +6643,13 @@
             <a:pPr algn="l">
               <a:defRPr sz="3200" b="1" i="0">
                 <a:solidFill>
-                  <a:srgbClr val="FFB72B"/>
-                </a:solidFill>
-                <a:latin typeface="Calibri"/>
-              </a:defRPr>
-            </a:pPr>
-            <a:r>
-              <a:t>Happy Birthday!</a:t>
+                  <a:srgbClr val="FF6B9D"/>
+                </a:solidFill>
+                <a:latin typeface="Calibri"/>
+              </a:defRPr>
+            </a:pPr>
+            <a:r>
+              <a:t>Birthday Celebration</a:t>
             </a:r>
           </a:p>
         </p:txBody>
@@ -6321,7 +6685,7 @@
               </a:defRPr>
             </a:pPr>
             <a:r>
-              <a:t>Denis Glavatskikh</a:t>
+              <a:t>Alexandr Sikorsky</a:t>
             </a:r>
           </a:p>
         </p:txBody>
@@ -6357,7 +6721,7 @@
               </a:defRPr>
             </a:pPr>
             <a:r>
-              <a:t>March 11</a:t>
+              <a:t>March 11, 2026</a:t>
             </a:r>
           </a:p>
         </p:txBody>
@@ -6393,7 +6757,7 @@
               </a:defRPr>
             </a:pPr>
             <a:r>
-              <a:t>Wishing you an amazing day filled with joy and celebration!</a:t>
+              <a:t>Thank you for being such an awesome part of our team! Time to pause, grab some cake, and celebrate YOU!</a:t>
             </a:r>
           </a:p>
         </p:txBody>
@@ -6423,13 +6787,13 @@
             <a:pPr algn="l">
               <a:defRPr sz="1400" b="0" i="1">
                 <a:solidFill>
-                  <a:srgbClr val="FFB72B"/>
-                </a:solidFill>
-                <a:latin typeface="Calibri"/>
-              </a:defRPr>
-            </a:pPr>
-            <a:r>
-              <a:t>With love, Your Appodeal Team 💜</a:t>
+                  <a:srgbClr val="FF6B9D"/>
+                </a:solidFill>
+                <a:latin typeface="Calibri"/>
+              </a:defRPr>
+            </a:pPr>
+            <a:r>
+              <a:t>Making work brighter with ideas, humor, and dedication</a:t>
             </a:r>
           </a:p>
         </p:txBody>
@@ -6475,7 +6839,7 @@
             <a:avLst/>
           </a:prstGeom>
           <a:solidFill>
-            <a:srgbClr val="00FFD1"/>
+            <a:srgbClr val="E91E63"/>
           </a:solidFill>
           <a:ln>
             <a:noFill/>
@@ -6528,13 +6892,13 @@
             <a:pPr algn="l">
               <a:defRPr sz="1000" b="1">
                 <a:solidFill>
-                  <a:srgbClr val="00FFD1"/>
-                </a:solidFill>
-                <a:latin typeface="Calibri"/>
-              </a:defRPr>
-            </a:pPr>
-            <a:r>
-              <a:t>📢  OFFICE LIFE</a:t>
+                  <a:srgbClr val="E91E63"/>
+                </a:solidFill>
+                <a:latin typeface="Calibri"/>
+              </a:defRPr>
+            </a:pPr>
+            <a:r>
+              <a:t>🎮  MILESTONE</a:t>
             </a:r>
           </a:p>
         </p:txBody>
@@ -6564,13 +6928,298 @@
             <a:pPr algn="l">
               <a:defRPr sz="3200" b="1" i="0">
                 <a:solidFill>
-                  <a:srgbClr val="00FFD1"/>
-                </a:solidFill>
-                <a:latin typeface="Calibri"/>
-              </a:defRPr>
-            </a:pPr>
-            <a:r>
-              <a:t>From #general</a:t>
+                  <a:srgbClr val="E91E63"/>
+                </a:solidFill>
+                <a:latin typeface="Calibri"/>
+              </a:defRPr>
+            </a:pPr>
+            <a:r>
+              <a:t>Gaming Milestone</a:t>
+            </a:r>
+          </a:p>
+        </p:txBody>
+      </p:sp>
+      <p:sp>
+        <p:nvSpPr>
+          <p:cNvPr id="5" name="TextBox 4"/>
+          <p:cNvSpPr txBox="1"/>
+          <p:nvPr/>
+        </p:nvSpPr>
+        <p:spPr>
+          <a:xfrm>
+            <a:off x="1097280" y="2103120"/>
+            <a:ext cx="4572000" cy="822960"/>
+          </a:xfrm>
+          <a:prstGeom prst="rect">
+            <a:avLst/>
+          </a:prstGeom>
+          <a:noFill/>
+        </p:spPr>
+        <p:txBody>
+          <a:bodyPr wrap="square">
+            <a:spAutoFit/>
+          </a:bodyPr>
+          <a:lstStyle/>
+          <a:p>
+            <a:pPr algn="l">
+              <a:defRPr sz="5200" b="1" i="0">
+                <a:solidFill>
+                  <a:srgbClr val="E91E63"/>
+                </a:solidFill>
+                <a:latin typeface="Calibri"/>
+              </a:defRPr>
+            </a:pPr>
+            <a:r>
+              <a:t>200%+</a:t>
+            </a:r>
+          </a:p>
+        </p:txBody>
+      </p:sp>
+      <p:sp>
+        <p:nvSpPr>
+          <p:cNvPr id="6" name="TextBox 5"/>
+          <p:cNvSpPr txBox="1"/>
+          <p:nvPr/>
+        </p:nvSpPr>
+        <p:spPr>
+          <a:xfrm>
+            <a:off x="1097280" y="2926080"/>
+            <a:ext cx="4572000" cy="365760"/>
+          </a:xfrm>
+          <a:prstGeom prst="rect">
+            <a:avLst/>
+          </a:prstGeom>
+          <a:noFill/>
+        </p:spPr>
+        <p:txBody>
+          <a:bodyPr wrap="square">
+            <a:spAutoFit/>
+          </a:bodyPr>
+          <a:lstStyle/>
+          <a:p>
+            <a:pPr algn="l">
+              <a:defRPr sz="1100" b="0" i="0">
+                <a:solidFill>
+                  <a:srgbClr val="8F95A3"/>
+                </a:solidFill>
+                <a:latin typeface="Calibri"/>
+              </a:defRPr>
+            </a:pPr>
+            <a:r>
+              <a:t>ROAS exceeded</a:t>
+            </a:r>
+          </a:p>
+        </p:txBody>
+      </p:sp>
+      <p:sp>
+        <p:nvSpPr>
+          <p:cNvPr id="7" name="TextBox 6"/>
+          <p:cNvSpPr txBox="1"/>
+          <p:nvPr/>
+        </p:nvSpPr>
+        <p:spPr>
+          <a:xfrm>
+            <a:off x="1097280" y="3566160"/>
+            <a:ext cx="9966960" cy="457200"/>
+          </a:xfrm>
+          <a:prstGeom prst="rect">
+            <a:avLst/>
+          </a:prstGeom>
+          <a:noFill/>
+        </p:spPr>
+        <p:txBody>
+          <a:bodyPr wrap="square">
+            <a:spAutoFit/>
+          </a:bodyPr>
+          <a:lstStyle/>
+          <a:p>
+            <a:pPr algn="l">
+              <a:defRPr sz="1800" b="1" i="0">
+                <a:solidFill>
+                  <a:srgbClr val="FFFFFF"/>
+                </a:solidFill>
+                <a:latin typeface="Calibri"/>
+              </a:defRPr>
+            </a:pPr>
+            <a:r>
+              <a:t>Gaming Division Profitability</a:t>
+            </a:r>
+          </a:p>
+        </p:txBody>
+      </p:sp>
+      <p:sp>
+        <p:nvSpPr>
+          <p:cNvPr id="8" name="TextBox 7"/>
+          <p:cNvSpPr txBox="1"/>
+          <p:nvPr/>
+        </p:nvSpPr>
+        <p:spPr>
+          <a:xfrm>
+            <a:off x="1097280" y="4206240"/>
+            <a:ext cx="9966960" cy="1371600"/>
+          </a:xfrm>
+          <a:prstGeom prst="rect">
+            <a:avLst/>
+          </a:prstGeom>
+          <a:noFill/>
+        </p:spPr>
+        <p:txBody>
+          <a:bodyPr wrap="square">
+            <a:spAutoFit/>
+          </a:bodyPr>
+          <a:lstStyle/>
+          <a:p>
+            <a:pPr algn="l">
+              <a:defRPr sz="1500" b="0" i="0">
+                <a:solidFill>
+                  <a:srgbClr val="E2E2EA"/>
+                </a:solidFill>
+                <a:latin typeface="Calibri"/>
+              </a:defRPr>
+            </a:pPr>
+            <a:r>
+              <a:t>Gaming operations turned profitable in 2025, showing sustainable growth</a:t>
+            </a:r>
+          </a:p>
+        </p:txBody>
+      </p:sp>
+    </p:spTree>
+  </p:cSld>
+  <p:clrMapOvr>
+    <a:masterClrMapping/>
+  </p:clrMapOvr>
+</p:sld>
+</file>
+
+<file path=ppt/slides/slide21.xml><?xml version="1.0" encoding="utf-8"?>
+<p:sld xmlns:a="http://schemas.openxmlformats.org/drawingml/2006/main" xmlns:p="http://schemas.openxmlformats.org/presentationml/2006/main" xmlns:r="http://schemas.openxmlformats.org/officeDocument/2006/relationships">
+  <p:cSld>
+    <p:bg>
+      <p:bgPr>
+        <a:solidFill>
+          <a:srgbClr val="08080C"/>
+        </a:solidFill>
+        <a:effectLst/>
+      </p:bgPr>
+    </p:bg>
+    <p:spTree>
+      <p:nvGrpSpPr>
+        <p:cNvPr id="1" name=""/>
+        <p:cNvGrpSpPr/>
+        <p:nvPr/>
+      </p:nvGrpSpPr>
+      <p:grpSpPr/>
+      <p:sp>
+        <p:nvSpPr>
+          <p:cNvPr id="2" name="Rectangle 1"/>
+          <p:cNvSpPr/>
+          <p:nvPr/>
+        </p:nvSpPr>
+        <p:spPr>
+          <a:xfrm>
+            <a:off x="0" y="365760"/>
+            <a:ext cx="12191695" cy="54864"/>
+          </a:xfrm>
+          <a:prstGeom prst="rect">
+            <a:avLst/>
+          </a:prstGeom>
+          <a:solidFill>
+            <a:srgbClr val="2196F3"/>
+          </a:solidFill>
+          <a:ln>
+            <a:noFill/>
+          </a:ln>
+        </p:spPr>
+        <p:style>
+          <a:lnRef idx="1">
+            <a:schemeClr val="accent1"/>
+          </a:lnRef>
+          <a:fillRef idx="3">
+            <a:schemeClr val="accent1"/>
+          </a:fillRef>
+          <a:effectRef idx="2">
+            <a:schemeClr val="accent1"/>
+          </a:effectRef>
+          <a:fontRef idx="minor">
+            <a:schemeClr val="lt1"/>
+          </a:fontRef>
+        </p:style>
+        <p:txBody>
+          <a:bodyPr rtlCol="0" anchor="ctr"/>
+          <a:lstStyle/>
+          <a:p>
+            <a:pPr algn="ctr"/>
+          </a:p>
+        </p:txBody>
+      </p:sp>
+      <p:sp>
+        <p:nvSpPr>
+          <p:cNvPr id="3" name="TextBox 2"/>
+          <p:cNvSpPr txBox="1"/>
+          <p:nvPr/>
+        </p:nvSpPr>
+        <p:spPr>
+          <a:xfrm>
+            <a:off x="1097280" y="731520"/>
+            <a:ext cx="3657600" cy="365760"/>
+          </a:xfrm>
+          <a:prstGeom prst="rect">
+            <a:avLst/>
+          </a:prstGeom>
+          <a:noFill/>
+        </p:spPr>
+        <p:txBody>
+          <a:bodyPr wrap="none">
+            <a:spAutoFit/>
+          </a:bodyPr>
+          <a:lstStyle/>
+          <a:p>
+            <a:pPr algn="l">
+              <a:defRPr sz="1000" b="1">
+                <a:solidFill>
+                  <a:srgbClr val="2196F3"/>
+                </a:solidFill>
+                <a:latin typeface="Calibri"/>
+              </a:defRPr>
+            </a:pPr>
+            <a:r>
+              <a:t>🚀  WEEKLY RITUAL</a:t>
+            </a:r>
+          </a:p>
+        </p:txBody>
+      </p:sp>
+      <p:sp>
+        <p:nvSpPr>
+          <p:cNvPr id="4" name="TextBox 3"/>
+          <p:cNvSpPr txBox="1"/>
+          <p:nvPr/>
+        </p:nvSpPr>
+        <p:spPr>
+          <a:xfrm>
+            <a:off x="1097280" y="1188720"/>
+            <a:ext cx="9966960" cy="731520"/>
+          </a:xfrm>
+          <a:prstGeom prst="rect">
+            <a:avLst/>
+          </a:prstGeom>
+          <a:noFill/>
+        </p:spPr>
+        <p:txBody>
+          <a:bodyPr wrap="square">
+            <a:spAutoFit/>
+          </a:bodyPr>
+          <a:lstStyle/>
+          <a:p>
+            <a:pPr algn="l">
+              <a:defRPr sz="3200" b="1" i="0">
+                <a:solidFill>
+                  <a:srgbClr val="2196F3"/>
+                </a:solidFill>
+                <a:latin typeface="Calibri"/>
+              </a:defRPr>
+            </a:pPr>
+            <a:r>
+              <a:t>Keep Building</a:t>
             </a:r>
           </a:p>
         </p:txBody>
@@ -6606,7 +7255,7 @@
               </a:defRPr>
             </a:pPr>
             <a:r>
-              <a:t>&lt;@UCQDMDR9B&gt; Thank you for raising your concerns about AI tools *YOU* are buildi...</a:t>
+              <a:t>What will you ship today?</a:t>
             </a:r>
           </a:p>
         </p:txBody>
@@ -6619,8 +7268,80 @@
         </p:nvSpPr>
         <p:spPr>
           <a:xfrm>
-            <a:off x="1371600" y="2743200"/>
-            <a:ext cx="9692640" cy="1828800"/>
+            <a:off x="1371600" y="2926080"/>
+            <a:ext cx="9418320" cy="548640"/>
+          </a:xfrm>
+          <a:prstGeom prst="rect">
+            <a:avLst/>
+          </a:prstGeom>
+          <a:noFill/>
+        </p:spPr>
+        <p:txBody>
+          <a:bodyPr wrap="square">
+            <a:spAutoFit/>
+          </a:bodyPr>
+          <a:lstStyle/>
+          <a:p>
+            <a:pPr algn="l">
+              <a:defRPr sz="1400" b="0" i="0">
+                <a:solidFill>
+                  <a:srgbClr val="E2E2EA"/>
+                </a:solidFill>
+                <a:latin typeface="Calibri"/>
+              </a:defRPr>
+            </a:pPr>
+            <a:r>
+              <a:t>What's the next feature you're excited to build?</a:t>
+            </a:r>
+          </a:p>
+        </p:txBody>
+      </p:sp>
+      <p:sp>
+        <p:nvSpPr>
+          <p:cNvPr id="7" name="TextBox 6"/>
+          <p:cNvSpPr txBox="1"/>
+          <p:nvPr/>
+        </p:nvSpPr>
+        <p:spPr>
+          <a:xfrm>
+            <a:off x="1371600" y="3657600"/>
+            <a:ext cx="9418320" cy="548640"/>
+          </a:xfrm>
+          <a:prstGeom prst="rect">
+            <a:avLst/>
+          </a:prstGeom>
+          <a:noFill/>
+        </p:spPr>
+        <p:txBody>
+          <a:bodyPr wrap="square">
+            <a:spAutoFit/>
+          </a:bodyPr>
+          <a:lstStyle/>
+          <a:p>
+            <a:pPr algn="l">
+              <a:defRPr sz="1400" b="0" i="0">
+                <a:solidFill>
+                  <a:srgbClr val="E2E2EA"/>
+                </a:solidFill>
+                <a:latin typeface="Calibri"/>
+              </a:defRPr>
+            </a:pPr>
+            <a:r>
+              <a:t>How can we improve our user experience?</a:t>
+            </a:r>
+          </a:p>
+        </p:txBody>
+      </p:sp>
+      <p:sp>
+        <p:nvSpPr>
+          <p:cNvPr id="8" name="TextBox 7"/>
+          <p:cNvSpPr txBox="1"/>
+          <p:nvPr/>
+        </p:nvSpPr>
+        <p:spPr>
+          <a:xfrm>
+            <a:off x="1097280" y="4754880"/>
+            <a:ext cx="9966960" cy="731520"/>
           </a:xfrm>
           <a:prstGeom prst="rect">
             <a:avLst/>
@@ -6642,60 +7363,14 @@
               </a:defRPr>
             </a:pPr>
             <a:r>
-              <a:t>"&lt;@UCQDMDR9B&gt; Thank you for raising your concerns about AI tools *YOU* are building.</a:t>
-            </a:r>
-            <a:br/>
-            <a:br/>
-            <a:r>
-              <a:t>A couple of clarifications on what we are actually trying to do.</a:t>
-            </a:r>
-            <a:br/>
-            <a:br/>
-            <a:r>
-              <a:t>First, the goal of the *CV Health Rate* is *not to identify or rank A-players*. The purpose is to turn our *Core Values, Leadership Principles, and S"</a:t>
-            </a:r>
-          </a:p>
-        </p:txBody>
-      </p:sp>
-      <p:sp>
-        <p:nvSpPr>
-          <p:cNvPr id="7" name="TextBox 6"/>
-          <p:cNvSpPr txBox="1"/>
-          <p:nvPr/>
-        </p:nvSpPr>
-        <p:spPr>
-          <a:xfrm>
-            <a:off x="1097280" y="4754880"/>
-            <a:ext cx="9966960" cy="365760"/>
-          </a:xfrm>
-          <a:prstGeom prst="rect">
-            <a:avLst/>
-          </a:prstGeom>
-          <a:noFill/>
-        </p:spPr>
-        <p:txBody>
-          <a:bodyPr wrap="square">
-            <a:spAutoFit/>
-          </a:bodyPr>
-          <a:lstStyle/>
-          <a:p>
-            <a:pPr algn="l">
-              <a:defRPr sz="1400" b="0" i="0">
-                <a:solidFill>
-                  <a:srgbClr val="8F95A3"/>
-                </a:solidFill>
-                <a:latin typeface="Calibri"/>
-              </a:defRPr>
-            </a:pPr>
-            <a:r>
-              <a:t>— Pavel Golubev</a:t>
-            </a:r>
-          </a:p>
-        </p:txBody>
-      </p:sp>
-      <p:sp>
-        <p:nvSpPr>
-          <p:cNvPr id="8" name="TextBox 7"/>
+              <a:t>We BUILD solutions that SERVE OTHERS</a:t>
+            </a:r>
+          </a:p>
+        </p:txBody>
+      </p:sp>
+      <p:sp>
+        <p:nvSpPr>
+          <p:cNvPr id="9" name="TextBox 8"/>
           <p:cNvSpPr txBox="1"/>
           <p:nvPr/>
         </p:nvSpPr>
@@ -6770,7 +7445,7 @@
             <a:avLst/>
           </a:prstGeom>
           <a:solidFill>
-            <a:srgbClr val="FFB72B"/>
+            <a:srgbClr val="4CAF50"/>
           </a:solidFill>
           <a:ln>
             <a:noFill/>
@@ -6823,13 +7498,13 @@
             <a:pPr algn="l">
               <a:defRPr sz="1000" b="1">
                 <a:solidFill>
-                  <a:srgbClr val="FFB72B"/>
-                </a:solidFill>
-                <a:latin typeface="Calibri"/>
-              </a:defRPr>
-            </a:pPr>
-            <a:r>
-              <a:t>🎂  CELEBRATION</a:t>
+                  <a:srgbClr val="4CAF50"/>
+                </a:solidFill>
+                <a:latin typeface="Calibri"/>
+              </a:defRPr>
+            </a:pPr>
+            <a:r>
+              <a:t>🚀  WIN</a:t>
             </a:r>
           </a:p>
         </p:txBody>
@@ -6859,13 +7534,13 @@
             <a:pPr algn="l">
               <a:defRPr sz="3200" b="1" i="0">
                 <a:solidFill>
-                  <a:srgbClr val="FFB72B"/>
-                </a:solidFill>
-                <a:latin typeface="Calibri"/>
-              </a:defRPr>
-            </a:pPr>
-            <a:r>
-              <a:t>Happy Birthday!</a:t>
+                  <a:srgbClr val="4CAF50"/>
+                </a:solidFill>
+                <a:latin typeface="Calibri"/>
+              </a:defRPr>
+            </a:pPr>
+            <a:r>
+              <a:t>DevOps Innovation</a:t>
             </a:r>
           </a:p>
         </p:txBody>
@@ -6879,21 +7554,129 @@
         <p:spPr>
           <a:xfrm>
             <a:off x="1097280" y="2103120"/>
-            <a:ext cx="9966960" cy="640080"/>
-          </a:xfrm>
-          <a:prstGeom prst="rect">
-            <a:avLst/>
-          </a:prstGeom>
-          <a:noFill/>
-        </p:spPr>
-        <p:txBody>
-          <a:bodyPr wrap="square">
-            <a:spAutoFit/>
-          </a:bodyPr>
-          <a:lstStyle/>
-          <a:p>
-            <a:pPr algn="l">
-              <a:defRPr sz="2800" b="1" i="0">
+            <a:ext cx="4572000" cy="822960"/>
+          </a:xfrm>
+          <a:prstGeom prst="rect">
+            <a:avLst/>
+          </a:prstGeom>
+          <a:noFill/>
+        </p:spPr>
+        <p:txBody>
+          <a:bodyPr wrap="square">
+            <a:spAutoFit/>
+          </a:bodyPr>
+          <a:lstStyle/>
+          <a:p>
+            <a:pPr algn="l">
+              <a:defRPr sz="4800" b="1" i="0">
+                <a:solidFill>
+                  <a:srgbClr val="4CAF50"/>
+                </a:solidFill>
+                <a:latin typeface="Calibri"/>
+              </a:defRPr>
+            </a:pPr>
+            <a:r>
+              <a:t>98</a:t>
+            </a:r>
+          </a:p>
+        </p:txBody>
+      </p:sp>
+      <p:sp>
+        <p:nvSpPr>
+          <p:cNvPr id="6" name="TextBox 5"/>
+          <p:cNvSpPr txBox="1"/>
+          <p:nvPr/>
+        </p:nvSpPr>
+        <p:spPr>
+          <a:xfrm>
+            <a:off x="1097280" y="2834640"/>
+            <a:ext cx="4572000" cy="365760"/>
+          </a:xfrm>
+          <a:prstGeom prst="rect">
+            <a:avLst/>
+          </a:prstGeom>
+          <a:noFill/>
+        </p:spPr>
+        <p:txBody>
+          <a:bodyPr wrap="square">
+            <a:spAutoFit/>
+          </a:bodyPr>
+          <a:lstStyle/>
+          <a:p>
+            <a:pPr algn="l">
+              <a:defRPr sz="1200" b="0" i="0">
+                <a:solidFill>
+                  <a:srgbClr val="8F95A3"/>
+                </a:solidFill>
+                <a:latin typeface="Calibri"/>
+              </a:defRPr>
+            </a:pPr>
+            <a:r>
+              <a:t>reactions</a:t>
+            </a:r>
+          </a:p>
+        </p:txBody>
+      </p:sp>
+      <p:sp>
+        <p:nvSpPr>
+          <p:cNvPr id="7" name="TextBox 6"/>
+          <p:cNvSpPr txBox="1"/>
+          <p:nvPr/>
+        </p:nvSpPr>
+        <p:spPr>
+          <a:xfrm>
+            <a:off x="1097280" y="3291840"/>
+            <a:ext cx="9966960" cy="365760"/>
+          </a:xfrm>
+          <a:prstGeom prst="rect">
+            <a:avLst/>
+          </a:prstGeom>
+          <a:noFill/>
+        </p:spPr>
+        <p:txBody>
+          <a:bodyPr wrap="square">
+            <a:spAutoFit/>
+          </a:bodyPr>
+          <a:lstStyle/>
+          <a:p>
+            <a:pPr algn="l">
+              <a:defRPr sz="1400" b="0" i="0">
+                <a:solidFill>
+                  <a:srgbClr val="E2E2EA"/>
+                </a:solidFill>
+                <a:latin typeface="Calibri"/>
+              </a:defRPr>
+            </a:pPr>
+            <a:r>
+              <a:t>by Gleb Krahotkin &amp; DevOps Team</a:t>
+            </a:r>
+          </a:p>
+        </p:txBody>
+      </p:sp>
+      <p:sp>
+        <p:nvSpPr>
+          <p:cNvPr id="8" name="TextBox 7"/>
+          <p:cNvSpPr txBox="1"/>
+          <p:nvPr/>
+        </p:nvSpPr>
+        <p:spPr>
+          <a:xfrm>
+            <a:off x="1097280" y="3840480"/>
+            <a:ext cx="9966960" cy="457200"/>
+          </a:xfrm>
+          <a:prstGeom prst="rect">
+            <a:avLst/>
+          </a:prstGeom>
+          <a:noFill/>
+        </p:spPr>
+        <p:txBody>
+          <a:bodyPr wrap="square">
+            <a:spAutoFit/>
+          </a:bodyPr>
+          <a:lstStyle/>
+          <a:p>
+            <a:pPr algn="l">
+              <a:defRPr sz="1800" b="1" i="0">
                 <a:solidFill>
                   <a:srgbClr val="FFFFFF"/>
                 </a:solidFill>
@@ -6901,21 +7684,21 @@
               </a:defRPr>
             </a:pPr>
             <a:r>
-              <a:t>Liliya Garifullina</a:t>
-            </a:r>
-          </a:p>
-        </p:txBody>
-      </p:sp>
-      <p:sp>
-        <p:nvSpPr>
-          <p:cNvPr id="6" name="TextBox 5"/>
-          <p:cNvSpPr txBox="1"/>
-          <p:nvPr/>
-        </p:nvSpPr>
-        <p:spPr>
-          <a:xfrm>
-            <a:off x="1097280" y="2743200"/>
-            <a:ext cx="9966960" cy="365760"/>
+              <a:t>Coolify Platform Launch Success!</a:t>
+            </a:r>
+          </a:p>
+        </p:txBody>
+      </p:sp>
+      <p:sp>
+        <p:nvSpPr>
+          <p:cNvPr id="9" name="TextBox 8"/>
+          <p:cNvSpPr txBox="1"/>
+          <p:nvPr/>
+        </p:nvSpPr>
+        <p:spPr>
+          <a:xfrm>
+            <a:off x="1097280" y="4389120"/>
+            <a:ext cx="9966960" cy="914400"/>
           </a:xfrm>
           <a:prstGeom prst="rect">
             <a:avLst/>
@@ -6931,85 +7714,49 @@
             <a:pPr algn="l">
               <a:defRPr sz="1400" b="0" i="0">
                 <a:solidFill>
+                  <a:srgbClr val="E2E2EA"/>
+                </a:solidFill>
+                <a:latin typeface="Calibri"/>
+              </a:defRPr>
+            </a:pPr>
+            <a:r>
+              <a:t>New deployment service allows applications to be deployed in just a few clicks</a:t>
+            </a:r>
+          </a:p>
+        </p:txBody>
+      </p:sp>
+      <p:sp>
+        <p:nvSpPr>
+          <p:cNvPr id="10" name="TextBox 9"/>
+          <p:cNvSpPr txBox="1"/>
+          <p:nvPr/>
+        </p:nvSpPr>
+        <p:spPr>
+          <a:xfrm>
+            <a:off x="1097280" y="5486400"/>
+            <a:ext cx="9966960" cy="457200"/>
+          </a:xfrm>
+          <a:prstGeom prst="rect">
+            <a:avLst/>
+          </a:prstGeom>
+          <a:noFill/>
+        </p:spPr>
+        <p:txBody>
+          <a:bodyPr wrap="square">
+            <a:spAutoFit/>
+          </a:bodyPr>
+          <a:lstStyle/>
+          <a:p>
+            <a:pPr algn="l">
+              <a:defRPr sz="1300" b="0" i="1">
+                <a:solidFill>
                   <a:srgbClr val="8F95A3"/>
                 </a:solidFill>
                 <a:latin typeface="Calibri"/>
               </a:defRPr>
             </a:pPr>
             <a:r>
-              <a:t>March 11</a:t>
-            </a:r>
-          </a:p>
-        </p:txBody>
-      </p:sp>
-      <p:sp>
-        <p:nvSpPr>
-          <p:cNvPr id="7" name="TextBox 6"/>
-          <p:cNvSpPr txBox="1"/>
-          <p:nvPr/>
-        </p:nvSpPr>
-        <p:spPr>
-          <a:xfrm>
-            <a:off x="1097280" y="3291840"/>
-            <a:ext cx="9966960" cy="914400"/>
-          </a:xfrm>
-          <a:prstGeom prst="rect">
-            <a:avLst/>
-          </a:prstGeom>
-          <a:noFill/>
-        </p:spPr>
-        <p:txBody>
-          <a:bodyPr wrap="square">
-            <a:spAutoFit/>
-          </a:bodyPr>
-          <a:lstStyle/>
-          <a:p>
-            <a:pPr algn="l">
-              <a:defRPr sz="1600" b="0" i="0">
-                <a:solidFill>
-                  <a:srgbClr val="E2E2EA"/>
-                </a:solidFill>
-                <a:latin typeface="Calibri"/>
-              </a:defRPr>
-            </a:pPr>
-            <a:r>
-              <a:t>Wishing you an amazing day filled with joy and celebration!</a:t>
-            </a:r>
-          </a:p>
-        </p:txBody>
-      </p:sp>
-      <p:sp>
-        <p:nvSpPr>
-          <p:cNvPr id="8" name="TextBox 7"/>
-          <p:cNvSpPr txBox="1"/>
-          <p:nvPr/>
-        </p:nvSpPr>
-        <p:spPr>
-          <a:xfrm>
-            <a:off x="1097280" y="4572000"/>
-            <a:ext cx="9966960" cy="457200"/>
-          </a:xfrm>
-          <a:prstGeom prst="rect">
-            <a:avLst/>
-          </a:prstGeom>
-          <a:noFill/>
-        </p:spPr>
-        <p:txBody>
-          <a:bodyPr wrap="square">
-            <a:spAutoFit/>
-          </a:bodyPr>
-          <a:lstStyle/>
-          <a:p>
-            <a:pPr algn="l">
-              <a:defRPr sz="1400" b="0" i="1">
-                <a:solidFill>
-                  <a:srgbClr val="FFB72B"/>
-                </a:solidFill>
-                <a:latin typeface="Calibri"/>
-              </a:defRPr>
-            </a:pPr>
-            <a:r>
-              <a:t>With love, Your Appodeal Team 💜</a:t>
+              <a:t>💬 "Making development faster and more accessible for everyone"</a:t>
             </a:r>
           </a:p>
         </p:txBody>
@@ -7055,7 +7802,7 @@
             <a:avLst/>
           </a:prstGeom>
           <a:solidFill>
-            <a:srgbClr val="FFB72B"/>
+            <a:srgbClr val="FFB74D"/>
           </a:solidFill>
           <a:ln>
             <a:noFill/>
@@ -7108,13 +7855,13 @@
             <a:pPr algn="l">
               <a:defRPr sz="1000" b="1">
                 <a:solidFill>
-                  <a:srgbClr val="FFB72B"/>
-                </a:solidFill>
-                <a:latin typeface="Calibri"/>
-              </a:defRPr>
-            </a:pPr>
-            <a:r>
-              <a:t>🎂  CELEBRATION</a:t>
+                  <a:srgbClr val="FFB74D"/>
+                </a:solidFill>
+                <a:latin typeface="Calibri"/>
+              </a:defRPr>
+            </a:pPr>
+            <a:r>
+              <a:t>👏  CLAPS</a:t>
             </a:r>
           </a:p>
         </p:txBody>
@@ -7144,13 +7891,13 @@
             <a:pPr algn="l">
               <a:defRPr sz="3200" b="1" i="0">
                 <a:solidFill>
-                  <a:srgbClr val="FFB72B"/>
-                </a:solidFill>
-                <a:latin typeface="Calibri"/>
-              </a:defRPr>
-            </a:pPr>
-            <a:r>
-              <a:t>Happy Birthday!</a:t>
+                  <a:srgbClr val="FFB74D"/>
+                </a:solidFill>
+                <a:latin typeface="Calibri"/>
+              </a:defRPr>
+            </a:pPr>
+            <a:r>
+              <a:t>Outstanding Recognition</a:t>
             </a:r>
           </a:p>
         </p:txBody>
@@ -7164,7 +7911,7 @@
         <p:spPr>
           <a:xfrm>
             <a:off x="1097280" y="2103120"/>
-            <a:ext cx="9966960" cy="640080"/>
+            <a:ext cx="2743200" cy="548640"/>
           </a:xfrm>
           <a:prstGeom prst="rect">
             <a:avLst/>
@@ -7180,77 +7927,113 @@
             <a:pPr algn="l">
               <a:defRPr sz="2800" b="1" i="0">
                 <a:solidFill>
+                  <a:srgbClr val="FFB74D"/>
+                </a:solidFill>
+                <a:latin typeface="Calibri"/>
+              </a:defRPr>
+            </a:pPr>
+            <a:r>
+              <a:t>50</a:t>
+            </a:r>
+          </a:p>
+        </p:txBody>
+      </p:sp>
+      <p:sp>
+        <p:nvSpPr>
+          <p:cNvPr id="6" name="TextBox 5"/>
+          <p:cNvSpPr txBox="1"/>
+          <p:nvPr/>
+        </p:nvSpPr>
+        <p:spPr>
+          <a:xfrm>
+            <a:off x="1097280" y="2651760"/>
+            <a:ext cx="9966960" cy="365760"/>
+          </a:xfrm>
+          <a:prstGeom prst="rect">
+            <a:avLst/>
+          </a:prstGeom>
+          <a:noFill/>
+        </p:spPr>
+        <p:txBody>
+          <a:bodyPr wrap="square">
+            <a:spAutoFit/>
+          </a:bodyPr>
+          <a:lstStyle/>
+          <a:p>
+            <a:pPr algn="l">
+              <a:defRPr sz="1400" b="0" i="0">
+                <a:solidFill>
+                  <a:srgbClr val="E2E2EA"/>
+                </a:solidFill>
+                <a:latin typeface="Calibri"/>
+              </a:defRPr>
+            </a:pPr>
+            <a:r>
+              <a:t>from pavel.savinskiy</a:t>
+            </a:r>
+          </a:p>
+        </p:txBody>
+      </p:sp>
+      <p:sp>
+        <p:nvSpPr>
+          <p:cNvPr id="7" name="TextBox 6"/>
+          <p:cNvSpPr txBox="1"/>
+          <p:nvPr/>
+        </p:nvSpPr>
+        <p:spPr>
+          <a:xfrm>
+            <a:off x="1097280" y="3108960"/>
+            <a:ext cx="9966960" cy="365760"/>
+          </a:xfrm>
+          <a:prstGeom prst="rect">
+            <a:avLst/>
+          </a:prstGeom>
+          <a:noFill/>
+        </p:spPr>
+        <p:txBody>
+          <a:bodyPr wrap="square">
+            <a:spAutoFit/>
+          </a:bodyPr>
+          <a:lstStyle/>
+          <a:p>
+            <a:pPr algn="l">
+              <a:defRPr sz="1400" b="1" i="0">
+                <a:solidFill>
                   <a:srgbClr val="FFFFFF"/>
                 </a:solidFill>
                 <a:latin typeface="Calibri"/>
               </a:defRPr>
             </a:pPr>
             <a:r>
-              <a:t>Roman de las Heras</a:t>
-            </a:r>
-          </a:p>
-        </p:txBody>
-      </p:sp>
-      <p:sp>
-        <p:nvSpPr>
-          <p:cNvPr id="6" name="TextBox 5"/>
-          <p:cNvSpPr txBox="1"/>
-          <p:nvPr/>
-        </p:nvSpPr>
-        <p:spPr>
-          <a:xfrm>
-            <a:off x="1097280" y="2743200"/>
-            <a:ext cx="9966960" cy="365760"/>
-          </a:xfrm>
-          <a:prstGeom prst="rect">
-            <a:avLst/>
-          </a:prstGeom>
-          <a:noFill/>
-        </p:spPr>
-        <p:txBody>
-          <a:bodyPr wrap="square">
-            <a:spAutoFit/>
-          </a:bodyPr>
-          <a:lstStyle/>
-          <a:p>
-            <a:pPr algn="l">
-              <a:defRPr sz="1400" b="0" i="0">
-                <a:solidFill>
-                  <a:srgbClr val="8F95A3"/>
-                </a:solidFill>
-                <a:latin typeface="Calibri"/>
-              </a:defRPr>
-            </a:pPr>
-            <a:r>
-              <a:t>March 11</a:t>
-            </a:r>
-          </a:p>
-        </p:txBody>
-      </p:sp>
-      <p:sp>
-        <p:nvSpPr>
-          <p:cNvPr id="7" name="TextBox 6"/>
-          <p:cNvSpPr txBox="1"/>
-          <p:nvPr/>
-        </p:nvSpPr>
-        <p:spPr>
-          <a:xfrm>
-            <a:off x="1097280" y="3291840"/>
-            <a:ext cx="9966960" cy="914400"/>
-          </a:xfrm>
-          <a:prstGeom prst="rect">
-            <a:avLst/>
-          </a:prstGeom>
-          <a:noFill/>
-        </p:spPr>
-        <p:txBody>
-          <a:bodyPr wrap="square">
-            <a:spAutoFit/>
-          </a:bodyPr>
-          <a:lstStyle/>
-          <a:p>
-            <a:pPr algn="l">
-              <a:defRPr sz="1600" b="0" i="0">
+              <a:t>to: sergeydesigner</a:t>
+            </a:r>
+          </a:p>
+        </p:txBody>
+      </p:sp>
+      <p:sp>
+        <p:nvSpPr>
+          <p:cNvPr id="8" name="TextBox 7"/>
+          <p:cNvSpPr txBox="1"/>
+          <p:nvPr/>
+        </p:nvSpPr>
+        <p:spPr>
+          <a:xfrm>
+            <a:off x="1097280" y="3749039"/>
+            <a:ext cx="9966960" cy="1097280"/>
+          </a:xfrm>
+          <a:prstGeom prst="rect">
+            <a:avLst/>
+          </a:prstGeom>
+          <a:noFill/>
+        </p:spPr>
+        <p:txBody>
+          <a:bodyPr wrap="square">
+            <a:spAutoFit/>
+          </a:bodyPr>
+          <a:lstStyle/>
+          <a:p>
+            <a:pPr algn="l">
+              <a:defRPr sz="1500" b="0" i="1">
                 <a:solidFill>
                   <a:srgbClr val="E2E2EA"/>
                 </a:solidFill>
@@ -7258,20 +8041,20 @@
               </a:defRPr>
             </a:pPr>
             <a:r>
-              <a:t>Wishing you an amazing day filled with joy and celebration!</a:t>
-            </a:r>
-          </a:p>
-        </p:txBody>
-      </p:sp>
-      <p:sp>
-        <p:nvSpPr>
-          <p:cNvPr id="8" name="TextBox 7"/>
-          <p:cNvSpPr txBox="1"/>
-          <p:nvPr/>
-        </p:nvSpPr>
-        <p:spPr>
-          <a:xfrm>
-            <a:off x="1097280" y="4572000"/>
+              <a:t>"Exceptional design work and creativity"</a:t>
+            </a:r>
+          </a:p>
+        </p:txBody>
+      </p:sp>
+      <p:sp>
+        <p:nvSpPr>
+          <p:cNvPr id="9" name="TextBox 8"/>
+          <p:cNvSpPr txBox="1"/>
+          <p:nvPr/>
+        </p:nvSpPr>
+        <p:spPr>
+          <a:xfrm>
+            <a:off x="1097280" y="5120640"/>
             <a:ext cx="9966960" cy="457200"/>
           </a:xfrm>
           <a:prstGeom prst="rect">
@@ -7286,15 +8069,15 @@
           <a:lstStyle/>
           <a:p>
             <a:pPr algn="l">
-              <a:defRPr sz="1400" b="0" i="1">
-                <a:solidFill>
-                  <a:srgbClr val="FFB72B"/>
-                </a:solidFill>
-                <a:latin typeface="Calibri"/>
-              </a:defRPr>
-            </a:pPr>
-            <a:r>
-              <a:t>With love, Your Appodeal Team 💜</a:t>
+              <a:defRPr sz="1200" b="1" i="0">
+                <a:solidFill>
+                  <a:srgbClr val="FFB74D"/>
+                </a:solidFill>
+                <a:latin typeface="Calibri"/>
+              </a:defRPr>
+            </a:pPr>
+            <a:r>
+              <a:t>EXCELLENCE · CREATIVITY</a:t>
             </a:r>
           </a:p>
         </p:txBody>
@@ -7340,7 +8123,7 @@
             <a:avLst/>
           </a:prstGeom>
           <a:solidFill>
-            <a:srgbClr val="FFB72B"/>
+            <a:srgbClr val="9C27B0"/>
           </a:solidFill>
           <a:ln>
             <a:noFill/>
@@ -7393,13 +8176,13 @@
             <a:pPr algn="l">
               <a:defRPr sz="1000" b="1">
                 <a:solidFill>
-                  <a:srgbClr val="FFB72B"/>
-                </a:solidFill>
-                <a:latin typeface="Calibri"/>
-              </a:defRPr>
-            </a:pPr>
-            <a:r>
-              <a:t>🎂  CELEBRATION</a:t>
+                  <a:srgbClr val="9C27B0"/>
+                </a:solidFill>
+                <a:latin typeface="Calibri"/>
+              </a:defRPr>
+            </a:pPr>
+            <a:r>
+              <a:t>🎓  EVENT</a:t>
             </a:r>
           </a:p>
         </p:txBody>
@@ -7429,13 +8212,13 @@
             <a:pPr algn="l">
               <a:defRPr sz="3200" b="1" i="0">
                 <a:solidFill>
-                  <a:srgbClr val="FFB72B"/>
-                </a:solidFill>
-                <a:latin typeface="Calibri"/>
-              </a:defRPr>
-            </a:pPr>
-            <a:r>
-              <a:t>Happy Birthday!</a:t>
+                  <a:srgbClr val="9C27B0"/>
+                </a:solidFill>
+                <a:latin typeface="Calibri"/>
+              </a:defRPr>
+            </a:pPr>
+            <a:r>
+              <a:t>Learning &amp; Growth</a:t>
             </a:r>
           </a:p>
         </p:txBody>
@@ -7449,21 +8232,21 @@
         <p:spPr>
           <a:xfrm>
             <a:off x="1097280" y="2103120"/>
-            <a:ext cx="9966960" cy="640080"/>
-          </a:xfrm>
-          <a:prstGeom prst="rect">
-            <a:avLst/>
-          </a:prstGeom>
-          <a:noFill/>
-        </p:spPr>
-        <p:txBody>
-          <a:bodyPr wrap="square">
-            <a:spAutoFit/>
-          </a:bodyPr>
-          <a:lstStyle/>
-          <a:p>
-            <a:pPr algn="l">
-              <a:defRPr sz="2800" b="1" i="0">
+            <a:ext cx="9966960" cy="548640"/>
+          </a:xfrm>
+          <a:prstGeom prst="rect">
+            <a:avLst/>
+          </a:prstGeom>
+          <a:noFill/>
+        </p:spPr>
+        <p:txBody>
+          <a:bodyPr wrap="square">
+            <a:spAutoFit/>
+          </a:bodyPr>
+          <a:lstStyle/>
+          <a:p>
+            <a:pPr algn="l">
+              <a:defRPr sz="2200" b="1" i="0">
                 <a:solidFill>
                   <a:srgbClr val="FFFFFF"/>
                 </a:solidFill>
@@ -7471,7 +8254,7 @@
               </a:defRPr>
             </a:pPr>
             <a:r>
-              <a:t>Olga Petriakova</a:t>
+              <a:t>11th Lunch &amp; Learn Session</a:t>
             </a:r>
           </a:p>
         </p:txBody>
@@ -7499,7 +8282,79 @@
           <a:lstStyle/>
           <a:p>
             <a:pPr algn="l">
-              <a:defRPr sz="1400" b="0" i="0">
+              <a:defRPr sz="1400" b="1" i="0">
+                <a:solidFill>
+                  <a:srgbClr val="9C27B0"/>
+                </a:solidFill>
+                <a:latin typeface="Calibri"/>
+              </a:defRPr>
+            </a:pPr>
+            <a:r>
+              <a:t>Recently completed</a:t>
+            </a:r>
+          </a:p>
+        </p:txBody>
+      </p:sp>
+      <p:sp>
+        <p:nvSpPr>
+          <p:cNvPr id="7" name="TextBox 6"/>
+          <p:cNvSpPr txBox="1"/>
+          <p:nvPr/>
+        </p:nvSpPr>
+        <p:spPr>
+          <a:xfrm>
+            <a:off x="1097280" y="3291840"/>
+            <a:ext cx="9966960" cy="1371600"/>
+          </a:xfrm>
+          <a:prstGeom prst="rect">
+            <a:avLst/>
+          </a:prstGeom>
+          <a:noFill/>
+        </p:spPr>
+        <p:txBody>
+          <a:bodyPr wrap="square">
+            <a:spAutoFit/>
+          </a:bodyPr>
+          <a:lstStyle/>
+          <a:p>
+            <a:pPr algn="l">
+              <a:defRPr sz="1500" b="0" i="0">
+                <a:solidFill>
+                  <a:srgbClr val="E2E2EA"/>
+                </a:solidFill>
+                <a:latin typeface="Calibri"/>
+              </a:defRPr>
+            </a:pPr>
+            <a:r>
+              <a:t>Fraud Traffic Detection presentation by Timofey Levanov with recording available</a:t>
+            </a:r>
+          </a:p>
+        </p:txBody>
+      </p:sp>
+      <p:sp>
+        <p:nvSpPr>
+          <p:cNvPr id="8" name="TextBox 7"/>
+          <p:cNvSpPr txBox="1"/>
+          <p:nvPr/>
+        </p:nvSpPr>
+        <p:spPr>
+          <a:xfrm>
+            <a:off x="1097280" y="5029200"/>
+            <a:ext cx="9966960" cy="365760"/>
+          </a:xfrm>
+          <a:prstGeom prst="rect">
+            <a:avLst/>
+          </a:prstGeom>
+          <a:noFill/>
+        </p:spPr>
+        <p:txBody>
+          <a:bodyPr wrap="square">
+            <a:spAutoFit/>
+          </a:bodyPr>
+          <a:lstStyle/>
+          <a:p>
+            <a:pPr algn="l">
+              <a:defRPr sz="1300" b="0" i="0">
                 <a:solidFill>
                   <a:srgbClr val="8F95A3"/>
                 </a:solidFill>
@@ -7507,79 +8362,7 @@
               </a:defRPr>
             </a:pPr>
             <a:r>
-              <a:t>March 11</a:t>
-            </a:r>
-          </a:p>
-        </p:txBody>
-      </p:sp>
-      <p:sp>
-        <p:nvSpPr>
-          <p:cNvPr id="7" name="TextBox 6"/>
-          <p:cNvSpPr txBox="1"/>
-          <p:nvPr/>
-        </p:nvSpPr>
-        <p:spPr>
-          <a:xfrm>
-            <a:off x="1097280" y="3291840"/>
-            <a:ext cx="9966960" cy="914400"/>
-          </a:xfrm>
-          <a:prstGeom prst="rect">
-            <a:avLst/>
-          </a:prstGeom>
-          <a:noFill/>
-        </p:spPr>
-        <p:txBody>
-          <a:bodyPr wrap="square">
-            <a:spAutoFit/>
-          </a:bodyPr>
-          <a:lstStyle/>
-          <a:p>
-            <a:pPr algn="l">
-              <a:defRPr sz="1600" b="0" i="0">
-                <a:solidFill>
-                  <a:srgbClr val="E2E2EA"/>
-                </a:solidFill>
-                <a:latin typeface="Calibri"/>
-              </a:defRPr>
-            </a:pPr>
-            <a:r>
-              <a:t>Wishing you an amazing day filled with joy and celebration!</a:t>
-            </a:r>
-          </a:p>
-        </p:txBody>
-      </p:sp>
-      <p:sp>
-        <p:nvSpPr>
-          <p:cNvPr id="8" name="TextBox 7"/>
-          <p:cNvSpPr txBox="1"/>
-          <p:nvPr/>
-        </p:nvSpPr>
-        <p:spPr>
-          <a:xfrm>
-            <a:off x="1097280" y="4572000"/>
-            <a:ext cx="9966960" cy="457200"/>
-          </a:xfrm>
-          <a:prstGeom prst="rect">
-            <a:avLst/>
-          </a:prstGeom>
-          <a:noFill/>
-        </p:spPr>
-        <p:txBody>
-          <a:bodyPr wrap="square">
-            <a:spAutoFit/>
-          </a:bodyPr>
-          <a:lstStyle/>
-          <a:p>
-            <a:pPr algn="l">
-              <a:defRPr sz="1400" b="0" i="1">
-                <a:solidFill>
-                  <a:srgbClr val="FFB72B"/>
-                </a:solidFill>
-                <a:latin typeface="Calibri"/>
-              </a:defRPr>
-            </a:pPr>
-            <a:r>
-              <a:t>With love, Your Appodeal Team 💜</a:t>
+              <a:t>Organized by Katarzyna Raniszewska</a:t>
             </a:r>
           </a:p>
         </p:txBody>
@@ -7625,7 +8408,7 @@
             <a:avLst/>
           </a:prstGeom>
           <a:solidFill>
-            <a:srgbClr val="FFB72B"/>
+            <a:srgbClr val="FF7043"/>
           </a:solidFill>
           <a:ln>
             <a:noFill/>
@@ -7678,13 +8461,13 @@
             <a:pPr algn="l">
               <a:defRPr sz="1000" b="1">
                 <a:solidFill>
-                  <a:srgbClr val="FFB72B"/>
-                </a:solidFill>
-                <a:latin typeface="Calibri"/>
-              </a:defRPr>
-            </a:pPr>
-            <a:r>
-              <a:t>🎂  CELEBRATION</a:t>
+                  <a:srgbClr val="FF7043"/>
+                </a:solidFill>
+                <a:latin typeface="Calibri"/>
+              </a:defRPr>
+            </a:pPr>
+            <a:r>
+              <a:t>🌟  CLAPS</a:t>
             </a:r>
           </a:p>
         </p:txBody>
@@ -7714,13 +8497,13 @@
             <a:pPr algn="l">
               <a:defRPr sz="3200" b="1" i="0">
                 <a:solidFill>
-                  <a:srgbClr val="FFB72B"/>
-                </a:solidFill>
-                <a:latin typeface="Calibri"/>
-              </a:defRPr>
-            </a:pPr>
-            <a:r>
-              <a:t>Happy Birthday!</a:t>
+                  <a:srgbClr val="FF7043"/>
+                </a:solidFill>
+                <a:latin typeface="Calibri"/>
+              </a:defRPr>
+            </a:pPr>
+            <a:r>
+              <a:t>Team Excellence</a:t>
             </a:r>
           </a:p>
         </p:txBody>
@@ -7734,7 +8517,7 @@
         <p:spPr>
           <a:xfrm>
             <a:off x="1097280" y="2103120"/>
-            <a:ext cx="9966960" cy="640080"/>
+            <a:ext cx="2743200" cy="548640"/>
           </a:xfrm>
           <a:prstGeom prst="rect">
             <a:avLst/>
@@ -7750,77 +8533,113 @@
             <a:pPr algn="l">
               <a:defRPr sz="2800" b="1" i="0">
                 <a:solidFill>
+                  <a:srgbClr val="FF7043"/>
+                </a:solidFill>
+                <a:latin typeface="Calibri"/>
+              </a:defRPr>
+            </a:pPr>
+            <a:r>
+              <a:t>50</a:t>
+            </a:r>
+          </a:p>
+        </p:txBody>
+      </p:sp>
+      <p:sp>
+        <p:nvSpPr>
+          <p:cNvPr id="6" name="TextBox 5"/>
+          <p:cNvSpPr txBox="1"/>
+          <p:nvPr/>
+        </p:nvSpPr>
+        <p:spPr>
+          <a:xfrm>
+            <a:off x="1097280" y="2651760"/>
+            <a:ext cx="9966960" cy="365760"/>
+          </a:xfrm>
+          <a:prstGeom prst="rect">
+            <a:avLst/>
+          </a:prstGeom>
+          <a:noFill/>
+        </p:spPr>
+        <p:txBody>
+          <a:bodyPr wrap="square">
+            <a:spAutoFit/>
+          </a:bodyPr>
+          <a:lstStyle/>
+          <a:p>
+            <a:pPr algn="l">
+              <a:defRPr sz="1400" b="0" i="0">
+                <a:solidFill>
+                  <a:srgbClr val="E2E2EA"/>
+                </a:solidFill>
+                <a:latin typeface="Calibri"/>
+              </a:defRPr>
+            </a:pPr>
+            <a:r>
+              <a:t>from Sem Sinchenko</a:t>
+            </a:r>
+          </a:p>
+        </p:txBody>
+      </p:sp>
+      <p:sp>
+        <p:nvSpPr>
+          <p:cNvPr id="7" name="TextBox 6"/>
+          <p:cNvSpPr txBox="1"/>
+          <p:nvPr/>
+        </p:nvSpPr>
+        <p:spPr>
+          <a:xfrm>
+            <a:off x="1097280" y="3108960"/>
+            <a:ext cx="9966960" cy="365760"/>
+          </a:xfrm>
+          <a:prstGeom prst="rect">
+            <a:avLst/>
+          </a:prstGeom>
+          <a:noFill/>
+        </p:spPr>
+        <p:txBody>
+          <a:bodyPr wrap="square">
+            <a:spAutoFit/>
+          </a:bodyPr>
+          <a:lstStyle/>
+          <a:p>
+            <a:pPr algn="l">
+              <a:defRPr sz="1400" b="1" i="0">
+                <a:solidFill>
                   <a:srgbClr val="FFFFFF"/>
                 </a:solidFill>
                 <a:latin typeface="Calibri"/>
               </a:defRPr>
             </a:pPr>
             <a:r>
-              <a:t>Olga Petriakova</a:t>
-            </a:r>
-          </a:p>
-        </p:txBody>
-      </p:sp>
-      <p:sp>
-        <p:nvSpPr>
-          <p:cNvPr id="6" name="TextBox 5"/>
-          <p:cNvSpPr txBox="1"/>
-          <p:nvPr/>
-        </p:nvSpPr>
-        <p:spPr>
-          <a:xfrm>
-            <a:off x="1097280" y="2743200"/>
-            <a:ext cx="9966960" cy="365760"/>
-          </a:xfrm>
-          <a:prstGeom prst="rect">
-            <a:avLst/>
-          </a:prstGeom>
-          <a:noFill/>
-        </p:spPr>
-        <p:txBody>
-          <a:bodyPr wrap="square">
-            <a:spAutoFit/>
-          </a:bodyPr>
-          <a:lstStyle/>
-          <a:p>
-            <a:pPr algn="l">
-              <a:defRPr sz="1400" b="0" i="0">
-                <a:solidFill>
-                  <a:srgbClr val="8F95A3"/>
-                </a:solidFill>
-                <a:latin typeface="Calibri"/>
-              </a:defRPr>
-            </a:pPr>
-            <a:r>
-              <a:t>March 11</a:t>
-            </a:r>
-          </a:p>
-        </p:txBody>
-      </p:sp>
-      <p:sp>
-        <p:nvSpPr>
-          <p:cNvPr id="7" name="TextBox 6"/>
-          <p:cNvSpPr txBox="1"/>
-          <p:nvPr/>
-        </p:nvSpPr>
-        <p:spPr>
-          <a:xfrm>
-            <a:off x="1097280" y="3291840"/>
-            <a:ext cx="9966960" cy="914400"/>
-          </a:xfrm>
-          <a:prstGeom prst="rect">
-            <a:avLst/>
-          </a:prstGeom>
-          <a:noFill/>
-        </p:spPr>
-        <p:txBody>
-          <a:bodyPr wrap="square">
-            <a:spAutoFit/>
-          </a:bodyPr>
-          <a:lstStyle/>
-          <a:p>
-            <a:pPr algn="l">
-              <a:defRPr sz="1600" b="0" i="0">
+              <a:t>to: Ildar Fatykhov</a:t>
+            </a:r>
+          </a:p>
+        </p:txBody>
+      </p:sp>
+      <p:sp>
+        <p:nvSpPr>
+          <p:cNvPr id="8" name="TextBox 7"/>
+          <p:cNvSpPr txBox="1"/>
+          <p:nvPr/>
+        </p:nvSpPr>
+        <p:spPr>
+          <a:xfrm>
+            <a:off x="1097280" y="3749039"/>
+            <a:ext cx="9966960" cy="1097280"/>
+          </a:xfrm>
+          <a:prstGeom prst="rect">
+            <a:avLst/>
+          </a:prstGeom>
+          <a:noFill/>
+        </p:spPr>
+        <p:txBody>
+          <a:bodyPr wrap="square">
+            <a:spAutoFit/>
+          </a:bodyPr>
+          <a:lstStyle/>
+          <a:p>
+            <a:pPr algn="l">
+              <a:defRPr sz="1500" b="0" i="1">
                 <a:solidFill>
                   <a:srgbClr val="E2E2EA"/>
                 </a:solidFill>
@@ -7828,20 +8647,20 @@
               </a:defRPr>
             </a:pPr>
             <a:r>
-              <a:t>Wishing you an amazing day filled with joy and celebration!</a:t>
-            </a:r>
-          </a:p>
-        </p:txBody>
-      </p:sp>
-      <p:sp>
-        <p:nvSpPr>
-          <p:cNvPr id="8" name="TextBox 7"/>
-          <p:cNvSpPr txBox="1"/>
-          <p:nvPr/>
-        </p:nvSpPr>
-        <p:spPr>
-          <a:xfrm>
-            <a:off x="1097280" y="4572000"/>
+              <a:t>"Outstanding technical contributions and leadership"</a:t>
+            </a:r>
+          </a:p>
+        </p:txBody>
+      </p:sp>
+      <p:sp>
+        <p:nvSpPr>
+          <p:cNvPr id="9" name="TextBox 8"/>
+          <p:cNvSpPr txBox="1"/>
+          <p:nvPr/>
+        </p:nvSpPr>
+        <p:spPr>
+          <a:xfrm>
+            <a:off x="1097280" y="5120640"/>
             <a:ext cx="9966960" cy="457200"/>
           </a:xfrm>
           <a:prstGeom prst="rect">
@@ -7856,15 +8675,15 @@
           <a:lstStyle/>
           <a:p>
             <a:pPr algn="l">
-              <a:defRPr sz="1400" b="0" i="1">
-                <a:solidFill>
-                  <a:srgbClr val="FFB72B"/>
-                </a:solidFill>
-                <a:latin typeface="Calibri"/>
-              </a:defRPr>
-            </a:pPr>
-            <a:r>
-              <a:t>With love, Your Appodeal Team 💜</a:t>
+              <a:defRPr sz="1200" b="1" i="0">
+                <a:solidFill>
+                  <a:srgbClr val="FF7043"/>
+                </a:solidFill>
+                <a:latin typeface="Calibri"/>
+              </a:defRPr>
+            </a:pPr>
+            <a:r>
+              <a:t>TECHNICAL EXCELLENCE · LEADERSHIP</a:t>
             </a:r>
           </a:p>
         </p:txBody>
@@ -7910,7 +8729,7 @@
             <a:avLst/>
           </a:prstGeom>
           <a:solidFill>
-            <a:srgbClr val="FFB72B"/>
+            <a:srgbClr val="2196F3"/>
           </a:solidFill>
           <a:ln>
             <a:noFill/>
@@ -7963,13 +8782,13 @@
             <a:pPr algn="l">
               <a:defRPr sz="1000" b="1">
                 <a:solidFill>
-                  <a:srgbClr val="FFB72B"/>
-                </a:solidFill>
-                <a:latin typeface="Calibri"/>
-              </a:defRPr>
-            </a:pPr>
-            <a:r>
-              <a:t>🎂  CELEBRATION</a:t>
+                  <a:srgbClr val="2196F3"/>
+                </a:solidFill>
+                <a:latin typeface="Calibri"/>
+              </a:defRPr>
+            </a:pPr>
+            <a:r>
+              <a:t>📚  RECOMMENDED</a:t>
             </a:r>
           </a:p>
         </p:txBody>
@@ -7999,13 +8818,13 @@
             <a:pPr algn="l">
               <a:defRPr sz="3200" b="1" i="0">
                 <a:solidFill>
-                  <a:srgbClr val="FFB72B"/>
-                </a:solidFill>
-                <a:latin typeface="Calibri"/>
-              </a:defRPr>
-            </a:pPr>
-            <a:r>
-              <a:t>Happy Birthday!</a:t>
+                  <a:srgbClr val="2196F3"/>
+                </a:solidFill>
+                <a:latin typeface="Calibri"/>
+              </a:defRPr>
+            </a:pPr>
+            <a:r>
+              <a:t>Knowledge Sharing</a:t>
             </a:r>
           </a:p>
         </p:txBody>
@@ -8019,21 +8838,57 @@
         <p:spPr>
           <a:xfrm>
             <a:off x="1097280" y="2103120"/>
-            <a:ext cx="9966960" cy="640080"/>
-          </a:xfrm>
-          <a:prstGeom prst="rect">
-            <a:avLst/>
-          </a:prstGeom>
-          <a:noFill/>
-        </p:spPr>
-        <p:txBody>
-          <a:bodyPr wrap="square">
-            <a:spAutoFit/>
-          </a:bodyPr>
-          <a:lstStyle/>
-          <a:p>
-            <a:pPr algn="l">
-              <a:defRPr sz="2800" b="1" i="0">
+            <a:ext cx="457200" cy="365760"/>
+          </a:xfrm>
+          <a:prstGeom prst="rect">
+            <a:avLst/>
+          </a:prstGeom>
+          <a:noFill/>
+        </p:spPr>
+        <p:txBody>
+          <a:bodyPr wrap="square">
+            <a:spAutoFit/>
+          </a:bodyPr>
+          <a:lstStyle/>
+          <a:p>
+            <a:pPr algn="l">
+              <a:defRPr sz="2200" b="1" i="0">
+                <a:solidFill>
+                  <a:srgbClr val="2196F3"/>
+                </a:solidFill>
+                <a:latin typeface="Calibri"/>
+              </a:defRPr>
+            </a:pPr>
+            <a:r>
+              <a:t>01</a:t>
+            </a:r>
+          </a:p>
+        </p:txBody>
+      </p:sp>
+      <p:sp>
+        <p:nvSpPr>
+          <p:cNvPr id="6" name="TextBox 5"/>
+          <p:cNvSpPr txBox="1"/>
+          <p:nvPr/>
+        </p:nvSpPr>
+        <p:spPr>
+          <a:xfrm>
+            <a:off x="1737360" y="2103120"/>
+            <a:ext cx="9326880" cy="365760"/>
+          </a:xfrm>
+          <a:prstGeom prst="rect">
+            <a:avLst/>
+          </a:prstGeom>
+          <a:noFill/>
+        </p:spPr>
+        <p:txBody>
+          <a:bodyPr wrap="square">
+            <a:spAutoFit/>
+          </a:bodyPr>
+          <a:lstStyle/>
+          <a:p>
+            <a:pPr algn="l">
+              <a:defRPr sz="1600" b="1" i="0">
                 <a:solidFill>
                   <a:srgbClr val="FFFFFF"/>
                 </a:solidFill>
@@ -8041,35 +8896,71 @@
               </a:defRPr>
             </a:pPr>
             <a:r>
-              <a:t>Alexandra Molchan</a:t>
-            </a:r>
-          </a:p>
-        </p:txBody>
-      </p:sp>
-      <p:sp>
-        <p:nvSpPr>
-          <p:cNvPr id="6" name="TextBox 5"/>
-          <p:cNvSpPr txBox="1"/>
-          <p:nvPr/>
-        </p:nvSpPr>
-        <p:spPr>
-          <a:xfrm>
-            <a:off x="1097280" y="2743200"/>
-            <a:ext cx="9966960" cy="365760"/>
-          </a:xfrm>
-          <a:prstGeom prst="rect">
-            <a:avLst/>
-          </a:prstGeom>
-          <a:noFill/>
-        </p:spPr>
-        <p:txBody>
-          <a:bodyPr wrap="square">
-            <a:spAutoFit/>
-          </a:bodyPr>
-          <a:lstStyle/>
-          <a:p>
-            <a:pPr algn="l">
-              <a:defRPr sz="1400" b="0" i="0">
+              <a:t>The Speaking Coach: Stop Using This Word</a:t>
+            </a:r>
+          </a:p>
+        </p:txBody>
+      </p:sp>
+      <p:sp>
+        <p:nvSpPr>
+          <p:cNvPr id="7" name="TextBox 6"/>
+          <p:cNvSpPr txBox="1"/>
+          <p:nvPr/>
+        </p:nvSpPr>
+        <p:spPr>
+          <a:xfrm>
+            <a:off x="1737360" y="2423160"/>
+            <a:ext cx="9326880" cy="365760"/>
+          </a:xfrm>
+          <a:prstGeom prst="rect">
+            <a:avLst/>
+          </a:prstGeom>
+          <a:noFill/>
+        </p:spPr>
+        <p:txBody>
+          <a:bodyPr wrap="square">
+            <a:spAutoFit/>
+          </a:bodyPr>
+          <a:lstStyle/>
+          <a:p>
+            <a:pPr algn="l">
+              <a:defRPr sz="1200" b="0" i="0">
+                <a:solidFill>
+                  <a:srgbClr val="E2E2EA"/>
+                </a:solidFill>
+                <a:latin typeface="Calibri"/>
+              </a:defRPr>
+            </a:pPr>
+            <a:r>
+              <a:t>Communication tips that make you sound more confident and credible</a:t>
+            </a:r>
+          </a:p>
+        </p:txBody>
+      </p:sp>
+      <p:sp>
+        <p:nvSpPr>
+          <p:cNvPr id="8" name="TextBox 7"/>
+          <p:cNvSpPr txBox="1"/>
+          <p:nvPr/>
+        </p:nvSpPr>
+        <p:spPr>
+          <a:xfrm>
+            <a:off x="1737360" y="2743200"/>
+            <a:ext cx="9326880" cy="274320"/>
+          </a:xfrm>
+          <a:prstGeom prst="rect">
+            <a:avLst/>
+          </a:prstGeom>
+          <a:noFill/>
+        </p:spPr>
+        <p:txBody>
+          <a:bodyPr wrap="square">
+            <a:spAutoFit/>
+          </a:bodyPr>
+          <a:lstStyle/>
+          <a:p>
+            <a:pPr algn="l">
+              <a:defRPr sz="1100" b="0" i="0">
                 <a:solidFill>
                   <a:srgbClr val="8F95A3"/>
                 </a:solidFill>
@@ -8077,79 +8968,43 @@
               </a:defRPr>
             </a:pPr>
             <a:r>
-              <a:t>March 11</a:t>
-            </a:r>
-          </a:p>
-        </p:txBody>
-      </p:sp>
-      <p:sp>
-        <p:nvSpPr>
-          <p:cNvPr id="7" name="TextBox 6"/>
-          <p:cNvSpPr txBox="1"/>
-          <p:nvPr/>
-        </p:nvSpPr>
-        <p:spPr>
-          <a:xfrm>
-            <a:off x="1097280" y="3291840"/>
-            <a:ext cx="9966960" cy="914400"/>
-          </a:xfrm>
-          <a:prstGeom prst="rect">
-            <a:avLst/>
-          </a:prstGeom>
-          <a:noFill/>
-        </p:spPr>
-        <p:txBody>
-          <a:bodyPr wrap="square">
-            <a:spAutoFit/>
-          </a:bodyPr>
-          <a:lstStyle/>
-          <a:p>
-            <a:pPr algn="l">
-              <a:defRPr sz="1600" b="0" i="0">
-                <a:solidFill>
-                  <a:srgbClr val="E2E2EA"/>
-                </a:solidFill>
-                <a:latin typeface="Calibri"/>
-              </a:defRPr>
-            </a:pPr>
-            <a:r>
-              <a:t>Wishing you an amazing day filled with joy and celebration!</a:t>
-            </a:r>
-          </a:p>
-        </p:txBody>
-      </p:sp>
-      <p:sp>
-        <p:nvSpPr>
-          <p:cNvPr id="8" name="TextBox 7"/>
-          <p:cNvSpPr txBox="1"/>
-          <p:nvPr/>
-        </p:nvSpPr>
-        <p:spPr>
-          <a:xfrm>
-            <a:off x="1097280" y="4572000"/>
-            <a:ext cx="9966960" cy="457200"/>
-          </a:xfrm>
-          <a:prstGeom prst="rect">
-            <a:avLst/>
-          </a:prstGeom>
-          <a:noFill/>
-        </p:spPr>
-        <p:txBody>
-          <a:bodyPr wrap="square">
-            <a:spAutoFit/>
-          </a:bodyPr>
-          <a:lstStyle/>
-          <a:p>
-            <a:pPr algn="l">
-              <a:defRPr sz="1400" b="0" i="1">
-                <a:solidFill>
-                  <a:srgbClr val="FFB72B"/>
-                </a:solidFill>
-                <a:latin typeface="Calibri"/>
-              </a:defRPr>
-            </a:pPr>
-            <a:r>
-              <a:t>With love, Your Appodeal Team 💜</a:t>
+              <a:t>Shared by Maria Plendukova · 2</a:t>
+            </a:r>
+          </a:p>
+        </p:txBody>
+      </p:sp>
+      <p:sp>
+        <p:nvSpPr>
+          <p:cNvPr id="9" name="TextBox 8"/>
+          <p:cNvSpPr txBox="1"/>
+          <p:nvPr/>
+        </p:nvSpPr>
+        <p:spPr>
+          <a:xfrm>
+            <a:off x="1097280" y="5943600"/>
+            <a:ext cx="9966960" cy="274320"/>
+          </a:xfrm>
+          <a:prstGeom prst="rect">
+            <a:avLst/>
+          </a:prstGeom>
+          <a:noFill/>
+        </p:spPr>
+        <p:txBody>
+          <a:bodyPr wrap="square">
+            <a:spAutoFit/>
+          </a:bodyPr>
+          <a:lstStyle/>
+          <a:p>
+            <a:pPr algn="l">
+              <a:defRPr sz="1100" b="0" i="0">
+                <a:solidFill>
+                  <a:srgbClr val="5C6270"/>
+                </a:solidFill>
+                <a:latin typeface="Calibri"/>
+              </a:defRPr>
+            </a:pPr>
+            <a:r>
+              <a:t>#general-chat</a:t>
             </a:r>
           </a:p>
         </p:txBody>
@@ -8195,7 +9050,7 @@
             <a:avLst/>
           </a:prstGeom>
           <a:solidFill>
-            <a:srgbClr val="FFB72B"/>
+            <a:srgbClr val="4CAF50"/>
           </a:solidFill>
           <a:ln>
             <a:noFill/>
@@ -8248,13 +9103,13 @@
             <a:pPr algn="l">
               <a:defRPr sz="1000" b="1">
                 <a:solidFill>
-                  <a:srgbClr val="FFB72B"/>
-                </a:solidFill>
-                <a:latin typeface="Calibri"/>
-              </a:defRPr>
-            </a:pPr>
-            <a:r>
-              <a:t>🎂  CELEBRATION</a:t>
+                  <a:srgbClr val="4CAF50"/>
+                </a:solidFill>
+                <a:latin typeface="Calibri"/>
+              </a:defRPr>
+            </a:pPr>
+            <a:r>
+              <a:t>💰  MILESTONE</a:t>
             </a:r>
           </a:p>
         </p:txBody>
@@ -8284,13 +9139,13 @@
             <a:pPr algn="l">
               <a:defRPr sz="3200" b="1" i="0">
                 <a:solidFill>
-                  <a:srgbClr val="FFB72B"/>
-                </a:solidFill>
-                <a:latin typeface="Calibri"/>
-              </a:defRPr>
-            </a:pPr>
-            <a:r>
-              <a:t>Happy Birthday!</a:t>
+                  <a:srgbClr val="4CAF50"/>
+                </a:solidFill>
+                <a:latin typeface="Calibri"/>
+              </a:defRPr>
+            </a:pPr>
+            <a:r>
+              <a:t>Financial Milestone</a:t>
             </a:r>
           </a:p>
         </p:txBody>
@@ -8304,21 +9159,93 @@
         <p:spPr>
           <a:xfrm>
             <a:off x="1097280" y="2103120"/>
-            <a:ext cx="9966960" cy="640080"/>
-          </a:xfrm>
-          <a:prstGeom prst="rect">
-            <a:avLst/>
-          </a:prstGeom>
-          <a:noFill/>
-        </p:spPr>
-        <p:txBody>
-          <a:bodyPr wrap="square">
-            <a:spAutoFit/>
-          </a:bodyPr>
-          <a:lstStyle/>
-          <a:p>
-            <a:pPr algn="l">
-              <a:defRPr sz="2800" b="1" i="0">
+            <a:ext cx="4572000" cy="822960"/>
+          </a:xfrm>
+          <a:prstGeom prst="rect">
+            <a:avLst/>
+          </a:prstGeom>
+          <a:noFill/>
+        </p:spPr>
+        <p:txBody>
+          <a:bodyPr wrap="square">
+            <a:spAutoFit/>
+          </a:bodyPr>
+          <a:lstStyle/>
+          <a:p>
+            <a:pPr algn="l">
+              <a:defRPr sz="5200" b="1" i="0">
+                <a:solidFill>
+                  <a:srgbClr val="4CAF50"/>
+                </a:solidFill>
+                <a:latin typeface="Calibri"/>
+              </a:defRPr>
+            </a:pPr>
+            <a:r>
+              <a:t>40%</a:t>
+            </a:r>
+          </a:p>
+        </p:txBody>
+      </p:sp>
+      <p:sp>
+        <p:nvSpPr>
+          <p:cNvPr id="6" name="TextBox 5"/>
+          <p:cNvSpPr txBox="1"/>
+          <p:nvPr/>
+        </p:nvSpPr>
+        <p:spPr>
+          <a:xfrm>
+            <a:off x="1097280" y="2926080"/>
+            <a:ext cx="4572000" cy="365760"/>
+          </a:xfrm>
+          <a:prstGeom prst="rect">
+            <a:avLst/>
+          </a:prstGeom>
+          <a:noFill/>
+        </p:spPr>
+        <p:txBody>
+          <a:bodyPr wrap="square">
+            <a:spAutoFit/>
+          </a:bodyPr>
+          <a:lstStyle/>
+          <a:p>
+            <a:pPr algn="l">
+              <a:defRPr sz="1100" b="0" i="0">
+                <a:solidFill>
+                  <a:srgbClr val="8F95A3"/>
+                </a:solidFill>
+                <a:latin typeface="Calibri"/>
+              </a:defRPr>
+            </a:pPr>
+            <a:r>
+              <a:t>YoY Growth Projected</a:t>
+            </a:r>
+          </a:p>
+        </p:txBody>
+      </p:sp>
+      <p:sp>
+        <p:nvSpPr>
+          <p:cNvPr id="7" name="TextBox 6"/>
+          <p:cNvSpPr txBox="1"/>
+          <p:nvPr/>
+        </p:nvSpPr>
+        <p:spPr>
+          <a:xfrm>
+            <a:off x="1097280" y="3566160"/>
+            <a:ext cx="9966960" cy="457200"/>
+          </a:xfrm>
+          <a:prstGeom prst="rect">
+            <a:avLst/>
+          </a:prstGeom>
+          <a:noFill/>
+        </p:spPr>
+        <p:txBody>
+          <a:bodyPr wrap="square">
+            <a:spAutoFit/>
+          </a:bodyPr>
+          <a:lstStyle/>
+          <a:p>
+            <a:pPr algn="l">
+              <a:defRPr sz="1800" b="1" i="0">
                 <a:solidFill>
                   <a:srgbClr val="FFFFFF"/>
                 </a:solidFill>
@@ -8326,71 +9253,35 @@
               </a:defRPr>
             </a:pPr>
             <a:r>
-              <a:t>Sergei Bashkirtsev</a:t>
-            </a:r>
-          </a:p>
-        </p:txBody>
-      </p:sp>
-      <p:sp>
-        <p:nvSpPr>
-          <p:cNvPr id="6" name="TextBox 5"/>
-          <p:cNvSpPr txBox="1"/>
-          <p:nvPr/>
-        </p:nvSpPr>
-        <p:spPr>
-          <a:xfrm>
-            <a:off x="1097280" y="2743200"/>
-            <a:ext cx="9966960" cy="365760"/>
-          </a:xfrm>
-          <a:prstGeom prst="rect">
-            <a:avLst/>
-          </a:prstGeom>
-          <a:noFill/>
-        </p:spPr>
-        <p:txBody>
-          <a:bodyPr wrap="square">
-            <a:spAutoFit/>
-          </a:bodyPr>
-          <a:lstStyle/>
-          <a:p>
-            <a:pPr algn="l">
-              <a:defRPr sz="1400" b="0" i="0">
-                <a:solidFill>
-                  <a:srgbClr val="8F95A3"/>
-                </a:solidFill>
-                <a:latin typeface="Calibri"/>
-              </a:defRPr>
-            </a:pPr>
-            <a:r>
-              <a:t>March 11</a:t>
-            </a:r>
-          </a:p>
-        </p:txBody>
-      </p:sp>
-      <p:sp>
-        <p:nvSpPr>
-          <p:cNvPr id="7" name="TextBox 6"/>
-          <p:cNvSpPr txBox="1"/>
-          <p:nvPr/>
-        </p:nvSpPr>
-        <p:spPr>
-          <a:xfrm>
-            <a:off x="1097280" y="3291840"/>
-            <a:ext cx="9966960" cy="914400"/>
-          </a:xfrm>
-          <a:prstGeom prst="rect">
-            <a:avLst/>
-          </a:prstGeom>
-          <a:noFill/>
-        </p:spPr>
-        <p:txBody>
-          <a:bodyPr wrap="square">
-            <a:spAutoFit/>
-          </a:bodyPr>
-          <a:lstStyle/>
-          <a:p>
-            <a:pPr algn="l">
-              <a:defRPr sz="1600" b="0" i="0">
+              <a:t>Impressive Growth Trajectory</a:t>
+            </a:r>
+          </a:p>
+        </p:txBody>
+      </p:sp>
+      <p:sp>
+        <p:nvSpPr>
+          <p:cNvPr id="8" name="TextBox 7"/>
+          <p:cNvSpPr txBox="1"/>
+          <p:nvPr/>
+        </p:nvSpPr>
+        <p:spPr>
+          <a:xfrm>
+            <a:off x="1097280" y="4206240"/>
+            <a:ext cx="9966960" cy="1371600"/>
+          </a:xfrm>
+          <a:prstGeom prst="rect">
+            <a:avLst/>
+          </a:prstGeom>
+          <a:noFill/>
+        </p:spPr>
+        <p:txBody>
+          <a:bodyPr wrap="square">
+            <a:spAutoFit/>
+          </a:bodyPr>
+          <a:lstStyle/>
+          <a:p>
+            <a:pPr algn="l">
+              <a:defRPr sz="1500" b="0" i="0">
                 <a:solidFill>
                   <a:srgbClr val="E2E2EA"/>
                 </a:solidFill>
@@ -8398,43 +9289,7 @@
               </a:defRPr>
             </a:pPr>
             <a:r>
-              <a:t>Wishing you an amazing day filled with joy and celebration!</a:t>
-            </a:r>
-          </a:p>
-        </p:txBody>
-      </p:sp>
-      <p:sp>
-        <p:nvSpPr>
-          <p:cNvPr id="8" name="TextBox 7"/>
-          <p:cNvSpPr txBox="1"/>
-          <p:nvPr/>
-        </p:nvSpPr>
-        <p:spPr>
-          <a:xfrm>
-            <a:off x="1097280" y="4572000"/>
-            <a:ext cx="9966960" cy="457200"/>
-          </a:xfrm>
-          <a:prstGeom prst="rect">
-            <a:avLst/>
-          </a:prstGeom>
-          <a:noFill/>
-        </p:spPr>
-        <p:txBody>
-          <a:bodyPr wrap="square">
-            <a:spAutoFit/>
-          </a:bodyPr>
-          <a:lstStyle/>
-          <a:p>
-            <a:pPr algn="l">
-              <a:defRPr sz="1400" b="0" i="1">
-                <a:solidFill>
-                  <a:srgbClr val="FFB72B"/>
-                </a:solidFill>
-                <a:latin typeface="Calibri"/>
-              </a:defRPr>
-            </a:pPr>
-            <a:r>
-              <a:t>With love, Your Appodeal Team 💜</a:t>
+              <a:t>Company reaching new heights with strong fundamentals and sustainable growth</a:t>
             </a:r>
           </a:p>
         </p:txBody>
@@ -8480,7 +9335,7 @@
             <a:avLst/>
           </a:prstGeom>
           <a:solidFill>
-            <a:srgbClr val="FFB72B"/>
+            <a:srgbClr val="FF9800"/>
           </a:solidFill>
           <a:ln>
             <a:noFill/>
@@ -8533,13 +9388,13 @@
             <a:pPr algn="l">
               <a:defRPr sz="1000" b="1">
                 <a:solidFill>
-                  <a:srgbClr val="FFB72B"/>
-                </a:solidFill>
-                <a:latin typeface="Calibri"/>
-              </a:defRPr>
-            </a:pPr>
-            <a:r>
-              <a:t>🎂  CELEBRATION</a:t>
+                  <a:srgbClr val="FF9800"/>
+                </a:solidFill>
+                <a:latin typeface="Calibri"/>
+              </a:defRPr>
+            </a:pPr>
+            <a:r>
+              <a:t>🤝  CLAPS</a:t>
             </a:r>
           </a:p>
         </p:txBody>
@@ -8569,13 +9424,13 @@
             <a:pPr algn="l">
               <a:defRPr sz="3200" b="1" i="0">
                 <a:solidFill>
-                  <a:srgbClr val="FFB72B"/>
-                </a:solidFill>
-                <a:latin typeface="Calibri"/>
-              </a:defRPr>
-            </a:pPr>
-            <a:r>
-              <a:t>Happy Birthday!</a:t>
+                  <a:srgbClr val="FF9800"/>
+                </a:solidFill>
+                <a:latin typeface="Calibri"/>
+              </a:defRPr>
+            </a:pPr>
+            <a:r>
+              <a:t>Team Collaboration</a:t>
             </a:r>
           </a:p>
         </p:txBody>
@@ -8589,7 +9444,7 @@
         <p:spPr>
           <a:xfrm>
             <a:off x="1097280" y="2103120"/>
-            <a:ext cx="9966960" cy="640080"/>
+            <a:ext cx="2743200" cy="548640"/>
           </a:xfrm>
           <a:prstGeom prst="rect">
             <a:avLst/>
@@ -8605,77 +9460,113 @@
             <a:pPr algn="l">
               <a:defRPr sz="2800" b="1" i="0">
                 <a:solidFill>
+                  <a:srgbClr val="FF9800"/>
+                </a:solidFill>
+                <a:latin typeface="Calibri"/>
+              </a:defRPr>
+            </a:pPr>
+            <a:r>
+              <a:t>40</a:t>
+            </a:r>
+          </a:p>
+        </p:txBody>
+      </p:sp>
+      <p:sp>
+        <p:nvSpPr>
+          <p:cNvPr id="6" name="TextBox 5"/>
+          <p:cNvSpPr txBox="1"/>
+          <p:nvPr/>
+        </p:nvSpPr>
+        <p:spPr>
+          <a:xfrm>
+            <a:off x="1097280" y="2651760"/>
+            <a:ext cx="9966960" cy="365760"/>
+          </a:xfrm>
+          <a:prstGeom prst="rect">
+            <a:avLst/>
+          </a:prstGeom>
+          <a:noFill/>
+        </p:spPr>
+        <p:txBody>
+          <a:bodyPr wrap="square">
+            <a:spAutoFit/>
+          </a:bodyPr>
+          <a:lstStyle/>
+          <a:p>
+            <a:pPr algn="l">
+              <a:defRPr sz="1400" b="0" i="0">
+                <a:solidFill>
+                  <a:srgbClr val="E2E2EA"/>
+                </a:solidFill>
+                <a:latin typeface="Calibri"/>
+              </a:defRPr>
+            </a:pPr>
+            <a:r>
+              <a:t>from Anastasia Sokolova</a:t>
+            </a:r>
+          </a:p>
+        </p:txBody>
+      </p:sp>
+      <p:sp>
+        <p:nvSpPr>
+          <p:cNvPr id="7" name="TextBox 6"/>
+          <p:cNvSpPr txBox="1"/>
+          <p:nvPr/>
+        </p:nvSpPr>
+        <p:spPr>
+          <a:xfrm>
+            <a:off x="1097280" y="3108960"/>
+            <a:ext cx="9966960" cy="365760"/>
+          </a:xfrm>
+          <a:prstGeom prst="rect">
+            <a:avLst/>
+          </a:prstGeom>
+          <a:noFill/>
+        </p:spPr>
+        <p:txBody>
+          <a:bodyPr wrap="square">
+            <a:spAutoFit/>
+          </a:bodyPr>
+          <a:lstStyle/>
+          <a:p>
+            <a:pPr algn="l">
+              <a:defRPr sz="1400" b="1" i="0">
+                <a:solidFill>
                   <a:srgbClr val="FFFFFF"/>
                 </a:solidFill>
                 <a:latin typeface="Calibri"/>
               </a:defRPr>
             </a:pPr>
             <a:r>
-              <a:t>Roman Shakhanov</a:t>
-            </a:r>
-          </a:p>
-        </p:txBody>
-      </p:sp>
-      <p:sp>
-        <p:nvSpPr>
-          <p:cNvPr id="6" name="TextBox 5"/>
-          <p:cNvSpPr txBox="1"/>
-          <p:nvPr/>
-        </p:nvSpPr>
-        <p:spPr>
-          <a:xfrm>
-            <a:off x="1097280" y="2743200"/>
-            <a:ext cx="9966960" cy="365760"/>
-          </a:xfrm>
-          <a:prstGeom prst="rect">
-            <a:avLst/>
-          </a:prstGeom>
-          <a:noFill/>
-        </p:spPr>
-        <p:txBody>
-          <a:bodyPr wrap="square">
-            <a:spAutoFit/>
-          </a:bodyPr>
-          <a:lstStyle/>
-          <a:p>
-            <a:pPr algn="l">
-              <a:defRPr sz="1400" b="0" i="0">
-                <a:solidFill>
-                  <a:srgbClr val="8F95A3"/>
-                </a:solidFill>
-                <a:latin typeface="Calibri"/>
-              </a:defRPr>
-            </a:pPr>
-            <a:r>
-              <a:t>March 11</a:t>
-            </a:r>
-          </a:p>
-        </p:txBody>
-      </p:sp>
-      <p:sp>
-        <p:nvSpPr>
-          <p:cNvPr id="7" name="TextBox 6"/>
-          <p:cNvSpPr txBox="1"/>
-          <p:nvPr/>
-        </p:nvSpPr>
-        <p:spPr>
-          <a:xfrm>
-            <a:off x="1097280" y="3291840"/>
-            <a:ext cx="9966960" cy="914400"/>
-          </a:xfrm>
-          <a:prstGeom prst="rect">
-            <a:avLst/>
-          </a:prstGeom>
-          <a:noFill/>
-        </p:spPr>
-        <p:txBody>
-          <a:bodyPr wrap="square">
-            <a:spAutoFit/>
-          </a:bodyPr>
-          <a:lstStyle/>
-          <a:p>
-            <a:pPr algn="l">
-              <a:defRPr sz="1600" b="0" i="0">
+              <a:t>to: Sasha Sakovich</a:t>
+            </a:r>
+          </a:p>
+        </p:txBody>
+      </p:sp>
+      <p:sp>
+        <p:nvSpPr>
+          <p:cNvPr id="8" name="TextBox 7"/>
+          <p:cNvSpPr txBox="1"/>
+          <p:nvPr/>
+        </p:nvSpPr>
+        <p:spPr>
+          <a:xfrm>
+            <a:off x="1097280" y="3749039"/>
+            <a:ext cx="9966960" cy="1097280"/>
+          </a:xfrm>
+          <a:prstGeom prst="rect">
+            <a:avLst/>
+          </a:prstGeom>
+          <a:noFill/>
+        </p:spPr>
+        <p:txBody>
+          <a:bodyPr wrap="square">
+            <a:spAutoFit/>
+          </a:bodyPr>
+          <a:lstStyle/>
+          <a:p>
+            <a:pPr algn="l">
+              <a:defRPr sz="1500" b="0" i="1">
                 <a:solidFill>
                   <a:srgbClr val="E2E2EA"/>
                 </a:solidFill>
@@ -8683,20 +9574,20 @@
               </a:defRPr>
             </a:pPr>
             <a:r>
-              <a:t>Wishing you an amazing day filled with joy and celebration!</a:t>
-            </a:r>
-          </a:p>
-        </p:txBody>
-      </p:sp>
-      <p:sp>
-        <p:nvSpPr>
-          <p:cNvPr id="8" name="TextBox 7"/>
-          <p:cNvSpPr txBox="1"/>
-          <p:nvPr/>
-        </p:nvSpPr>
-        <p:spPr>
-          <a:xfrm>
-            <a:off x="1097280" y="4572000"/>
+              <a:t>"Exceptional teamwork and collaboration"</a:t>
+            </a:r>
+          </a:p>
+        </p:txBody>
+      </p:sp>
+      <p:sp>
+        <p:nvSpPr>
+          <p:cNvPr id="9" name="TextBox 8"/>
+          <p:cNvSpPr txBox="1"/>
+          <p:nvPr/>
+        </p:nvSpPr>
+        <p:spPr>
+          <a:xfrm>
+            <a:off x="1097280" y="5120640"/>
             <a:ext cx="9966960" cy="457200"/>
           </a:xfrm>
           <a:prstGeom prst="rect">
@@ -8711,15 +9602,15 @@
           <a:lstStyle/>
           <a:p>
             <a:pPr algn="l">
-              <a:defRPr sz="1400" b="0" i="1">
-                <a:solidFill>
-                  <a:srgbClr val="FFB72B"/>
-                </a:solidFill>
-                <a:latin typeface="Calibri"/>
-              </a:defRPr>
-            </a:pPr>
-            <a:r>
-              <a:t>With love, Your Appodeal Team 💜</a:t>
+              <a:defRPr sz="1200" b="1" i="0">
+                <a:solidFill>
+                  <a:srgbClr val="FF9800"/>
+                </a:solidFill>
+                <a:latin typeface="Calibri"/>
+              </a:defRPr>
+            </a:pPr>
+            <a:r>
+              <a:t>TEAMWORK · COLLABORATION</a:t>
             </a:r>
           </a:p>
         </p:txBody>

--- a/data/archive/pulse_2026-03-11.pptx
+++ b/data/archive/pulse_2026-03-11.pptx
@@ -26,6 +26,9 @@
     <p:sldId id="274" r:id="rId25"/>
     <p:sldId id="275" r:id="rId26"/>
     <p:sldId id="276" r:id="rId27"/>
+    <p:sldId id="277" r:id="rId28"/>
+    <p:sldId id="278" r:id="rId29"/>
+    <p:sldId id="279" r:id="rId30"/>
   </p:sldIdLst>
   <p:sldSz cx="12191695" cy="6858000" type="screen4x3"/>
   <p:notesSz cx="6858000" cy="9144000"/>
@@ -3308,7 +3311,7 @@
             <a:avLst/>
           </a:prstGeom>
           <a:solidFill>
-            <a:srgbClr val="E91E63"/>
+            <a:srgbClr val="FFB72B"/>
           </a:solidFill>
           <a:ln>
             <a:noFill/>
@@ -3361,13 +3364,13 @@
             <a:pPr algn="l">
               <a:defRPr sz="1000" b="1">
                 <a:solidFill>
-                  <a:srgbClr val="E91E63"/>
-                </a:solidFill>
-                <a:latin typeface="Calibri"/>
-              </a:defRPr>
-            </a:pPr>
-            <a:r>
-              <a:t>🎯  WIN</a:t>
+                  <a:srgbClr val="FFB72B"/>
+                </a:solidFill>
+                <a:latin typeface="Calibri"/>
+              </a:defRPr>
+            </a:pPr>
+            <a:r>
+              <a:t>🎂  CELEBRATION</a:t>
             </a:r>
           </a:p>
         </p:txBody>
@@ -3397,13 +3400,13 @@
             <a:pPr algn="l">
               <a:defRPr sz="3200" b="1" i="0">
                 <a:solidFill>
-                  <a:srgbClr val="E91E63"/>
-                </a:solidFill>
-                <a:latin typeface="Calibri"/>
-              </a:defRPr>
-            </a:pPr>
-            <a:r>
-              <a:t>Gaming Success</a:t>
+                  <a:srgbClr val="FFB72B"/>
+                </a:solidFill>
+                <a:latin typeface="Calibri"/>
+              </a:defRPr>
+            </a:pPr>
+            <a:r>
+              <a:t>Happy Birthday!</a:t>
             </a:r>
           </a:p>
         </p:txBody>
@@ -3417,29 +3420,29 @@
         <p:spPr>
           <a:xfrm>
             <a:off x="1097280" y="2103120"/>
-            <a:ext cx="4572000" cy="822960"/>
-          </a:xfrm>
-          <a:prstGeom prst="rect">
-            <a:avLst/>
-          </a:prstGeom>
-          <a:noFill/>
-        </p:spPr>
-        <p:txBody>
-          <a:bodyPr wrap="square">
-            <a:spAutoFit/>
-          </a:bodyPr>
-          <a:lstStyle/>
-          <a:p>
-            <a:pPr algn="l">
-              <a:defRPr sz="4800" b="1" i="0">
-                <a:solidFill>
-                  <a:srgbClr val="E91E63"/>
-                </a:solidFill>
-                <a:latin typeface="Calibri"/>
-              </a:defRPr>
-            </a:pPr>
-            <a:r>
-              <a:t>61</a:t>
+            <a:ext cx="9966960" cy="640080"/>
+          </a:xfrm>
+          <a:prstGeom prst="rect">
+            <a:avLst/>
+          </a:prstGeom>
+          <a:noFill/>
+        </p:spPr>
+        <p:txBody>
+          <a:bodyPr wrap="square">
+            <a:spAutoFit/>
+          </a:bodyPr>
+          <a:lstStyle/>
+          <a:p>
+            <a:pPr algn="l">
+              <a:defRPr sz="2800" b="1" i="0">
+                <a:solidFill>
+                  <a:srgbClr val="FFFFFF"/>
+                </a:solidFill>
+                <a:latin typeface="Calibri"/>
+              </a:defRPr>
+            </a:pPr>
+            <a:r>
+              <a:t>Vladimir Khrolovich</a:t>
             </a:r>
           </a:p>
         </p:txBody>
@@ -3452,22 +3455,22 @@
         </p:nvSpPr>
         <p:spPr>
           <a:xfrm>
-            <a:off x="1097280" y="2834640"/>
-            <a:ext cx="4572000" cy="365760"/>
-          </a:xfrm>
-          <a:prstGeom prst="rect">
-            <a:avLst/>
-          </a:prstGeom>
-          <a:noFill/>
-        </p:spPr>
-        <p:txBody>
-          <a:bodyPr wrap="square">
-            <a:spAutoFit/>
-          </a:bodyPr>
-          <a:lstStyle/>
-          <a:p>
-            <a:pPr algn="l">
-              <a:defRPr sz="1200" b="0" i="0">
+            <a:off x="1097280" y="2743200"/>
+            <a:ext cx="9966960" cy="365760"/>
+          </a:xfrm>
+          <a:prstGeom prst="rect">
+            <a:avLst/>
+          </a:prstGeom>
+          <a:noFill/>
+        </p:spPr>
+        <p:txBody>
+          <a:bodyPr wrap="square">
+            <a:spAutoFit/>
+          </a:bodyPr>
+          <a:lstStyle/>
+          <a:p>
+            <a:pPr algn="l">
+              <a:defRPr sz="1400" b="0" i="0">
                 <a:solidFill>
                   <a:srgbClr val="8F95A3"/>
                 </a:solidFill>
@@ -3475,7 +3478,7 @@
               </a:defRPr>
             </a:pPr>
             <a:r>
-              <a:t>% retention</a:t>
+              <a:t>March 11</a:t>
             </a:r>
           </a:p>
         </p:txBody>
@@ -3489,21 +3492,21 @@
         <p:spPr>
           <a:xfrm>
             <a:off x="1097280" y="3291840"/>
-            <a:ext cx="9966960" cy="365760"/>
-          </a:xfrm>
-          <a:prstGeom prst="rect">
-            <a:avLst/>
-          </a:prstGeom>
-          <a:noFill/>
-        </p:spPr>
-        <p:txBody>
-          <a:bodyPr wrap="square">
-            <a:spAutoFit/>
-          </a:bodyPr>
-          <a:lstStyle/>
-          <a:p>
-            <a:pPr algn="l">
-              <a:defRPr sz="1400" b="0" i="0">
+            <a:ext cx="9966960" cy="914400"/>
+          </a:xfrm>
+          <a:prstGeom prst="rect">
+            <a:avLst/>
+          </a:prstGeom>
+          <a:noFill/>
+        </p:spPr>
+        <p:txBody>
+          <a:bodyPr wrap="square">
+            <a:spAutoFit/>
+          </a:bodyPr>
+          <a:lstStyle/>
+          <a:p>
+            <a:pPr algn="l">
+              <a:defRPr sz="1600" b="0" i="0">
                 <a:solidFill>
                   <a:srgbClr val="E2E2EA"/>
                 </a:solidFill>
@@ -3511,7 +3514,7 @@
               </a:defRPr>
             </a:pPr>
             <a:r>
-              <a:t>by Gaming Team</a:t>
+              <a:t>Wishing you an amazing day filled with joy and celebration!</a:t>
             </a:r>
           </a:p>
         </p:txBody>
@@ -3524,7 +3527,7 @@
         </p:nvSpPr>
         <p:spPr>
           <a:xfrm>
-            <a:off x="1097280" y="3840480"/>
+            <a:off x="1097280" y="4572000"/>
             <a:ext cx="9966960" cy="457200"/>
           </a:xfrm>
           <a:prstGeom prst="rect">
@@ -3539,87 +3542,15 @@
           <a:lstStyle/>
           <a:p>
             <a:pPr algn="l">
-              <a:defRPr sz="1800" b="1" i="0">
-                <a:solidFill>
-                  <a:srgbClr val="FFFFFF"/>
-                </a:solidFill>
-                <a:latin typeface="Calibri"/>
-              </a:defRPr>
-            </a:pPr>
-            <a:r>
-              <a:t>Infinite Minesweeper Hits Target!</a:t>
-            </a:r>
-          </a:p>
-        </p:txBody>
-      </p:sp>
-      <p:sp>
-        <p:nvSpPr>
-          <p:cNvPr id="9" name="TextBox 8"/>
-          <p:cNvSpPr txBox="1"/>
-          <p:nvPr/>
-        </p:nvSpPr>
-        <p:spPr>
-          <a:xfrm>
-            <a:off x="1097280" y="4389120"/>
-            <a:ext cx="9966960" cy="914400"/>
-          </a:xfrm>
-          <a:prstGeom prst="rect">
-            <a:avLst/>
-          </a:prstGeom>
-          <a:noFill/>
-        </p:spPr>
-        <p:txBody>
-          <a:bodyPr wrap="square">
-            <a:spAutoFit/>
-          </a:bodyPr>
-          <a:lstStyle/>
-          <a:p>
-            <a:pPr algn="l">
-              <a:defRPr sz="1400" b="0" i="0">
-                <a:solidFill>
-                  <a:srgbClr val="E2E2EA"/>
-                </a:solidFill>
-                <a:latin typeface="Calibri"/>
-              </a:defRPr>
-            </a:pPr>
-            <a:r>
-              <a:t>Achieving 61% retention rate within Apple benchmark ERA of 151-160%</a:t>
-            </a:r>
-          </a:p>
-        </p:txBody>
-      </p:sp>
-      <p:sp>
-        <p:nvSpPr>
-          <p:cNvPr id="10" name="TextBox 9"/>
-          <p:cNvSpPr txBox="1"/>
-          <p:nvPr/>
-        </p:nvSpPr>
-        <p:spPr>
-          <a:xfrm>
-            <a:off x="1097280" y="5486400"/>
-            <a:ext cx="9966960" cy="457200"/>
-          </a:xfrm>
-          <a:prstGeom prst="rect">
-            <a:avLst/>
-          </a:prstGeom>
-          <a:noFill/>
-        </p:spPr>
-        <p:txBody>
-          <a:bodyPr wrap="square">
-            <a:spAutoFit/>
-          </a:bodyPr>
-          <a:lstStyle/>
-          <a:p>
-            <a:pPr algn="l">
-              <a:defRPr sz="1300" b="0" i="1">
-                <a:solidFill>
-                  <a:srgbClr val="8F95A3"/>
-                </a:solidFill>
-                <a:latin typeface="Calibri"/>
-              </a:defRPr>
-            </a:pPr>
-            <a:r>
-              <a:t>💬 "Gaming division showing strong performance metrics"</a:t>
+              <a:defRPr sz="1400" b="0" i="1">
+                <a:solidFill>
+                  <a:srgbClr val="FFB72B"/>
+                </a:solidFill>
+                <a:latin typeface="Calibri"/>
+              </a:defRPr>
+            </a:pPr>
+            <a:r>
+              <a:t>With love, Your Appodeal Team 💜</a:t>
             </a:r>
           </a:p>
         </p:txBody>
@@ -3665,7 +3596,7 @@
             <a:avLst/>
           </a:prstGeom>
           <a:solidFill>
-            <a:srgbClr val="673AB7"/>
+            <a:srgbClr val="FFB72B"/>
           </a:solidFill>
           <a:ln>
             <a:noFill/>
@@ -3718,13 +3649,13 @@
             <a:pPr algn="l">
               <a:defRPr sz="1000" b="1">
                 <a:solidFill>
-                  <a:srgbClr val="673AB7"/>
-                </a:solidFill>
-                <a:latin typeface="Calibri"/>
-              </a:defRPr>
-            </a:pPr>
-            <a:r>
-              <a:t>📖  OFFICE LIFE</a:t>
+                  <a:srgbClr val="FFB72B"/>
+                </a:solidFill>
+                <a:latin typeface="Calibri"/>
+              </a:defRPr>
+            </a:pPr>
+            <a:r>
+              <a:t>🎂  CELEBRATION</a:t>
             </a:r>
           </a:p>
         </p:txBody>
@@ -3754,13 +3685,13 @@
             <a:pPr algn="l">
               <a:defRPr sz="3200" b="1" i="0">
                 <a:solidFill>
-                  <a:srgbClr val="673AB7"/>
-                </a:solidFill>
-                <a:latin typeface="Calibri"/>
-              </a:defRPr>
-            </a:pPr>
-            <a:r>
-              <a:t>Company Culture</a:t>
+                  <a:srgbClr val="FFB72B"/>
+                </a:solidFill>
+                <a:latin typeface="Calibri"/>
+              </a:defRPr>
+            </a:pPr>
+            <a:r>
+              <a:t>Happy Birthday!</a:t>
             </a:r>
           </a:p>
         </p:txBody>
@@ -3774,6 +3705,114 @@
         <p:spPr>
           <a:xfrm>
             <a:off x="1097280" y="2103120"/>
+            <a:ext cx="9966960" cy="640080"/>
+          </a:xfrm>
+          <a:prstGeom prst="rect">
+            <a:avLst/>
+          </a:prstGeom>
+          <a:noFill/>
+        </p:spPr>
+        <p:txBody>
+          <a:bodyPr wrap="square">
+            <a:spAutoFit/>
+          </a:bodyPr>
+          <a:lstStyle/>
+          <a:p>
+            <a:pPr algn="l">
+              <a:defRPr sz="2800" b="1" i="0">
+                <a:solidFill>
+                  <a:srgbClr val="FFFFFF"/>
+                </a:solidFill>
+                <a:latin typeface="Calibri"/>
+              </a:defRPr>
+            </a:pPr>
+            <a:r>
+              <a:t>Dmitry Feshchenko</a:t>
+            </a:r>
+          </a:p>
+        </p:txBody>
+      </p:sp>
+      <p:sp>
+        <p:nvSpPr>
+          <p:cNvPr id="6" name="TextBox 5"/>
+          <p:cNvSpPr txBox="1"/>
+          <p:nvPr/>
+        </p:nvSpPr>
+        <p:spPr>
+          <a:xfrm>
+            <a:off x="1097280" y="2743200"/>
+            <a:ext cx="9966960" cy="365760"/>
+          </a:xfrm>
+          <a:prstGeom prst="rect">
+            <a:avLst/>
+          </a:prstGeom>
+          <a:noFill/>
+        </p:spPr>
+        <p:txBody>
+          <a:bodyPr wrap="square">
+            <a:spAutoFit/>
+          </a:bodyPr>
+          <a:lstStyle/>
+          <a:p>
+            <a:pPr algn="l">
+              <a:defRPr sz="1400" b="0" i="0">
+                <a:solidFill>
+                  <a:srgbClr val="8F95A3"/>
+                </a:solidFill>
+                <a:latin typeface="Calibri"/>
+              </a:defRPr>
+            </a:pPr>
+            <a:r>
+              <a:t>March 11</a:t>
+            </a:r>
+          </a:p>
+        </p:txBody>
+      </p:sp>
+      <p:sp>
+        <p:nvSpPr>
+          <p:cNvPr id="7" name="TextBox 6"/>
+          <p:cNvSpPr txBox="1"/>
+          <p:nvPr/>
+        </p:nvSpPr>
+        <p:spPr>
+          <a:xfrm>
+            <a:off x="1097280" y="3291840"/>
+            <a:ext cx="9966960" cy="914400"/>
+          </a:xfrm>
+          <a:prstGeom prst="rect">
+            <a:avLst/>
+          </a:prstGeom>
+          <a:noFill/>
+        </p:spPr>
+        <p:txBody>
+          <a:bodyPr wrap="square">
+            <a:spAutoFit/>
+          </a:bodyPr>
+          <a:lstStyle/>
+          <a:p>
+            <a:pPr algn="l">
+              <a:defRPr sz="1600" b="0" i="0">
+                <a:solidFill>
+                  <a:srgbClr val="E2E2EA"/>
+                </a:solidFill>
+                <a:latin typeface="Calibri"/>
+              </a:defRPr>
+            </a:pPr>
+            <a:r>
+              <a:t>Wishing you an amazing day filled with joy and celebration!</a:t>
+            </a:r>
+          </a:p>
+        </p:txBody>
+      </p:sp>
+      <p:sp>
+        <p:nvSpPr>
+          <p:cNvPr id="8" name="TextBox 7"/>
+          <p:cNvSpPr txBox="1"/>
+          <p:nvPr/>
+        </p:nvSpPr>
+        <p:spPr>
+          <a:xfrm>
+            <a:off x="1097280" y="4572000"/>
             <a:ext cx="9966960" cy="457200"/>
           </a:xfrm>
           <a:prstGeom prst="rect">
@@ -3788,159 +3827,15 @@
           <a:lstStyle/>
           <a:p>
             <a:pPr algn="l">
-              <a:defRPr sz="1800" b="1" i="0">
-                <a:solidFill>
-                  <a:srgbClr val="FFFFFF"/>
-                </a:solidFill>
-                <a:latin typeface="Calibri"/>
-              </a:defRPr>
-            </a:pPr>
-            <a:r>
-              <a:t>Reading Club Growing Strong</a:t>
-            </a:r>
-          </a:p>
-        </p:txBody>
-      </p:sp>
-      <p:sp>
-        <p:nvSpPr>
-          <p:cNvPr id="6" name="TextBox 5"/>
-          <p:cNvSpPr txBox="1"/>
-          <p:nvPr/>
-        </p:nvSpPr>
-        <p:spPr>
-          <a:xfrm>
-            <a:off x="1371600" y="2743200"/>
-            <a:ext cx="9692640" cy="1828800"/>
-          </a:xfrm>
-          <a:prstGeom prst="rect">
-            <a:avLst/>
-          </a:prstGeom>
-          <a:noFill/>
-        </p:spPr>
-        <p:txBody>
-          <a:bodyPr wrap="square">
-            <a:spAutoFit/>
-          </a:bodyPr>
-          <a:lstStyle/>
-          <a:p>
-            <a:pPr algn="l">
-              <a:defRPr sz="1500" b="0" i="1">
-                <a:solidFill>
-                  <a:srgbClr val="E2E2EA"/>
-                </a:solidFill>
-                <a:latin typeface="Calibri"/>
-              </a:defRPr>
-            </a:pPr>
-            <a:r>
-              <a:t>"The 4 Disciplines of Execution focus: WIGs, Leading/Lagging Metrics, Scorecards, Follow-through"</a:t>
-            </a:r>
-          </a:p>
-        </p:txBody>
-      </p:sp>
-      <p:sp>
-        <p:nvSpPr>
-          <p:cNvPr id="7" name="TextBox 6"/>
-          <p:cNvSpPr txBox="1"/>
-          <p:nvPr/>
-        </p:nvSpPr>
-        <p:spPr>
-          <a:xfrm>
-            <a:off x="1097280" y="4754880"/>
-            <a:ext cx="9966960" cy="365760"/>
-          </a:xfrm>
-          <a:prstGeom prst="rect">
-            <a:avLst/>
-          </a:prstGeom>
-          <a:noFill/>
-        </p:spPr>
-        <p:txBody>
-          <a:bodyPr wrap="square">
-            <a:spAutoFit/>
-          </a:bodyPr>
-          <a:lstStyle/>
-          <a:p>
-            <a:pPr algn="l">
-              <a:defRPr sz="1400" b="0" i="0">
-                <a:solidFill>
-                  <a:srgbClr val="8F95A3"/>
-                </a:solidFill>
-                <a:latin typeface="Calibri"/>
-              </a:defRPr>
-            </a:pPr>
-            <a:r>
-              <a:t>— Pavel Golubev</a:t>
-            </a:r>
-          </a:p>
-        </p:txBody>
-      </p:sp>
-      <p:sp>
-        <p:nvSpPr>
-          <p:cNvPr id="8" name="TextBox 7"/>
-          <p:cNvSpPr txBox="1"/>
-          <p:nvPr/>
-        </p:nvSpPr>
-        <p:spPr>
-          <a:xfrm>
-            <a:off x="1097280" y="5212080"/>
-            <a:ext cx="9966960" cy="365760"/>
-          </a:xfrm>
-          <a:prstGeom prst="rect">
-            <a:avLst/>
-          </a:prstGeom>
-          <a:noFill/>
-        </p:spPr>
-        <p:txBody>
-          <a:bodyPr wrap="square">
-            <a:spAutoFit/>
-          </a:bodyPr>
-          <a:lstStyle/>
-          <a:p>
-            <a:pPr algn="l">
-              <a:defRPr sz="1400" b="1" i="0">
-                <a:solidFill>
-                  <a:srgbClr val="673AB7"/>
-                </a:solidFill>
-                <a:latin typeface="Calibri"/>
-              </a:defRPr>
-            </a:pPr>
-            <a:r>
-              <a:t>7</a:t>
-            </a:r>
-          </a:p>
-        </p:txBody>
-      </p:sp>
-      <p:sp>
-        <p:nvSpPr>
-          <p:cNvPr id="9" name="TextBox 8"/>
-          <p:cNvSpPr txBox="1"/>
-          <p:nvPr/>
-        </p:nvSpPr>
-        <p:spPr>
-          <a:xfrm>
-            <a:off x="1097280" y="5760720"/>
-            <a:ext cx="9966960" cy="274320"/>
-          </a:xfrm>
-          <a:prstGeom prst="rect">
-            <a:avLst/>
-          </a:prstGeom>
-          <a:noFill/>
-        </p:spPr>
-        <p:txBody>
-          <a:bodyPr wrap="square">
-            <a:spAutoFit/>
-          </a:bodyPr>
-          <a:lstStyle/>
-          <a:p>
-            <a:pPr algn="l">
-              <a:defRPr sz="1100" b="0" i="0">
-                <a:solidFill>
-                  <a:srgbClr val="5C6270"/>
-                </a:solidFill>
-                <a:latin typeface="Calibri"/>
-              </a:defRPr>
-            </a:pPr>
-            <a:r>
-              <a:t>#general</a:t>
+              <a:defRPr sz="1400" b="0" i="1">
+                <a:solidFill>
+                  <a:srgbClr val="FFB72B"/>
+                </a:solidFill>
+                <a:latin typeface="Calibri"/>
+              </a:defRPr>
+            </a:pPr>
+            <a:r>
+              <a:t>With love, Your Appodeal Team 💜</a:t>
             </a:r>
           </a:p>
         </p:txBody>
@@ -3986,7 +3881,7 @@
             <a:avLst/>
           </a:prstGeom>
           <a:solidFill>
-            <a:srgbClr val="795548"/>
+            <a:srgbClr val="FFB72B"/>
           </a:solidFill>
           <a:ln>
             <a:noFill/>
@@ -4039,13 +3934,13 @@
             <a:pPr algn="l">
               <a:defRPr sz="1000" b="1">
                 <a:solidFill>
-                  <a:srgbClr val="795548"/>
-                </a:solidFill>
-                <a:latin typeface="Calibri"/>
-              </a:defRPr>
-            </a:pPr>
-            <a:r>
-              <a:t>🛡️  CLAPS</a:t>
+                  <a:srgbClr val="FFB72B"/>
+                </a:solidFill>
+                <a:latin typeface="Calibri"/>
+              </a:defRPr>
+            </a:pPr>
+            <a:r>
+              <a:t>🎂  CELEBRATION</a:t>
             </a:r>
           </a:p>
         </p:txBody>
@@ -4075,13 +3970,13 @@
             <a:pPr algn="l">
               <a:defRPr sz="3200" b="1" i="0">
                 <a:solidFill>
-                  <a:srgbClr val="795548"/>
-                </a:solidFill>
-                <a:latin typeface="Calibri"/>
-              </a:defRPr>
-            </a:pPr>
-            <a:r>
-              <a:t>Security Excellence</a:t>
+                  <a:srgbClr val="FFB72B"/>
+                </a:solidFill>
+                <a:latin typeface="Calibri"/>
+              </a:defRPr>
+            </a:pPr>
+            <a:r>
+              <a:t>Happy Birthday!</a:t>
             </a:r>
           </a:p>
         </p:txBody>
@@ -4095,7 +3990,7 @@
         <p:spPr>
           <a:xfrm>
             <a:off x="1097280" y="2103120"/>
-            <a:ext cx="2743200" cy="548640"/>
+            <a:ext cx="9966960" cy="640080"/>
           </a:xfrm>
           <a:prstGeom prst="rect">
             <a:avLst/>
@@ -4111,13 +4006,13 @@
             <a:pPr algn="l">
               <a:defRPr sz="2800" b="1" i="0">
                 <a:solidFill>
-                  <a:srgbClr val="795548"/>
-                </a:solidFill>
-                <a:latin typeface="Calibri"/>
-              </a:defRPr>
-            </a:pPr>
-            <a:r>
-              <a:t>30</a:t>
+                  <a:srgbClr val="FFFFFF"/>
+                </a:solidFill>
+                <a:latin typeface="Calibri"/>
+              </a:defRPr>
+            </a:pPr>
+            <a:r>
+              <a:t>Giulia Galvani</a:t>
             </a:r>
           </a:p>
         </p:txBody>
@@ -4130,7 +4025,7 @@
         </p:nvSpPr>
         <p:spPr>
           <a:xfrm>
-            <a:off x="1097280" y="2651760"/>
+            <a:off x="1097280" y="2743200"/>
             <a:ext cx="9966960" cy="365760"/>
           </a:xfrm>
           <a:prstGeom prst="rect">
@@ -4147,49 +4042,49 @@
             <a:pPr algn="l">
               <a:defRPr sz="1400" b="0" i="0">
                 <a:solidFill>
+                  <a:srgbClr val="8F95A3"/>
+                </a:solidFill>
+                <a:latin typeface="Calibri"/>
+              </a:defRPr>
+            </a:pPr>
+            <a:r>
+              <a:t>March 11</a:t>
+            </a:r>
+          </a:p>
+        </p:txBody>
+      </p:sp>
+      <p:sp>
+        <p:nvSpPr>
+          <p:cNvPr id="7" name="TextBox 6"/>
+          <p:cNvSpPr txBox="1"/>
+          <p:nvPr/>
+        </p:nvSpPr>
+        <p:spPr>
+          <a:xfrm>
+            <a:off x="1097280" y="3291840"/>
+            <a:ext cx="9966960" cy="914400"/>
+          </a:xfrm>
+          <a:prstGeom prst="rect">
+            <a:avLst/>
+          </a:prstGeom>
+          <a:noFill/>
+        </p:spPr>
+        <p:txBody>
+          <a:bodyPr wrap="square">
+            <a:spAutoFit/>
+          </a:bodyPr>
+          <a:lstStyle/>
+          <a:p>
+            <a:pPr algn="l">
+              <a:defRPr sz="1600" b="0" i="0">
+                <a:solidFill>
                   <a:srgbClr val="E2E2EA"/>
                 </a:solidFill>
                 <a:latin typeface="Calibri"/>
               </a:defRPr>
             </a:pPr>
             <a:r>
-              <a:t>from Gleb Krahotkin</a:t>
-            </a:r>
-          </a:p>
-        </p:txBody>
-      </p:sp>
-      <p:sp>
-        <p:nvSpPr>
-          <p:cNvPr id="7" name="TextBox 6"/>
-          <p:cNvSpPr txBox="1"/>
-          <p:nvPr/>
-        </p:nvSpPr>
-        <p:spPr>
-          <a:xfrm>
-            <a:off x="1097280" y="3108960"/>
-            <a:ext cx="9966960" cy="365760"/>
-          </a:xfrm>
-          <a:prstGeom prst="rect">
-            <a:avLst/>
-          </a:prstGeom>
-          <a:noFill/>
-        </p:spPr>
-        <p:txBody>
-          <a:bodyPr wrap="square">
-            <a:spAutoFit/>
-          </a:bodyPr>
-          <a:lstStyle/>
-          <a:p>
-            <a:pPr algn="l">
-              <a:defRPr sz="1400" b="1" i="0">
-                <a:solidFill>
-                  <a:srgbClr val="FFFFFF"/>
-                </a:solidFill>
-                <a:latin typeface="Calibri"/>
-              </a:defRPr>
-            </a:pPr>
-            <a:r>
-              <a:t>to: Hierman Pelekh</a:t>
+              <a:t>Wishing you an amazing day filled with joy and celebration!</a:t>
             </a:r>
           </a:p>
         </p:txBody>
@@ -4202,43 +4097,7 @@
         </p:nvSpPr>
         <p:spPr>
           <a:xfrm>
-            <a:off x="1097280" y="3749039"/>
-            <a:ext cx="9966960" cy="1097280"/>
-          </a:xfrm>
-          <a:prstGeom prst="rect">
-            <a:avLst/>
-          </a:prstGeom>
-          <a:noFill/>
-        </p:spPr>
-        <p:txBody>
-          <a:bodyPr wrap="square">
-            <a:spAutoFit/>
-          </a:bodyPr>
-          <a:lstStyle/>
-          <a:p>
-            <a:pPr algn="l">
-              <a:defRPr sz="1500" b="0" i="1">
-                <a:solidFill>
-                  <a:srgbClr val="E2E2EA"/>
-                </a:solidFill>
-                <a:latin typeface="Calibri"/>
-              </a:defRPr>
-            </a:pPr>
-            <a:r>
-              <a:t>"Outstanding security implementations and infrastructure work"</a:t>
-            </a:r>
-          </a:p>
-        </p:txBody>
-      </p:sp>
-      <p:sp>
-        <p:nvSpPr>
-          <p:cNvPr id="9" name="TextBox 8"/>
-          <p:cNvSpPr txBox="1"/>
-          <p:nvPr/>
-        </p:nvSpPr>
-        <p:spPr>
-          <a:xfrm>
-            <a:off x="1097280" y="5120640"/>
+            <a:off x="1097280" y="4572000"/>
             <a:ext cx="9966960" cy="457200"/>
           </a:xfrm>
           <a:prstGeom prst="rect">
@@ -4253,15 +4112,15 @@
           <a:lstStyle/>
           <a:p>
             <a:pPr algn="l">
-              <a:defRPr sz="1200" b="1" i="0">
-                <a:solidFill>
-                  <a:srgbClr val="795548"/>
-                </a:solidFill>
-                <a:latin typeface="Calibri"/>
-              </a:defRPr>
-            </a:pPr>
-            <a:r>
-              <a:t>SECURITY · RELIABILITY</a:t>
+              <a:defRPr sz="1400" b="0" i="1">
+                <a:solidFill>
+                  <a:srgbClr val="FFB72B"/>
+                </a:solidFill>
+                <a:latin typeface="Calibri"/>
+              </a:defRPr>
+            </a:pPr>
+            <a:r>
+              <a:t>With love, Your Appodeal Team 💜</a:t>
             </a:r>
           </a:p>
         </p:txBody>
@@ -4307,7 +4166,7 @@
             <a:avLst/>
           </a:prstGeom>
           <a:solidFill>
-            <a:srgbClr val="607D8B"/>
+            <a:srgbClr val="FFB72B"/>
           </a:solidFill>
           <a:ln>
             <a:noFill/>
@@ -4360,13 +4219,13 @@
             <a:pPr algn="l">
               <a:defRPr sz="1000" b="1">
                 <a:solidFill>
-                  <a:srgbClr val="607D8B"/>
-                </a:solidFill>
-                <a:latin typeface="Calibri"/>
-              </a:defRPr>
-            </a:pPr>
-            <a:r>
-              <a:t>🤖  MILESTONE</a:t>
+                  <a:srgbClr val="FFB72B"/>
+                </a:solidFill>
+                <a:latin typeface="Calibri"/>
+              </a:defRPr>
+            </a:pPr>
+            <a:r>
+              <a:t>🎂  CELEBRATION</a:t>
             </a:r>
           </a:p>
         </p:txBody>
@@ -4396,13 +4255,13 @@
             <a:pPr algn="l">
               <a:defRPr sz="3200" b="1" i="0">
                 <a:solidFill>
-                  <a:srgbClr val="607D8B"/>
-                </a:solidFill>
-                <a:latin typeface="Calibri"/>
-              </a:defRPr>
-            </a:pPr>
-            <a:r>
-              <a:t>AI Revolution</a:t>
+                  <a:srgbClr val="FFB72B"/>
+                </a:solidFill>
+                <a:latin typeface="Calibri"/>
+              </a:defRPr>
+            </a:pPr>
+            <a:r>
+              <a:t>Happy Birthday!</a:t>
             </a:r>
           </a:p>
         </p:txBody>
@@ -4416,29 +4275,29 @@
         <p:spPr>
           <a:xfrm>
             <a:off x="1097280" y="2103120"/>
-            <a:ext cx="4572000" cy="822960"/>
-          </a:xfrm>
-          <a:prstGeom prst="rect">
-            <a:avLst/>
-          </a:prstGeom>
-          <a:noFill/>
-        </p:spPr>
-        <p:txBody>
-          <a:bodyPr wrap="square">
-            <a:spAutoFit/>
-          </a:bodyPr>
-          <a:lstStyle/>
-          <a:p>
-            <a:pPr algn="l">
-              <a:defRPr sz="5200" b="1" i="0">
-                <a:solidFill>
-                  <a:srgbClr val="607D8B"/>
-                </a:solidFill>
-                <a:latin typeface="Calibri"/>
-              </a:defRPr>
-            </a:pPr>
-            <a:r>
-              <a:t>3-6</a:t>
+            <a:ext cx="9966960" cy="640080"/>
+          </a:xfrm>
+          <a:prstGeom prst="rect">
+            <a:avLst/>
+          </a:prstGeom>
+          <a:noFill/>
+        </p:spPr>
+        <p:txBody>
+          <a:bodyPr wrap="square">
+            <a:spAutoFit/>
+          </a:bodyPr>
+          <a:lstStyle/>
+          <a:p>
+            <a:pPr algn="l">
+              <a:defRPr sz="2800" b="1" i="0">
+                <a:solidFill>
+                  <a:srgbClr val="FFFFFF"/>
+                </a:solidFill>
+                <a:latin typeface="Calibri"/>
+              </a:defRPr>
+            </a:pPr>
+            <a:r>
+              <a:t>Katarzyna Raniszewska</a:t>
             </a:r>
           </a:p>
         </p:txBody>
@@ -4451,22 +4310,22 @@
         </p:nvSpPr>
         <p:spPr>
           <a:xfrm>
-            <a:off x="1097280" y="2926080"/>
-            <a:ext cx="4572000" cy="365760"/>
-          </a:xfrm>
-          <a:prstGeom prst="rect">
-            <a:avLst/>
-          </a:prstGeom>
-          <a:noFill/>
-        </p:spPr>
-        <p:txBody>
-          <a:bodyPr wrap="square">
-            <a:spAutoFit/>
-          </a:bodyPr>
-          <a:lstStyle/>
-          <a:p>
-            <a:pPr algn="l">
-              <a:defRPr sz="1100" b="0" i="0">
+            <a:off x="1097280" y="2743200"/>
+            <a:ext cx="9966960" cy="365760"/>
+          </a:xfrm>
+          <a:prstGeom prst="rect">
+            <a:avLst/>
+          </a:prstGeom>
+          <a:noFill/>
+        </p:spPr>
+        <p:txBody>
+          <a:bodyPr wrap="square">
+            <a:spAutoFit/>
+          </a:bodyPr>
+          <a:lstStyle/>
+          <a:p>
+            <a:pPr algn="l">
+              <a:defRPr sz="1400" b="0" i="0">
                 <a:solidFill>
                   <a:srgbClr val="8F95A3"/>
                 </a:solidFill>
@@ -4474,7 +4333,7 @@
               </a:defRPr>
             </a:pPr>
             <a:r>
-              <a:t>months timeline</a:t>
+              <a:t>March 11</a:t>
             </a:r>
           </a:p>
         </p:txBody>
@@ -4487,7 +4346,43 @@
         </p:nvSpPr>
         <p:spPr>
           <a:xfrm>
-            <a:off x="1097280" y="3566160"/>
+            <a:off x="1097280" y="3291840"/>
+            <a:ext cx="9966960" cy="914400"/>
+          </a:xfrm>
+          <a:prstGeom prst="rect">
+            <a:avLst/>
+          </a:prstGeom>
+          <a:noFill/>
+        </p:spPr>
+        <p:txBody>
+          <a:bodyPr wrap="square">
+            <a:spAutoFit/>
+          </a:bodyPr>
+          <a:lstStyle/>
+          <a:p>
+            <a:pPr algn="l">
+              <a:defRPr sz="1600" b="0" i="0">
+                <a:solidFill>
+                  <a:srgbClr val="E2E2EA"/>
+                </a:solidFill>
+                <a:latin typeface="Calibri"/>
+              </a:defRPr>
+            </a:pPr>
+            <a:r>
+              <a:t>Wishing you an amazing day filled with joy and celebration!</a:t>
+            </a:r>
+          </a:p>
+        </p:txBody>
+      </p:sp>
+      <p:sp>
+        <p:nvSpPr>
+          <p:cNvPr id="8" name="TextBox 7"/>
+          <p:cNvSpPr txBox="1"/>
+          <p:nvPr/>
+        </p:nvSpPr>
+        <p:spPr>
+          <a:xfrm>
+            <a:off x="1097280" y="4572000"/>
             <a:ext cx="9966960" cy="457200"/>
           </a:xfrm>
           <a:prstGeom prst="rect">
@@ -4502,51 +4397,15 @@
           <a:lstStyle/>
           <a:p>
             <a:pPr algn="l">
-              <a:defRPr sz="1800" b="1" i="0">
-                <a:solidFill>
-                  <a:srgbClr val="FFFFFF"/>
-                </a:solidFill>
-                <a:latin typeface="Calibri"/>
-              </a:defRPr>
-            </a:pPr>
-            <a:r>
-              <a:t>Every Employee + 5-10 AI Agents</a:t>
-            </a:r>
-          </a:p>
-        </p:txBody>
-      </p:sp>
-      <p:sp>
-        <p:nvSpPr>
-          <p:cNvPr id="8" name="TextBox 7"/>
-          <p:cNvSpPr txBox="1"/>
-          <p:nvPr/>
-        </p:nvSpPr>
-        <p:spPr>
-          <a:xfrm>
-            <a:off x="1097280" y="4206240"/>
-            <a:ext cx="9966960" cy="1371600"/>
-          </a:xfrm>
-          <a:prstGeom prst="rect">
-            <a:avLst/>
-          </a:prstGeom>
-          <a:noFill/>
-        </p:spPr>
-        <p:txBody>
-          <a:bodyPr wrap="square">
-            <a:spAutoFit/>
-          </a:bodyPr>
-          <a:lstStyle/>
-          <a:p>
-            <a:pPr algn="l">
-              <a:defRPr sz="1500" b="0" i="0">
-                <a:solidFill>
-                  <a:srgbClr val="E2E2EA"/>
-                </a:solidFill>
-                <a:latin typeface="Calibri"/>
-              </a:defRPr>
-            </a:pPr>
-            <a:r>
-              <a:t>Transforming how we work with AI integration across all departments</a:t>
+              <a:defRPr sz="1400" b="0" i="1">
+                <a:solidFill>
+                  <a:srgbClr val="FFB72B"/>
+                </a:solidFill>
+                <a:latin typeface="Calibri"/>
+              </a:defRPr>
+            </a:pPr>
+            <a:r>
+              <a:t>With love, Your Appodeal Team 💜</a:t>
             </a:r>
           </a:p>
         </p:txBody>
@@ -4592,7 +4451,7 @@
             <a:avLst/>
           </a:prstGeom>
           <a:solidFill>
-            <a:srgbClr val="9C27B0"/>
+            <a:srgbClr val="FFB72B"/>
           </a:solidFill>
           <a:ln>
             <a:noFill/>
@@ -4645,13 +4504,13 @@
             <a:pPr algn="l">
               <a:defRPr sz="1000" b="1">
                 <a:solidFill>
-                  <a:srgbClr val="9C27B0"/>
-                </a:solidFill>
-                <a:latin typeface="Calibri"/>
-              </a:defRPr>
-            </a:pPr>
-            <a:r>
-              <a:t>💎  WIN</a:t>
+                  <a:srgbClr val="FFB72B"/>
+                </a:solidFill>
+                <a:latin typeface="Calibri"/>
+              </a:defRPr>
+            </a:pPr>
+            <a:r>
+              <a:t>🎂  CELEBRATION</a:t>
             </a:r>
           </a:p>
         </p:txBody>
@@ -4681,13 +4540,13 @@
             <a:pPr algn="l">
               <a:defRPr sz="3200" b="1" i="0">
                 <a:solidFill>
-                  <a:srgbClr val="9C27B0"/>
-                </a:solidFill>
-                <a:latin typeface="Calibri"/>
-              </a:defRPr>
-            </a:pPr>
-            <a:r>
-              <a:t>Product Success</a:t>
+                  <a:srgbClr val="FFB72B"/>
+                </a:solidFill>
+                <a:latin typeface="Calibri"/>
+              </a:defRPr>
+            </a:pPr>
+            <a:r>
+              <a:t>Happy Birthday!</a:t>
             </a:r>
           </a:p>
         </p:txBody>
@@ -4701,29 +4560,29 @@
         <p:spPr>
           <a:xfrm>
             <a:off x="1097280" y="2103120"/>
-            <a:ext cx="4572000" cy="822960"/>
-          </a:xfrm>
-          <a:prstGeom prst="rect">
-            <a:avLst/>
-          </a:prstGeom>
-          <a:noFill/>
-        </p:spPr>
-        <p:txBody>
-          <a:bodyPr wrap="square">
-            <a:spAutoFit/>
-          </a:bodyPr>
-          <a:lstStyle/>
-          <a:p>
-            <a:pPr algn="l">
-              <a:defRPr sz="4800" b="1" i="0">
-                <a:solidFill>
-                  <a:srgbClr val="9C27B0"/>
-                </a:solidFill>
-                <a:latin typeface="Calibri"/>
-              </a:defRPr>
-            </a:pPr>
-            <a:r>
-              <a:t>21.67</a:t>
+            <a:ext cx="9966960" cy="640080"/>
+          </a:xfrm>
+          <a:prstGeom prst="rect">
+            <a:avLst/>
+          </a:prstGeom>
+          <a:noFill/>
+        </p:spPr>
+        <p:txBody>
+          <a:bodyPr wrap="square">
+            <a:spAutoFit/>
+          </a:bodyPr>
+          <a:lstStyle/>
+          <a:p>
+            <a:pPr algn="l">
+              <a:defRPr sz="2800" b="1" i="0">
+                <a:solidFill>
+                  <a:srgbClr val="FFFFFF"/>
+                </a:solidFill>
+                <a:latin typeface="Calibri"/>
+              </a:defRPr>
+            </a:pPr>
+            <a:r>
+              <a:t>Radu Stoia</a:t>
             </a:r>
           </a:p>
         </p:txBody>
@@ -4736,22 +4595,22 @@
         </p:nvSpPr>
         <p:spPr>
           <a:xfrm>
-            <a:off x="1097280" y="2834640"/>
-            <a:ext cx="4572000" cy="365760"/>
-          </a:xfrm>
-          <a:prstGeom prst="rect">
-            <a:avLst/>
-          </a:prstGeom>
-          <a:noFill/>
-        </p:spPr>
-        <p:txBody>
-          <a:bodyPr wrap="square">
-            <a:spAutoFit/>
-          </a:bodyPr>
-          <a:lstStyle/>
-          <a:p>
-            <a:pPr algn="l">
-              <a:defRPr sz="1200" b="0" i="0">
+            <a:off x="1097280" y="2743200"/>
+            <a:ext cx="9966960" cy="365760"/>
+          </a:xfrm>
+          <a:prstGeom prst="rect">
+            <a:avLst/>
+          </a:prstGeom>
+          <a:noFill/>
+        </p:spPr>
+        <p:txBody>
+          <a:bodyPr wrap="square">
+            <a:spAutoFit/>
+          </a:bodyPr>
+          <a:lstStyle/>
+          <a:p>
+            <a:pPr algn="l">
+              <a:defRPr sz="1400" b="0" i="0">
                 <a:solidFill>
                   <a:srgbClr val="8F95A3"/>
                 </a:solidFill>
@@ -4759,7 +4618,7 @@
               </a:defRPr>
             </a:pPr>
             <a:r>
-              <a:t>% improvement</a:t>
+              <a:t>March 11</a:t>
             </a:r>
           </a:p>
         </p:txBody>
@@ -4773,21 +4632,21 @@
         <p:spPr>
           <a:xfrm>
             <a:off x="1097280" y="3291840"/>
-            <a:ext cx="9966960" cy="365760"/>
-          </a:xfrm>
-          <a:prstGeom prst="rect">
-            <a:avLst/>
-          </a:prstGeom>
-          <a:noFill/>
-        </p:spPr>
-        <p:txBody>
-          <a:bodyPr wrap="square">
-            <a:spAutoFit/>
-          </a:bodyPr>
-          <a:lstStyle/>
-          <a:p>
-            <a:pPr algn="l">
-              <a:defRPr sz="1400" b="0" i="0">
+            <a:ext cx="9966960" cy="914400"/>
+          </a:xfrm>
+          <a:prstGeom prst="rect">
+            <a:avLst/>
+          </a:prstGeom>
+          <a:noFill/>
+        </p:spPr>
+        <p:txBody>
+          <a:bodyPr wrap="square">
+            <a:spAutoFit/>
+          </a:bodyPr>
+          <a:lstStyle/>
+          <a:p>
+            <a:pPr algn="l">
+              <a:defRPr sz="1600" b="0" i="0">
                 <a:solidFill>
                   <a:srgbClr val="E2E2EA"/>
                 </a:solidFill>
@@ -4795,7 +4654,7 @@
               </a:defRPr>
             </a:pPr>
             <a:r>
-              <a:t>by Solitaire Team</a:t>
+              <a:t>Wishing you an amazing day filled with joy and celebration!</a:t>
             </a:r>
           </a:p>
         </p:txBody>
@@ -4808,7 +4667,7 @@
         </p:nvSpPr>
         <p:spPr>
           <a:xfrm>
-            <a:off x="1097280" y="3840480"/>
+            <a:off x="1097280" y="4572000"/>
             <a:ext cx="9966960" cy="457200"/>
           </a:xfrm>
           <a:prstGeom prst="rect">
@@ -4823,87 +4682,15 @@
           <a:lstStyle/>
           <a:p>
             <a:pPr algn="l">
-              <a:defRPr sz="1800" b="1" i="0">
-                <a:solidFill>
-                  <a:srgbClr val="FFFFFF"/>
-                </a:solidFill>
-                <a:latin typeface="Calibri"/>
-              </a:defRPr>
-            </a:pPr>
-            <a:r>
-              <a:t>Solitaire v540 Retention Boost!</a:t>
-            </a:r>
-          </a:p>
-        </p:txBody>
-      </p:sp>
-      <p:sp>
-        <p:nvSpPr>
-          <p:cNvPr id="9" name="TextBox 8"/>
-          <p:cNvSpPr txBox="1"/>
-          <p:nvPr/>
-        </p:nvSpPr>
-        <p:spPr>
-          <a:xfrm>
-            <a:off x="1097280" y="4389120"/>
-            <a:ext cx="9966960" cy="914400"/>
-          </a:xfrm>
-          <a:prstGeom prst="rect">
-            <a:avLst/>
-          </a:prstGeom>
-          <a:noFill/>
-        </p:spPr>
-        <p:txBody>
-          <a:bodyPr wrap="square">
-            <a:spAutoFit/>
-          </a:bodyPr>
-          <a:lstStyle/>
-          <a:p>
-            <a:pPr algn="l">
-              <a:defRPr sz="1400" b="0" i="0">
-                <a:solidFill>
-                  <a:srgbClr val="E2E2EA"/>
-                </a:solidFill>
-                <a:latin typeface="Calibri"/>
-              </a:defRPr>
-            </a:pPr>
-            <a:r>
-              <a:t>Significant improvement in D7 retention rates</a:t>
-            </a:r>
-          </a:p>
-        </p:txBody>
-      </p:sp>
-      <p:sp>
-        <p:nvSpPr>
-          <p:cNvPr id="10" name="TextBox 9"/>
-          <p:cNvSpPr txBox="1"/>
-          <p:nvPr/>
-        </p:nvSpPr>
-        <p:spPr>
-          <a:xfrm>
-            <a:off x="1097280" y="5486400"/>
-            <a:ext cx="9966960" cy="457200"/>
-          </a:xfrm>
-          <a:prstGeom prst="rect">
-            <a:avLst/>
-          </a:prstGeom>
-          <a:noFill/>
-        </p:spPr>
-        <p:txBody>
-          <a:bodyPr wrap="square">
-            <a:spAutoFit/>
-          </a:bodyPr>
-          <a:lstStyle/>
-          <a:p>
-            <a:pPr algn="l">
-              <a:defRPr sz="1300" b="0" i="1">
-                <a:solidFill>
-                  <a:srgbClr val="8F95A3"/>
-                </a:solidFill>
-                <a:latin typeface="Calibri"/>
-              </a:defRPr>
-            </a:pPr>
-            <a:r>
-              <a:t>💬 "Product optimization delivering measurable results"</a:t>
+              <a:defRPr sz="1400" b="0" i="1">
+                <a:solidFill>
+                  <a:srgbClr val="FFB72B"/>
+                </a:solidFill>
+                <a:latin typeface="Calibri"/>
+              </a:defRPr>
+            </a:pPr>
+            <a:r>
+              <a:t>With love, Your Appodeal Team 💜</a:t>
             </a:r>
           </a:p>
         </p:txBody>
@@ -4949,7 +4736,7 @@
             <a:avLst/>
           </a:prstGeom>
           <a:solidFill>
-            <a:srgbClr val="FFC107"/>
+            <a:srgbClr val="FFB72B"/>
           </a:solidFill>
           <a:ln>
             <a:noFill/>
@@ -5002,13 +4789,13 @@
             <a:pPr algn="l">
               <a:defRPr sz="1000" b="1">
                 <a:solidFill>
-                  <a:srgbClr val="FFC107"/>
-                </a:solidFill>
-                <a:latin typeface="Calibri"/>
-              </a:defRPr>
-            </a:pPr>
-            <a:r>
-              <a:t>⭐  CLAPS</a:t>
+                  <a:srgbClr val="FFB72B"/>
+                </a:solidFill>
+                <a:latin typeface="Calibri"/>
+              </a:defRPr>
+            </a:pPr>
+            <a:r>
+              <a:t>🎂  CELEBRATION</a:t>
             </a:r>
           </a:p>
         </p:txBody>
@@ -5038,13 +4825,13 @@
             <a:pPr algn="l">
               <a:defRPr sz="3200" b="1" i="0">
                 <a:solidFill>
-                  <a:srgbClr val="FFC107"/>
-                </a:solidFill>
-                <a:latin typeface="Calibri"/>
-              </a:defRPr>
-            </a:pPr>
-            <a:r>
-              <a:t>Multi-Team Recognition</a:t>
+                  <a:srgbClr val="FFB72B"/>
+                </a:solidFill>
+                <a:latin typeface="Calibri"/>
+              </a:defRPr>
+            </a:pPr>
+            <a:r>
+              <a:t>Happy Birthday!</a:t>
             </a:r>
           </a:p>
         </p:txBody>
@@ -5058,7 +4845,7 @@
         <p:spPr>
           <a:xfrm>
             <a:off x="1097280" y="2103120"/>
-            <a:ext cx="2743200" cy="548640"/>
+            <a:ext cx="9966960" cy="640080"/>
           </a:xfrm>
           <a:prstGeom prst="rect">
             <a:avLst/>
@@ -5074,13 +4861,13 @@
             <a:pPr algn="l">
               <a:defRPr sz="2800" b="1" i="0">
                 <a:solidFill>
-                  <a:srgbClr val="FFC107"/>
-                </a:solidFill>
-                <a:latin typeface="Calibri"/>
-              </a:defRPr>
-            </a:pPr>
-            <a:r>
-              <a:t>25</a:t>
+                  <a:srgbClr val="FFFFFF"/>
+                </a:solidFill>
+                <a:latin typeface="Calibri"/>
+              </a:defRPr>
+            </a:pPr>
+            <a:r>
+              <a:t>Eduard Malkhasyan</a:t>
             </a:r>
           </a:p>
         </p:txBody>
@@ -5093,7 +4880,7 @@
         </p:nvSpPr>
         <p:spPr>
           <a:xfrm>
-            <a:off x="1097280" y="2651760"/>
+            <a:off x="1097280" y="2743200"/>
             <a:ext cx="9966960" cy="365760"/>
           </a:xfrm>
           <a:prstGeom prst="rect">
@@ -5110,49 +4897,49 @@
             <a:pPr algn="l">
               <a:defRPr sz="1400" b="0" i="0">
                 <a:solidFill>
+                  <a:srgbClr val="8F95A3"/>
+                </a:solidFill>
+                <a:latin typeface="Calibri"/>
+              </a:defRPr>
+            </a:pPr>
+            <a:r>
+              <a:t>March 11</a:t>
+            </a:r>
+          </a:p>
+        </p:txBody>
+      </p:sp>
+      <p:sp>
+        <p:nvSpPr>
+          <p:cNvPr id="7" name="TextBox 6"/>
+          <p:cNvSpPr txBox="1"/>
+          <p:nvPr/>
+        </p:nvSpPr>
+        <p:spPr>
+          <a:xfrm>
+            <a:off x="1097280" y="3291840"/>
+            <a:ext cx="9966960" cy="914400"/>
+          </a:xfrm>
+          <a:prstGeom prst="rect">
+            <a:avLst/>
+          </a:prstGeom>
+          <a:noFill/>
+        </p:spPr>
+        <p:txBody>
+          <a:bodyPr wrap="square">
+            <a:spAutoFit/>
+          </a:bodyPr>
+          <a:lstStyle/>
+          <a:p>
+            <a:pPr algn="l">
+              <a:defRPr sz="1600" b="0" i="0">
+                <a:solidFill>
                   <a:srgbClr val="E2E2EA"/>
                 </a:solidFill>
                 <a:latin typeface="Calibri"/>
               </a:defRPr>
             </a:pPr>
             <a:r>
-              <a:t>from Dima</a:t>
-            </a:r>
-          </a:p>
-        </p:txBody>
-      </p:sp>
-      <p:sp>
-        <p:nvSpPr>
-          <p:cNvPr id="7" name="TextBox 6"/>
-          <p:cNvSpPr txBox="1"/>
-          <p:nvPr/>
-        </p:nvSpPr>
-        <p:spPr>
-          <a:xfrm>
-            <a:off x="1097280" y="3108960"/>
-            <a:ext cx="9966960" cy="365760"/>
-          </a:xfrm>
-          <a:prstGeom prst="rect">
-            <a:avLst/>
-          </a:prstGeom>
-          <a:noFill/>
-        </p:spPr>
-        <p:txBody>
-          <a:bodyPr wrap="square">
-            <a:spAutoFit/>
-          </a:bodyPr>
-          <a:lstStyle/>
-          <a:p>
-            <a:pPr algn="l">
-              <a:defRPr sz="1400" b="1" i="0">
-                <a:solidFill>
-                  <a:srgbClr val="FFFFFF"/>
-                </a:solidFill>
-                <a:latin typeface="Calibri"/>
-              </a:defRPr>
-            </a:pPr>
-            <a:r>
-              <a:t>to: Irina Koval</a:t>
+              <a:t>Wishing you an amazing day filled with joy and celebration!</a:t>
             </a:r>
           </a:p>
         </p:txBody>
@@ -5165,43 +4952,7 @@
         </p:nvSpPr>
         <p:spPr>
           <a:xfrm>
-            <a:off x="1097280" y="3749039"/>
-            <a:ext cx="9966960" cy="1097280"/>
-          </a:xfrm>
-          <a:prstGeom prst="rect">
-            <a:avLst/>
-          </a:prstGeom>
-          <a:noFill/>
-        </p:spPr>
-        <p:txBody>
-          <a:bodyPr wrap="square">
-            <a:spAutoFit/>
-          </a:bodyPr>
-          <a:lstStyle/>
-          <a:p>
-            <a:pPr algn="l">
-              <a:defRPr sz="1500" b="0" i="1">
-                <a:solidFill>
-                  <a:srgbClr val="E2E2EA"/>
-                </a:solidFill>
-                <a:latin typeface="Calibri"/>
-              </a:defRPr>
-            </a:pPr>
-            <a:r>
-              <a:t>"Exceptional cross-functional collaboration and results delivery"</a:t>
-            </a:r>
-          </a:p>
-        </p:txBody>
-      </p:sp>
-      <p:sp>
-        <p:nvSpPr>
-          <p:cNvPr id="9" name="TextBox 8"/>
-          <p:cNvSpPr txBox="1"/>
-          <p:nvPr/>
-        </p:nvSpPr>
-        <p:spPr>
-          <a:xfrm>
-            <a:off x="1097280" y="5120640"/>
+            <a:off x="1097280" y="4572000"/>
             <a:ext cx="9966960" cy="457200"/>
           </a:xfrm>
           <a:prstGeom prst="rect">
@@ -5216,15 +4967,15 @@
           <a:lstStyle/>
           <a:p>
             <a:pPr algn="l">
-              <a:defRPr sz="1200" b="1" i="0">
-                <a:solidFill>
-                  <a:srgbClr val="FFC107"/>
-                </a:solidFill>
-                <a:latin typeface="Calibri"/>
-              </a:defRPr>
-            </a:pPr>
-            <a:r>
-              <a:t>COLLABORATION · RESULTS</a:t>
+              <a:defRPr sz="1400" b="0" i="1">
+                <a:solidFill>
+                  <a:srgbClr val="FFB72B"/>
+                </a:solidFill>
+                <a:latin typeface="Calibri"/>
+              </a:defRPr>
+            </a:pPr>
+            <a:r>
+              <a:t>With love, Your Appodeal Team 💜</a:t>
             </a:r>
           </a:p>
         </p:txBody>
@@ -5270,7 +5021,7 @@
             <a:avLst/>
           </a:prstGeom>
           <a:solidFill>
-            <a:srgbClr val="F44336"/>
+            <a:srgbClr val="FFB72B"/>
           </a:solidFill>
           <a:ln>
             <a:noFill/>
@@ -5323,13 +5074,13 @@
             <a:pPr algn="l">
               <a:defRPr sz="1000" b="1">
                 <a:solidFill>
-                  <a:srgbClr val="F44336"/>
-                </a:solidFill>
-                <a:latin typeface="Calibri"/>
-              </a:defRPr>
-            </a:pPr>
-            <a:r>
-              <a:t>🛡️  MILESTONE</a:t>
+                  <a:srgbClr val="FFB72B"/>
+                </a:solidFill>
+                <a:latin typeface="Calibri"/>
+              </a:defRPr>
+            </a:pPr>
+            <a:r>
+              <a:t>🎂  CELEBRATION</a:t>
             </a:r>
           </a:p>
         </p:txBody>
@@ -5359,13 +5110,13 @@
             <a:pPr algn="l">
               <a:defRPr sz="3200" b="1" i="0">
                 <a:solidFill>
-                  <a:srgbClr val="F44336"/>
-                </a:solidFill>
-                <a:latin typeface="Calibri"/>
-              </a:defRPr>
-            </a:pPr>
-            <a:r>
-              <a:t>Security Achievement</a:t>
+                  <a:srgbClr val="FFB72B"/>
+                </a:solidFill>
+                <a:latin typeface="Calibri"/>
+              </a:defRPr>
+            </a:pPr>
+            <a:r>
+              <a:t>Happy Birthday!</a:t>
             </a:r>
           </a:p>
         </p:txBody>
@@ -5379,29 +5130,29 @@
         <p:spPr>
           <a:xfrm>
             <a:off x="1097280" y="2103120"/>
-            <a:ext cx="4572000" cy="822960"/>
-          </a:xfrm>
-          <a:prstGeom prst="rect">
-            <a:avLst/>
-          </a:prstGeom>
-          <a:noFill/>
-        </p:spPr>
-        <p:txBody>
-          <a:bodyPr wrap="square">
-            <a:spAutoFit/>
-          </a:bodyPr>
-          <a:lstStyle/>
-          <a:p>
-            <a:pPr algn="l">
-              <a:defRPr sz="5200" b="1" i="0">
-                <a:solidFill>
-                  <a:srgbClr val="F44336"/>
-                </a:solidFill>
-                <a:latin typeface="Calibri"/>
-              </a:defRPr>
-            </a:pPr>
-            <a:r>
-              <a:t>22% → 4%</a:t>
+            <a:ext cx="9966960" cy="640080"/>
+          </a:xfrm>
+          <a:prstGeom prst="rect">
+            <a:avLst/>
+          </a:prstGeom>
+          <a:noFill/>
+        </p:spPr>
+        <p:txBody>
+          <a:bodyPr wrap="square">
+            <a:spAutoFit/>
+          </a:bodyPr>
+          <a:lstStyle/>
+          <a:p>
+            <a:pPr algn="l">
+              <a:defRPr sz="2800" b="1" i="0">
+                <a:solidFill>
+                  <a:srgbClr val="FFFFFF"/>
+                </a:solidFill>
+                <a:latin typeface="Calibri"/>
+              </a:defRPr>
+            </a:pPr>
+            <a:r>
+              <a:t>Daryna Rudavka</a:t>
             </a:r>
           </a:p>
         </p:txBody>
@@ -5414,22 +5165,22 @@
         </p:nvSpPr>
         <p:spPr>
           <a:xfrm>
-            <a:off x="1097280" y="2926080"/>
-            <a:ext cx="4572000" cy="365760"/>
-          </a:xfrm>
-          <a:prstGeom prst="rect">
-            <a:avLst/>
-          </a:prstGeom>
-          <a:noFill/>
-        </p:spPr>
-        <p:txBody>
-          <a:bodyPr wrap="square">
-            <a:spAutoFit/>
-          </a:bodyPr>
-          <a:lstStyle/>
-          <a:p>
-            <a:pPr algn="l">
-              <a:defRPr sz="1100" b="0" i="0">
+            <a:off x="1097280" y="2743200"/>
+            <a:ext cx="9966960" cy="365760"/>
+          </a:xfrm>
+          <a:prstGeom prst="rect">
+            <a:avLst/>
+          </a:prstGeom>
+          <a:noFill/>
+        </p:spPr>
+        <p:txBody>
+          <a:bodyPr wrap="square">
+            <a:spAutoFit/>
+          </a:bodyPr>
+          <a:lstStyle/>
+          <a:p>
+            <a:pPr algn="l">
+              <a:defRPr sz="1400" b="0" i="0">
                 <a:solidFill>
                   <a:srgbClr val="8F95A3"/>
                 </a:solidFill>
@@ -5437,7 +5188,7 @@
               </a:defRPr>
             </a:pPr>
             <a:r>
-              <a:t>fraud reduction</a:t>
+              <a:t>March 11</a:t>
             </a:r>
           </a:p>
         </p:txBody>
@@ -5450,7 +5201,43 @@
         </p:nvSpPr>
         <p:spPr>
           <a:xfrm>
-            <a:off x="1097280" y="3566160"/>
+            <a:off x="1097280" y="3291840"/>
+            <a:ext cx="9966960" cy="914400"/>
+          </a:xfrm>
+          <a:prstGeom prst="rect">
+            <a:avLst/>
+          </a:prstGeom>
+          <a:noFill/>
+        </p:spPr>
+        <p:txBody>
+          <a:bodyPr wrap="square">
+            <a:spAutoFit/>
+          </a:bodyPr>
+          <a:lstStyle/>
+          <a:p>
+            <a:pPr algn="l">
+              <a:defRPr sz="1600" b="0" i="0">
+                <a:solidFill>
+                  <a:srgbClr val="E2E2EA"/>
+                </a:solidFill>
+                <a:latin typeface="Calibri"/>
+              </a:defRPr>
+            </a:pPr>
+            <a:r>
+              <a:t>Wishing you an amazing day filled with joy and celebration!</a:t>
+            </a:r>
+          </a:p>
+        </p:txBody>
+      </p:sp>
+      <p:sp>
+        <p:nvSpPr>
+          <p:cNvPr id="8" name="TextBox 7"/>
+          <p:cNvSpPr txBox="1"/>
+          <p:nvPr/>
+        </p:nvSpPr>
+        <p:spPr>
+          <a:xfrm>
+            <a:off x="1097280" y="4572000"/>
             <a:ext cx="9966960" cy="457200"/>
           </a:xfrm>
           <a:prstGeom prst="rect">
@@ -5465,51 +5252,15 @@
           <a:lstStyle/>
           <a:p>
             <a:pPr algn="l">
-              <a:defRPr sz="1800" b="1" i="0">
-                <a:solidFill>
-                  <a:srgbClr val="FFFFFF"/>
-                </a:solidFill>
-                <a:latin typeface="Calibri"/>
-              </a:defRPr>
-            </a:pPr>
-            <a:r>
-              <a:t>Fraud Prevention Success</a:t>
-            </a:r>
-          </a:p>
-        </p:txBody>
-      </p:sp>
-      <p:sp>
-        <p:nvSpPr>
-          <p:cNvPr id="8" name="TextBox 7"/>
-          <p:cNvSpPr txBox="1"/>
-          <p:nvPr/>
-        </p:nvSpPr>
-        <p:spPr>
-          <a:xfrm>
-            <a:off x="1097280" y="4206240"/>
-            <a:ext cx="9966960" cy="1371600"/>
-          </a:xfrm>
-          <a:prstGeom prst="rect">
-            <a:avLst/>
-          </a:prstGeom>
-          <a:noFill/>
-        </p:spPr>
-        <p:txBody>
-          <a:bodyPr wrap="square">
-            <a:spAutoFit/>
-          </a:bodyPr>
-          <a:lstStyle/>
-          <a:p>
-            <a:pPr algn="l">
-              <a:defRPr sz="1500" b="0" i="0">
-                <a:solidFill>
-                  <a:srgbClr val="E2E2EA"/>
-                </a:solidFill>
-                <a:latin typeface="Calibri"/>
-              </a:defRPr>
-            </a:pPr>
-            <a:r>
-              <a:t>Dynamic SDK signatures dramatically reducing fraudulent traffic</a:t>
+              <a:defRPr sz="1400" b="0" i="1">
+                <a:solidFill>
+                  <a:srgbClr val="FFB72B"/>
+                </a:solidFill>
+                <a:latin typeface="Calibri"/>
+              </a:defRPr>
+            </a:pPr>
+            <a:r>
+              <a:t>With love, Your Appodeal Team 💜</a:t>
             </a:r>
           </a:p>
         </p:txBody>
@@ -5555,7 +5306,7 @@
             <a:avLst/>
           </a:prstGeom>
           <a:solidFill>
-            <a:srgbClr val="FF5722"/>
+            <a:srgbClr val="FFB72B"/>
           </a:solidFill>
           <a:ln>
             <a:noFill/>
@@ -5608,13 +5359,13 @@
             <a:pPr algn="l">
               <a:defRPr sz="1000" b="1">
                 <a:solidFill>
-                  <a:srgbClr val="FF5722"/>
-                </a:solidFill>
-                <a:latin typeface="Calibri"/>
-              </a:defRPr>
-            </a:pPr>
-            <a:r>
-              <a:t>🎉  WEEKLY RITUAL</a:t>
+                  <a:srgbClr val="FFB72B"/>
+                </a:solidFill>
+                <a:latin typeface="Calibri"/>
+              </a:defRPr>
+            </a:pPr>
+            <a:r>
+              <a:t>🎂  CELEBRATION</a:t>
             </a:r>
           </a:p>
         </p:txBody>
@@ -5644,13 +5395,13 @@
             <a:pPr algn="l">
               <a:defRPr sz="3200" b="1" i="0">
                 <a:solidFill>
-                  <a:srgbClr val="FF5722"/>
-                </a:solidFill>
-                <a:latin typeface="Calibri"/>
-              </a:defRPr>
-            </a:pPr>
-            <a:r>
-              <a:t>Daily Celebration</a:t>
+                  <a:srgbClr val="FFB72B"/>
+                </a:solidFill>
+                <a:latin typeface="Calibri"/>
+              </a:defRPr>
+            </a:pPr>
+            <a:r>
+              <a:t>Happy Birthday!</a:t>
             </a:r>
           </a:p>
         </p:txBody>
@@ -5664,6 +5415,114 @@
         <p:spPr>
           <a:xfrm>
             <a:off x="1097280" y="2103120"/>
+            <a:ext cx="9966960" cy="640080"/>
+          </a:xfrm>
+          <a:prstGeom prst="rect">
+            <a:avLst/>
+          </a:prstGeom>
+          <a:noFill/>
+        </p:spPr>
+        <p:txBody>
+          <a:bodyPr wrap="square">
+            <a:spAutoFit/>
+          </a:bodyPr>
+          <a:lstStyle/>
+          <a:p>
+            <a:pPr algn="l">
+              <a:defRPr sz="2800" b="1" i="0">
+                <a:solidFill>
+                  <a:srgbClr val="FFFFFF"/>
+                </a:solidFill>
+                <a:latin typeface="Calibri"/>
+              </a:defRPr>
+            </a:pPr>
+            <a:r>
+              <a:t>Yanina Lozben</a:t>
+            </a:r>
+          </a:p>
+        </p:txBody>
+      </p:sp>
+      <p:sp>
+        <p:nvSpPr>
+          <p:cNvPr id="6" name="TextBox 5"/>
+          <p:cNvSpPr txBox="1"/>
+          <p:nvPr/>
+        </p:nvSpPr>
+        <p:spPr>
+          <a:xfrm>
+            <a:off x="1097280" y="2743200"/>
+            <a:ext cx="9966960" cy="365760"/>
+          </a:xfrm>
+          <a:prstGeom prst="rect">
+            <a:avLst/>
+          </a:prstGeom>
+          <a:noFill/>
+        </p:spPr>
+        <p:txBody>
+          <a:bodyPr wrap="square">
+            <a:spAutoFit/>
+          </a:bodyPr>
+          <a:lstStyle/>
+          <a:p>
+            <a:pPr algn="l">
+              <a:defRPr sz="1400" b="0" i="0">
+                <a:solidFill>
+                  <a:srgbClr val="8F95A3"/>
+                </a:solidFill>
+                <a:latin typeface="Calibri"/>
+              </a:defRPr>
+            </a:pPr>
+            <a:r>
+              <a:t>March 11</a:t>
+            </a:r>
+          </a:p>
+        </p:txBody>
+      </p:sp>
+      <p:sp>
+        <p:nvSpPr>
+          <p:cNvPr id="7" name="TextBox 6"/>
+          <p:cNvSpPr txBox="1"/>
+          <p:nvPr/>
+        </p:nvSpPr>
+        <p:spPr>
+          <a:xfrm>
+            <a:off x="1097280" y="3291840"/>
+            <a:ext cx="9966960" cy="914400"/>
+          </a:xfrm>
+          <a:prstGeom prst="rect">
+            <a:avLst/>
+          </a:prstGeom>
+          <a:noFill/>
+        </p:spPr>
+        <p:txBody>
+          <a:bodyPr wrap="square">
+            <a:spAutoFit/>
+          </a:bodyPr>
+          <a:lstStyle/>
+          <a:p>
+            <a:pPr algn="l">
+              <a:defRPr sz="1600" b="0" i="0">
+                <a:solidFill>
+                  <a:srgbClr val="E2E2EA"/>
+                </a:solidFill>
+                <a:latin typeface="Calibri"/>
+              </a:defRPr>
+            </a:pPr>
+            <a:r>
+              <a:t>Wishing you an amazing day filled with joy and celebration!</a:t>
+            </a:r>
+          </a:p>
+        </p:txBody>
+      </p:sp>
+      <p:sp>
+        <p:nvSpPr>
+          <p:cNvPr id="8" name="TextBox 7"/>
+          <p:cNvSpPr txBox="1"/>
+          <p:nvPr/>
+        </p:nvSpPr>
+        <p:spPr>
+          <a:xfrm>
+            <a:off x="1097280" y="4572000"/>
             <a:ext cx="9966960" cy="457200"/>
           </a:xfrm>
           <a:prstGeom prst="rect">
@@ -5678,159 +5537,15 @@
           <a:lstStyle/>
           <a:p>
             <a:pPr algn="l">
-              <a:defRPr sz="1800" b="1" i="0">
-                <a:solidFill>
-                  <a:srgbClr val="FFFFFF"/>
-                </a:solidFill>
-                <a:latin typeface="Calibri"/>
-              </a:defRPr>
-            </a:pPr>
-            <a:r>
-              <a:t>Team Birthday Joy!</a:t>
-            </a:r>
-          </a:p>
-        </p:txBody>
-      </p:sp>
-      <p:sp>
-        <p:nvSpPr>
-          <p:cNvPr id="6" name="TextBox 5"/>
-          <p:cNvSpPr txBox="1"/>
-          <p:nvPr/>
-        </p:nvSpPr>
-        <p:spPr>
-          <a:xfrm>
-            <a:off x="1371600" y="2926080"/>
-            <a:ext cx="9418320" cy="548640"/>
-          </a:xfrm>
-          <a:prstGeom prst="rect">
-            <a:avLst/>
-          </a:prstGeom>
-          <a:noFill/>
-        </p:spPr>
-        <p:txBody>
-          <a:bodyPr wrap="square">
-            <a:spAutoFit/>
-          </a:bodyPr>
-          <a:lstStyle/>
-          <a:p>
-            <a:pPr algn="l">
-              <a:defRPr sz="1400" b="0" i="0">
-                <a:solidFill>
-                  <a:srgbClr val="E2E2EA"/>
-                </a:solidFill>
-                <a:latin typeface="Calibri"/>
-              </a:defRPr>
-            </a:pPr>
-            <a:r>
-              <a:t>Who brings the most positive energy to your team?</a:t>
-            </a:r>
-          </a:p>
-        </p:txBody>
-      </p:sp>
-      <p:sp>
-        <p:nvSpPr>
-          <p:cNvPr id="7" name="TextBox 6"/>
-          <p:cNvSpPr txBox="1"/>
-          <p:nvPr/>
-        </p:nvSpPr>
-        <p:spPr>
-          <a:xfrm>
-            <a:off x="1371600" y="3657600"/>
-            <a:ext cx="9418320" cy="548640"/>
-          </a:xfrm>
-          <a:prstGeom prst="rect">
-            <a:avLst/>
-          </a:prstGeom>
-          <a:noFill/>
-        </p:spPr>
-        <p:txBody>
-          <a:bodyPr wrap="square">
-            <a:spAutoFit/>
-          </a:bodyPr>
-          <a:lstStyle/>
-          <a:p>
-            <a:pPr algn="l">
-              <a:defRPr sz="1400" b="0" i="0">
-                <a:solidFill>
-                  <a:srgbClr val="E2E2EA"/>
-                </a:solidFill>
-                <a:latin typeface="Calibri"/>
-              </a:defRPr>
-            </a:pPr>
-            <a:r>
-              <a:t>What's your favorite way to celebrate wins together?</a:t>
-            </a:r>
-          </a:p>
-        </p:txBody>
-      </p:sp>
-      <p:sp>
-        <p:nvSpPr>
-          <p:cNvPr id="8" name="TextBox 7"/>
-          <p:cNvSpPr txBox="1"/>
-          <p:nvPr/>
-        </p:nvSpPr>
-        <p:spPr>
-          <a:xfrm>
-            <a:off x="1097280" y="4754880"/>
-            <a:ext cx="9966960" cy="731520"/>
-          </a:xfrm>
-          <a:prstGeom prst="rect">
-            <a:avLst/>
-          </a:prstGeom>
-          <a:noFill/>
-        </p:spPr>
-        <p:txBody>
-          <a:bodyPr wrap="square">
-            <a:spAutoFit/>
-          </a:bodyPr>
-          <a:lstStyle/>
-          <a:p>
-            <a:pPr algn="l">
-              <a:defRPr sz="1500" b="0" i="1">
-                <a:solidFill>
-                  <a:srgbClr val="E2E2EA"/>
-                </a:solidFill>
-                <a:latin typeface="Calibri"/>
-              </a:defRPr>
-            </a:pPr>
-            <a:r>
-              <a:t>We CELEBRATE achievements and support each other</a:t>
-            </a:r>
-          </a:p>
-        </p:txBody>
-      </p:sp>
-      <p:sp>
-        <p:nvSpPr>
-          <p:cNvPr id="9" name="TextBox 8"/>
-          <p:cNvSpPr txBox="1"/>
-          <p:nvPr/>
-        </p:nvSpPr>
-        <p:spPr>
-          <a:xfrm>
-            <a:off x="1097280" y="5760720"/>
-            <a:ext cx="9966960" cy="274320"/>
-          </a:xfrm>
-          <a:prstGeom prst="rect">
-            <a:avLst/>
-          </a:prstGeom>
-          <a:noFill/>
-        </p:spPr>
-        <p:txBody>
-          <a:bodyPr wrap="square">
-            <a:spAutoFit/>
-          </a:bodyPr>
-          <a:lstStyle/>
-          <a:p>
-            <a:pPr algn="l">
-              <a:defRPr sz="1100" b="0" i="0">
-                <a:solidFill>
-                  <a:srgbClr val="5C6270"/>
-                </a:solidFill>
-                <a:latin typeface="Calibri"/>
-              </a:defRPr>
-            </a:pPr>
-            <a:r>
-              <a:t>#birthdays</a:t>
+              <a:defRPr sz="1400" b="0" i="1">
+                <a:solidFill>
+                  <a:srgbClr val="FFB72B"/>
+                </a:solidFill>
+                <a:latin typeface="Calibri"/>
+              </a:defRPr>
+            </a:pPr>
+            <a:r>
+              <a:t>With love, Your Appodeal Team 💜</a:t>
             </a:r>
           </a:p>
         </p:txBody>
@@ -5876,7 +5591,7 @@
             <a:avLst/>
           </a:prstGeom>
           <a:solidFill>
-            <a:srgbClr val="4CAF50"/>
+            <a:srgbClr val="FFB72B"/>
           </a:solidFill>
           <a:ln>
             <a:noFill/>
@@ -5929,13 +5644,13 @@
             <a:pPr algn="l">
               <a:defRPr sz="1000" b="1">
                 <a:solidFill>
-                  <a:srgbClr val="4CAF50"/>
-                </a:solidFill>
-                <a:latin typeface="Calibri"/>
-              </a:defRPr>
-            </a:pPr>
-            <a:r>
-              <a:t>💰  WIN</a:t>
+                  <a:srgbClr val="FFB72B"/>
+                </a:solidFill>
+                <a:latin typeface="Calibri"/>
+              </a:defRPr>
+            </a:pPr>
+            <a:r>
+              <a:t>🎂  CELEBRATION</a:t>
             </a:r>
           </a:p>
         </p:txBody>
@@ -5965,13 +5680,13 @@
             <a:pPr algn="l">
               <a:defRPr sz="3200" b="1" i="0">
                 <a:solidFill>
-                  <a:srgbClr val="4CAF50"/>
-                </a:solidFill>
-                <a:latin typeface="Calibri"/>
-              </a:defRPr>
-            </a:pPr>
-            <a:r>
-              <a:t>Sales Victory</a:t>
+                  <a:srgbClr val="FFB72B"/>
+                </a:solidFill>
+                <a:latin typeface="Calibri"/>
+              </a:defRPr>
+            </a:pPr>
+            <a:r>
+              <a:t>Happy Birthday!</a:t>
             </a:r>
           </a:p>
         </p:txBody>
@@ -5985,29 +5700,29 @@
         <p:spPr>
           <a:xfrm>
             <a:off x="1097280" y="2103120"/>
-            <a:ext cx="4572000" cy="822960"/>
-          </a:xfrm>
-          <a:prstGeom prst="rect">
-            <a:avLst/>
-          </a:prstGeom>
-          <a:noFill/>
-        </p:spPr>
-        <p:txBody>
-          <a:bodyPr wrap="square">
-            <a:spAutoFit/>
-          </a:bodyPr>
-          <a:lstStyle/>
-          <a:p>
-            <a:pPr algn="l">
-              <a:defRPr sz="4800" b="1" i="0">
-                <a:solidFill>
-                  <a:srgbClr val="4CAF50"/>
-                </a:solidFill>
-                <a:latin typeface="Calibri"/>
-              </a:defRPr>
-            </a:pPr>
-            <a:r>
-              <a:t>8</a:t>
+            <a:ext cx="9966960" cy="640080"/>
+          </a:xfrm>
+          <a:prstGeom prst="rect">
+            <a:avLst/>
+          </a:prstGeom>
+          <a:noFill/>
+        </p:spPr>
+        <p:txBody>
+          <a:bodyPr wrap="square">
+            <a:spAutoFit/>
+          </a:bodyPr>
+          <a:lstStyle/>
+          <a:p>
+            <a:pPr algn="l">
+              <a:defRPr sz="2800" b="1" i="0">
+                <a:solidFill>
+                  <a:srgbClr val="FFFFFF"/>
+                </a:solidFill>
+                <a:latin typeface="Calibri"/>
+              </a:defRPr>
+            </a:pPr>
+            <a:r>
+              <a:t>Irina Koval</a:t>
             </a:r>
           </a:p>
         </p:txBody>
@@ -6020,22 +5735,22 @@
         </p:nvSpPr>
         <p:spPr>
           <a:xfrm>
-            <a:off x="1097280" y="2834640"/>
-            <a:ext cx="4572000" cy="365760"/>
-          </a:xfrm>
-          <a:prstGeom prst="rect">
-            <a:avLst/>
-          </a:prstGeom>
-          <a:noFill/>
-        </p:spPr>
-        <p:txBody>
-          <a:bodyPr wrap="square">
-            <a:spAutoFit/>
-          </a:bodyPr>
-          <a:lstStyle/>
-          <a:p>
-            <a:pPr algn="l">
-              <a:defRPr sz="1200" b="0" i="0">
+            <a:off x="1097280" y="2743200"/>
+            <a:ext cx="9966960" cy="365760"/>
+          </a:xfrm>
+          <a:prstGeom prst="rect">
+            <a:avLst/>
+          </a:prstGeom>
+          <a:noFill/>
+        </p:spPr>
+        <p:txBody>
+          <a:bodyPr wrap="square">
+            <a:spAutoFit/>
+          </a:bodyPr>
+          <a:lstStyle/>
+          <a:p>
+            <a:pPr algn="l">
+              <a:defRPr sz="1400" b="0" i="0">
                 <a:solidFill>
                   <a:srgbClr val="8F95A3"/>
                 </a:solidFill>
@@ -6043,7 +5758,7 @@
               </a:defRPr>
             </a:pPr>
             <a:r>
-              <a:t>deals closed</a:t>
+              <a:t>March 11</a:t>
             </a:r>
           </a:p>
         </p:txBody>
@@ -6057,21 +5772,21 @@
         <p:spPr>
           <a:xfrm>
             <a:off x="1097280" y="3291840"/>
-            <a:ext cx="9966960" cy="365760"/>
-          </a:xfrm>
-          <a:prstGeom prst="rect">
-            <a:avLst/>
-          </a:prstGeom>
-          <a:noFill/>
-        </p:spPr>
-        <p:txBody>
-          <a:bodyPr wrap="square">
-            <a:spAutoFit/>
-          </a:bodyPr>
-          <a:lstStyle/>
-          <a:p>
-            <a:pPr algn="l">
-              <a:defRPr sz="1400" b="0" i="0">
+            <a:ext cx="9966960" cy="914400"/>
+          </a:xfrm>
+          <a:prstGeom prst="rect">
+            <a:avLst/>
+          </a:prstGeom>
+          <a:noFill/>
+        </p:spPr>
+        <p:txBody>
+          <a:bodyPr wrap="square">
+            <a:spAutoFit/>
+          </a:bodyPr>
+          <a:lstStyle/>
+          <a:p>
+            <a:pPr algn="l">
+              <a:defRPr sz="1600" b="0" i="0">
                 <a:solidFill>
                   <a:srgbClr val="E2E2EA"/>
                 </a:solidFill>
@@ -6079,7 +5794,7 @@
               </a:defRPr>
             </a:pPr>
             <a:r>
-              <a:t>by Sales Team</a:t>
+              <a:t>Wishing you an amazing day filled with joy and celebration!</a:t>
             </a:r>
           </a:p>
         </p:txBody>
@@ -6092,7 +5807,7 @@
         </p:nvSpPr>
         <p:spPr>
           <a:xfrm>
-            <a:off x="1097280" y="3840480"/>
+            <a:off x="1097280" y="4572000"/>
             <a:ext cx="9966960" cy="457200"/>
           </a:xfrm>
           <a:prstGeom prst="rect">
@@ -6107,87 +5822,15 @@
           <a:lstStyle/>
           <a:p>
             <a:pPr algn="l">
-              <a:defRPr sz="1800" b="1" i="0">
-                <a:solidFill>
-                  <a:srgbClr val="FFFFFF"/>
-                </a:solidFill>
-                <a:latin typeface="Calibri"/>
-              </a:defRPr>
-            </a:pPr>
-            <a:r>
-              <a:t>Outstanding Week Performance!</a:t>
-            </a:r>
-          </a:p>
-        </p:txBody>
-      </p:sp>
-      <p:sp>
-        <p:nvSpPr>
-          <p:cNvPr id="9" name="TextBox 8"/>
-          <p:cNvSpPr txBox="1"/>
-          <p:nvPr/>
-        </p:nvSpPr>
-        <p:spPr>
-          <a:xfrm>
-            <a:off x="1097280" y="4389120"/>
-            <a:ext cx="9966960" cy="914400"/>
-          </a:xfrm>
-          <a:prstGeom prst="rect">
-            <a:avLst/>
-          </a:prstGeom>
-          <a:noFill/>
-        </p:spPr>
-        <p:txBody>
-          <a:bodyPr wrap="square">
-            <a:spAutoFit/>
-          </a:bodyPr>
-          <a:lstStyle/>
-          <a:p>
-            <a:pPr algn="l">
-              <a:defRPr sz="1400" b="0" i="0">
-                <a:solidFill>
-                  <a:srgbClr val="E2E2EA"/>
-                </a:solidFill>
-                <a:latin typeface="Calibri"/>
-              </a:defRPr>
-            </a:pPr>
-            <a:r>
-              <a:t>$390k net revenue in a single week</a:t>
-            </a:r>
-          </a:p>
-        </p:txBody>
-      </p:sp>
-      <p:sp>
-        <p:nvSpPr>
-          <p:cNvPr id="10" name="TextBox 9"/>
-          <p:cNvSpPr txBox="1"/>
-          <p:nvPr/>
-        </p:nvSpPr>
-        <p:spPr>
-          <a:xfrm>
-            <a:off x="1097280" y="5486400"/>
-            <a:ext cx="9966960" cy="457200"/>
-          </a:xfrm>
-          <a:prstGeom prst="rect">
-            <a:avLst/>
-          </a:prstGeom>
-          <a:noFill/>
-        </p:spPr>
-        <p:txBody>
-          <a:bodyPr wrap="square">
-            <a:spAutoFit/>
-          </a:bodyPr>
-          <a:lstStyle/>
-          <a:p>
-            <a:pPr algn="l">
-              <a:defRPr sz="1300" b="0" i="1">
-                <a:solidFill>
-                  <a:srgbClr val="8F95A3"/>
-                </a:solidFill>
-                <a:latin typeface="Calibri"/>
-              </a:defRPr>
-            </a:pPr>
-            <a:r>
-              <a:t>💬 "Sales momentum building strong pipeline"</a:t>
+              <a:defRPr sz="1400" b="0" i="1">
+                <a:solidFill>
+                  <a:srgbClr val="FFB72B"/>
+                </a:solidFill>
+                <a:latin typeface="Calibri"/>
+              </a:defRPr>
+            </a:pPr>
+            <a:r>
+              <a:t>With love, Your Appodeal Team 💜</a:t>
             </a:r>
           </a:p>
         </p:txBody>
@@ -6233,7 +5876,7 @@
             <a:avLst/>
           </a:prstGeom>
           <a:solidFill>
-            <a:srgbClr val="795548"/>
+            <a:srgbClr val="FFB72B"/>
           </a:solidFill>
           <a:ln>
             <a:noFill/>
@@ -6286,13 +5929,13 @@
             <a:pPr algn="l">
               <a:defRPr sz="1000" b="1">
                 <a:solidFill>
-                  <a:srgbClr val="795548"/>
-                </a:solidFill>
-                <a:latin typeface="Calibri"/>
-              </a:defRPr>
-            </a:pPr>
-            <a:r>
-              <a:t>🏗️  OFFICE LIFE</a:t>
+                  <a:srgbClr val="FFB72B"/>
+                </a:solidFill>
+                <a:latin typeface="Calibri"/>
+              </a:defRPr>
+            </a:pPr>
+            <a:r>
+              <a:t>🎂  CELEBRATION</a:t>
             </a:r>
           </a:p>
         </p:txBody>
@@ -6322,13 +5965,13 @@
             <a:pPr algn="l">
               <a:defRPr sz="3200" b="1" i="0">
                 <a:solidFill>
-                  <a:srgbClr val="795548"/>
-                </a:solidFill>
-                <a:latin typeface="Calibri"/>
-              </a:defRPr>
-            </a:pPr>
-            <a:r>
-              <a:t>Leadership Vision</a:t>
+                  <a:srgbClr val="FFB72B"/>
+                </a:solidFill>
+                <a:latin typeface="Calibri"/>
+              </a:defRPr>
+            </a:pPr>
+            <a:r>
+              <a:t>Happy Birthday!</a:t>
             </a:r>
           </a:p>
         </p:txBody>
@@ -6342,6 +5985,114 @@
         <p:spPr>
           <a:xfrm>
             <a:off x="1097280" y="2103120"/>
+            <a:ext cx="9966960" cy="640080"/>
+          </a:xfrm>
+          <a:prstGeom prst="rect">
+            <a:avLst/>
+          </a:prstGeom>
+          <a:noFill/>
+        </p:spPr>
+        <p:txBody>
+          <a:bodyPr wrap="square">
+            <a:spAutoFit/>
+          </a:bodyPr>
+          <a:lstStyle/>
+          <a:p>
+            <a:pPr algn="l">
+              <a:defRPr sz="2800" b="1" i="0">
+                <a:solidFill>
+                  <a:srgbClr val="FFFFFF"/>
+                </a:solidFill>
+                <a:latin typeface="Calibri"/>
+              </a:defRPr>
+            </a:pPr>
+            <a:r>
+              <a:t>Francesco Cerigioni</a:t>
+            </a:r>
+          </a:p>
+        </p:txBody>
+      </p:sp>
+      <p:sp>
+        <p:nvSpPr>
+          <p:cNvPr id="6" name="TextBox 5"/>
+          <p:cNvSpPr txBox="1"/>
+          <p:nvPr/>
+        </p:nvSpPr>
+        <p:spPr>
+          <a:xfrm>
+            <a:off x="1097280" y="2743200"/>
+            <a:ext cx="9966960" cy="365760"/>
+          </a:xfrm>
+          <a:prstGeom prst="rect">
+            <a:avLst/>
+          </a:prstGeom>
+          <a:noFill/>
+        </p:spPr>
+        <p:txBody>
+          <a:bodyPr wrap="square">
+            <a:spAutoFit/>
+          </a:bodyPr>
+          <a:lstStyle/>
+          <a:p>
+            <a:pPr algn="l">
+              <a:defRPr sz="1400" b="0" i="0">
+                <a:solidFill>
+                  <a:srgbClr val="8F95A3"/>
+                </a:solidFill>
+                <a:latin typeface="Calibri"/>
+              </a:defRPr>
+            </a:pPr>
+            <a:r>
+              <a:t>March 11</a:t>
+            </a:r>
+          </a:p>
+        </p:txBody>
+      </p:sp>
+      <p:sp>
+        <p:nvSpPr>
+          <p:cNvPr id="7" name="TextBox 6"/>
+          <p:cNvSpPr txBox="1"/>
+          <p:nvPr/>
+        </p:nvSpPr>
+        <p:spPr>
+          <a:xfrm>
+            <a:off x="1097280" y="3291840"/>
+            <a:ext cx="9966960" cy="914400"/>
+          </a:xfrm>
+          <a:prstGeom prst="rect">
+            <a:avLst/>
+          </a:prstGeom>
+          <a:noFill/>
+        </p:spPr>
+        <p:txBody>
+          <a:bodyPr wrap="square">
+            <a:spAutoFit/>
+          </a:bodyPr>
+          <a:lstStyle/>
+          <a:p>
+            <a:pPr algn="l">
+              <a:defRPr sz="1600" b="0" i="0">
+                <a:solidFill>
+                  <a:srgbClr val="E2E2EA"/>
+                </a:solidFill>
+                <a:latin typeface="Calibri"/>
+              </a:defRPr>
+            </a:pPr>
+            <a:r>
+              <a:t>Wishing you an amazing day filled with joy and celebration!</a:t>
+            </a:r>
+          </a:p>
+        </p:txBody>
+      </p:sp>
+      <p:sp>
+        <p:nvSpPr>
+          <p:cNvPr id="8" name="TextBox 7"/>
+          <p:cNvSpPr txBox="1"/>
+          <p:nvPr/>
+        </p:nvSpPr>
+        <p:spPr>
+          <a:xfrm>
+            <a:off x="1097280" y="4572000"/>
             <a:ext cx="9966960" cy="457200"/>
           </a:xfrm>
           <a:prstGeom prst="rect">
@@ -6356,159 +6107,15 @@
           <a:lstStyle/>
           <a:p>
             <a:pPr algn="l">
-              <a:defRPr sz="1800" b="1" i="0">
-                <a:solidFill>
-                  <a:srgbClr val="FFFFFF"/>
-                </a:solidFill>
-                <a:latin typeface="Calibri"/>
-              </a:defRPr>
-            </a:pPr>
-            <a:r>
-              <a:t>Build. Ship. Improve.</a:t>
-            </a:r>
-          </a:p>
-        </p:txBody>
-      </p:sp>
-      <p:sp>
-        <p:nvSpPr>
-          <p:cNvPr id="6" name="TextBox 5"/>
-          <p:cNvSpPr txBox="1"/>
-          <p:nvPr/>
-        </p:nvSpPr>
-        <p:spPr>
-          <a:xfrm>
-            <a:off x="1371600" y="2743200"/>
-            <a:ext cx="9692640" cy="1828800"/>
-          </a:xfrm>
-          <a:prstGeom prst="rect">
-            <a:avLst/>
-          </a:prstGeom>
-          <a:noFill/>
-        </p:spPr>
-        <p:txBody>
-          <a:bodyPr wrap="square">
-            <a:spAutoFit/>
-          </a:bodyPr>
-          <a:lstStyle/>
-          <a:p>
-            <a:pPr algn="l">
-              <a:defRPr sz="1500" b="0" i="1">
-                <a:solidFill>
-                  <a:srgbClr val="E2E2EA"/>
-                </a:solidFill>
-                <a:latin typeface="Calibri"/>
-              </a:defRPr>
-            </a:pPr>
-            <a:r>
-              <a:t>"Shift from requirements to pull request mentality"</a:t>
-            </a:r>
-          </a:p>
-        </p:txBody>
-      </p:sp>
-      <p:sp>
-        <p:nvSpPr>
-          <p:cNvPr id="7" name="TextBox 6"/>
-          <p:cNvSpPr txBox="1"/>
-          <p:nvPr/>
-        </p:nvSpPr>
-        <p:spPr>
-          <a:xfrm>
-            <a:off x="1097280" y="4754880"/>
-            <a:ext cx="9966960" cy="365760"/>
-          </a:xfrm>
-          <a:prstGeom prst="rect">
-            <a:avLst/>
-          </a:prstGeom>
-          <a:noFill/>
-        </p:spPr>
-        <p:txBody>
-          <a:bodyPr wrap="square">
-            <a:spAutoFit/>
-          </a:bodyPr>
-          <a:lstStyle/>
-          <a:p>
-            <a:pPr algn="l">
-              <a:defRPr sz="1400" b="0" i="0">
-                <a:solidFill>
-                  <a:srgbClr val="8F95A3"/>
-                </a:solidFill>
-                <a:latin typeface="Calibri"/>
-              </a:defRPr>
-            </a:pPr>
-            <a:r>
-              <a:t>— CEO Mandate</a:t>
-            </a:r>
-          </a:p>
-        </p:txBody>
-      </p:sp>
-      <p:sp>
-        <p:nvSpPr>
-          <p:cNvPr id="8" name="TextBox 7"/>
-          <p:cNvSpPr txBox="1"/>
-          <p:nvPr/>
-        </p:nvSpPr>
-        <p:spPr>
-          <a:xfrm>
-            <a:off x="1097280" y="5212080"/>
-            <a:ext cx="9966960" cy="365760"/>
-          </a:xfrm>
-          <a:prstGeom prst="rect">
-            <a:avLst/>
-          </a:prstGeom>
-          <a:noFill/>
-        </p:spPr>
-        <p:txBody>
-          <a:bodyPr wrap="square">
-            <a:spAutoFit/>
-          </a:bodyPr>
-          <a:lstStyle/>
-          <a:p>
-            <a:pPr algn="l">
-              <a:defRPr sz="1400" b="1" i="0">
-                <a:solidFill>
-                  <a:srgbClr val="795548"/>
-                </a:solidFill>
-                <a:latin typeface="Calibri"/>
-              </a:defRPr>
-            </a:pPr>
-            <a:r>
-              <a:t>1</a:t>
-            </a:r>
-          </a:p>
-        </p:txBody>
-      </p:sp>
-      <p:sp>
-        <p:nvSpPr>
-          <p:cNvPr id="9" name="TextBox 8"/>
-          <p:cNvSpPr txBox="1"/>
-          <p:nvPr/>
-        </p:nvSpPr>
-        <p:spPr>
-          <a:xfrm>
-            <a:off x="1097280" y="5760720"/>
-            <a:ext cx="9966960" cy="274320"/>
-          </a:xfrm>
-          <a:prstGeom prst="rect">
-            <a:avLst/>
-          </a:prstGeom>
-          <a:noFill/>
-        </p:spPr>
-        <p:txBody>
-          <a:bodyPr wrap="square">
-            <a:spAutoFit/>
-          </a:bodyPr>
-          <a:lstStyle/>
-          <a:p>
-            <a:pPr algn="l">
-              <a:defRPr sz="1100" b="0" i="0">
-                <a:solidFill>
-                  <a:srgbClr val="5C6270"/>
-                </a:solidFill>
-                <a:latin typeface="Calibri"/>
-              </a:defRPr>
-            </a:pPr>
-            <a:r>
-              <a:t>#general</a:t>
+              <a:defRPr sz="1400" b="0" i="1">
+                <a:solidFill>
+                  <a:srgbClr val="FFB72B"/>
+                </a:solidFill>
+                <a:latin typeface="Calibri"/>
+              </a:defRPr>
+            </a:pPr>
+            <a:r>
+              <a:t>With love, Your Appodeal Team 💜</a:t>
             </a:r>
           </a:p>
         </p:txBody>
@@ -6554,7 +6161,7 @@
             <a:avLst/>
           </a:prstGeom>
           <a:solidFill>
-            <a:srgbClr val="FF6B9D"/>
+            <a:srgbClr val="FFB72B"/>
           </a:solidFill>
           <a:ln>
             <a:noFill/>
@@ -6607,7 +6214,7 @@
             <a:pPr algn="l">
               <a:defRPr sz="1000" b="1">
                 <a:solidFill>
-                  <a:srgbClr val="FF6B9D"/>
+                  <a:srgbClr val="FFB72B"/>
                 </a:solidFill>
                 <a:latin typeface="Calibri"/>
               </a:defRPr>
@@ -6643,13 +6250,13 @@
             <a:pPr algn="l">
               <a:defRPr sz="3200" b="1" i="0">
                 <a:solidFill>
-                  <a:srgbClr val="FF6B9D"/>
-                </a:solidFill>
-                <a:latin typeface="Calibri"/>
-              </a:defRPr>
-            </a:pPr>
-            <a:r>
-              <a:t>Birthday Celebration</a:t>
+                  <a:srgbClr val="FFB72B"/>
+                </a:solidFill>
+                <a:latin typeface="Calibri"/>
+              </a:defRPr>
+            </a:pPr>
+            <a:r>
+              <a:t>Happy Birthday!</a:t>
             </a:r>
           </a:p>
         </p:txBody>
@@ -6685,7 +6292,7 @@
               </a:defRPr>
             </a:pPr>
             <a:r>
-              <a:t>Alexandr Sikorsky</a:t>
+              <a:t>Denis Glavatskikh</a:t>
             </a:r>
           </a:p>
         </p:txBody>
@@ -6721,7 +6328,7 @@
               </a:defRPr>
             </a:pPr>
             <a:r>
-              <a:t>March 11, 2026</a:t>
+              <a:t>March 11</a:t>
             </a:r>
           </a:p>
         </p:txBody>
@@ -6757,7 +6364,7 @@
               </a:defRPr>
             </a:pPr>
             <a:r>
-              <a:t>Thank you for being such an awesome part of our team! Time to pause, grab some cake, and celebrate YOU!</a:t>
+              <a:t>Wishing you an amazing day filled with joy and celebration!</a:t>
             </a:r>
           </a:p>
         </p:txBody>
@@ -6787,13 +6394,13 @@
             <a:pPr algn="l">
               <a:defRPr sz="1400" b="0" i="1">
                 <a:solidFill>
-                  <a:srgbClr val="FF6B9D"/>
-                </a:solidFill>
-                <a:latin typeface="Calibri"/>
-              </a:defRPr>
-            </a:pPr>
-            <a:r>
-              <a:t>Making work brighter with ideas, humor, and dedication</a:t>
+                  <a:srgbClr val="FFB72B"/>
+                </a:solidFill>
+                <a:latin typeface="Calibri"/>
+              </a:defRPr>
+            </a:pPr>
+            <a:r>
+              <a:t>With love, Your Appodeal Team 💜</a:t>
             </a:r>
           </a:p>
         </p:txBody>
@@ -6839,7 +6446,7 @@
             <a:avLst/>
           </a:prstGeom>
           <a:solidFill>
-            <a:srgbClr val="E91E63"/>
+            <a:srgbClr val="FFB72B"/>
           </a:solidFill>
           <a:ln>
             <a:noFill/>
@@ -6892,13 +6499,13 @@
             <a:pPr algn="l">
               <a:defRPr sz="1000" b="1">
                 <a:solidFill>
-                  <a:srgbClr val="E91E63"/>
-                </a:solidFill>
-                <a:latin typeface="Calibri"/>
-              </a:defRPr>
-            </a:pPr>
-            <a:r>
-              <a:t>🎮  MILESTONE</a:t>
+                  <a:srgbClr val="FFB72B"/>
+                </a:solidFill>
+                <a:latin typeface="Calibri"/>
+              </a:defRPr>
+            </a:pPr>
+            <a:r>
+              <a:t>🎂  CELEBRATION</a:t>
             </a:r>
           </a:p>
         </p:txBody>
@@ -6928,13 +6535,13 @@
             <a:pPr algn="l">
               <a:defRPr sz="3200" b="1" i="0">
                 <a:solidFill>
-                  <a:srgbClr val="E91E63"/>
-                </a:solidFill>
-                <a:latin typeface="Calibri"/>
-              </a:defRPr>
-            </a:pPr>
-            <a:r>
-              <a:t>Gaming Milestone</a:t>
+                  <a:srgbClr val="FFB72B"/>
+                </a:solidFill>
+                <a:latin typeface="Calibri"/>
+              </a:defRPr>
+            </a:pPr>
+            <a:r>
+              <a:t>Happy Birthday!</a:t>
             </a:r>
           </a:p>
         </p:txBody>
@@ -6948,29 +6555,29 @@
         <p:spPr>
           <a:xfrm>
             <a:off x="1097280" y="2103120"/>
-            <a:ext cx="4572000" cy="822960"/>
-          </a:xfrm>
-          <a:prstGeom prst="rect">
-            <a:avLst/>
-          </a:prstGeom>
-          <a:noFill/>
-        </p:spPr>
-        <p:txBody>
-          <a:bodyPr wrap="square">
-            <a:spAutoFit/>
-          </a:bodyPr>
-          <a:lstStyle/>
-          <a:p>
-            <a:pPr algn="l">
-              <a:defRPr sz="5200" b="1" i="0">
-                <a:solidFill>
-                  <a:srgbClr val="E91E63"/>
-                </a:solidFill>
-                <a:latin typeface="Calibri"/>
-              </a:defRPr>
-            </a:pPr>
-            <a:r>
-              <a:t>200%+</a:t>
+            <a:ext cx="9966960" cy="640080"/>
+          </a:xfrm>
+          <a:prstGeom prst="rect">
+            <a:avLst/>
+          </a:prstGeom>
+          <a:noFill/>
+        </p:spPr>
+        <p:txBody>
+          <a:bodyPr wrap="square">
+            <a:spAutoFit/>
+          </a:bodyPr>
+          <a:lstStyle/>
+          <a:p>
+            <a:pPr algn="l">
+              <a:defRPr sz="2800" b="1" i="0">
+                <a:solidFill>
+                  <a:srgbClr val="FFFFFF"/>
+                </a:solidFill>
+                <a:latin typeface="Calibri"/>
+              </a:defRPr>
+            </a:pPr>
+            <a:r>
+              <a:t>Iryna Peretiatko</a:t>
             </a:r>
           </a:p>
         </p:txBody>
@@ -6983,22 +6590,22 @@
         </p:nvSpPr>
         <p:spPr>
           <a:xfrm>
-            <a:off x="1097280" y="2926080"/>
-            <a:ext cx="4572000" cy="365760"/>
-          </a:xfrm>
-          <a:prstGeom prst="rect">
-            <a:avLst/>
-          </a:prstGeom>
-          <a:noFill/>
-        </p:spPr>
-        <p:txBody>
-          <a:bodyPr wrap="square">
-            <a:spAutoFit/>
-          </a:bodyPr>
-          <a:lstStyle/>
-          <a:p>
-            <a:pPr algn="l">
-              <a:defRPr sz="1100" b="0" i="0">
+            <a:off x="1097280" y="2743200"/>
+            <a:ext cx="9966960" cy="365760"/>
+          </a:xfrm>
+          <a:prstGeom prst="rect">
+            <a:avLst/>
+          </a:prstGeom>
+          <a:noFill/>
+        </p:spPr>
+        <p:txBody>
+          <a:bodyPr wrap="square">
+            <a:spAutoFit/>
+          </a:bodyPr>
+          <a:lstStyle/>
+          <a:p>
+            <a:pPr algn="l">
+              <a:defRPr sz="1400" b="0" i="0">
                 <a:solidFill>
                   <a:srgbClr val="8F95A3"/>
                 </a:solidFill>
@@ -7006,7 +6613,7 @@
               </a:defRPr>
             </a:pPr>
             <a:r>
-              <a:t>ROAS exceeded</a:t>
+              <a:t>March 11</a:t>
             </a:r>
           </a:p>
         </p:txBody>
@@ -7019,7 +6626,43 @@
         </p:nvSpPr>
         <p:spPr>
           <a:xfrm>
-            <a:off x="1097280" y="3566160"/>
+            <a:off x="1097280" y="3291840"/>
+            <a:ext cx="9966960" cy="914400"/>
+          </a:xfrm>
+          <a:prstGeom prst="rect">
+            <a:avLst/>
+          </a:prstGeom>
+          <a:noFill/>
+        </p:spPr>
+        <p:txBody>
+          <a:bodyPr wrap="square">
+            <a:spAutoFit/>
+          </a:bodyPr>
+          <a:lstStyle/>
+          <a:p>
+            <a:pPr algn="l">
+              <a:defRPr sz="1600" b="0" i="0">
+                <a:solidFill>
+                  <a:srgbClr val="E2E2EA"/>
+                </a:solidFill>
+                <a:latin typeface="Calibri"/>
+              </a:defRPr>
+            </a:pPr>
+            <a:r>
+              <a:t>Wishing you an amazing day filled with joy and celebration!</a:t>
+            </a:r>
+          </a:p>
+        </p:txBody>
+      </p:sp>
+      <p:sp>
+        <p:nvSpPr>
+          <p:cNvPr id="8" name="TextBox 7"/>
+          <p:cNvSpPr txBox="1"/>
+          <p:nvPr/>
+        </p:nvSpPr>
+        <p:spPr>
+          <a:xfrm>
+            <a:off x="1097280" y="4572000"/>
             <a:ext cx="9966960" cy="457200"/>
           </a:xfrm>
           <a:prstGeom prst="rect">
@@ -7034,51 +6677,15 @@
           <a:lstStyle/>
           <a:p>
             <a:pPr algn="l">
-              <a:defRPr sz="1800" b="1" i="0">
-                <a:solidFill>
-                  <a:srgbClr val="FFFFFF"/>
-                </a:solidFill>
-                <a:latin typeface="Calibri"/>
-              </a:defRPr>
-            </a:pPr>
-            <a:r>
-              <a:t>Gaming Division Profitability</a:t>
-            </a:r>
-          </a:p>
-        </p:txBody>
-      </p:sp>
-      <p:sp>
-        <p:nvSpPr>
-          <p:cNvPr id="8" name="TextBox 7"/>
-          <p:cNvSpPr txBox="1"/>
-          <p:nvPr/>
-        </p:nvSpPr>
-        <p:spPr>
-          <a:xfrm>
-            <a:off x="1097280" y="4206240"/>
-            <a:ext cx="9966960" cy="1371600"/>
-          </a:xfrm>
-          <a:prstGeom prst="rect">
-            <a:avLst/>
-          </a:prstGeom>
-          <a:noFill/>
-        </p:spPr>
-        <p:txBody>
-          <a:bodyPr wrap="square">
-            <a:spAutoFit/>
-          </a:bodyPr>
-          <a:lstStyle/>
-          <a:p>
-            <a:pPr algn="l">
-              <a:defRPr sz="1500" b="0" i="0">
-                <a:solidFill>
-                  <a:srgbClr val="E2E2EA"/>
-                </a:solidFill>
-                <a:latin typeface="Calibri"/>
-              </a:defRPr>
-            </a:pPr>
-            <a:r>
-              <a:t>Gaming operations turned profitable in 2025, showing sustainable growth</a:t>
+              <a:defRPr sz="1400" b="0" i="1">
+                <a:solidFill>
+                  <a:srgbClr val="FFB72B"/>
+                </a:solidFill>
+                <a:latin typeface="Calibri"/>
+              </a:defRPr>
+            </a:pPr>
+            <a:r>
+              <a:t>With love, Your Appodeal Team 💜</a:t>
             </a:r>
           </a:p>
         </p:txBody>
@@ -7124,7 +6731,7 @@
             <a:avLst/>
           </a:prstGeom>
           <a:solidFill>
-            <a:srgbClr val="2196F3"/>
+            <a:srgbClr val="FFB72B"/>
           </a:solidFill>
           <a:ln>
             <a:noFill/>
@@ -7177,13 +6784,13 @@
             <a:pPr algn="l">
               <a:defRPr sz="1000" b="1">
                 <a:solidFill>
-                  <a:srgbClr val="2196F3"/>
-                </a:solidFill>
-                <a:latin typeface="Calibri"/>
-              </a:defRPr>
-            </a:pPr>
-            <a:r>
-              <a:t>🚀  WEEKLY RITUAL</a:t>
+                  <a:srgbClr val="FFB72B"/>
+                </a:solidFill>
+                <a:latin typeface="Calibri"/>
+              </a:defRPr>
+            </a:pPr>
+            <a:r>
+              <a:t>🎂  CELEBRATION</a:t>
             </a:r>
           </a:p>
         </p:txBody>
@@ -7213,13 +6820,298 @@
             <a:pPr algn="l">
               <a:defRPr sz="3200" b="1" i="0">
                 <a:solidFill>
-                  <a:srgbClr val="2196F3"/>
-                </a:solidFill>
-                <a:latin typeface="Calibri"/>
-              </a:defRPr>
-            </a:pPr>
-            <a:r>
-              <a:t>Keep Building</a:t>
+                  <a:srgbClr val="FFB72B"/>
+                </a:solidFill>
+                <a:latin typeface="Calibri"/>
+              </a:defRPr>
+            </a:pPr>
+            <a:r>
+              <a:t>Happy Birthday!</a:t>
+            </a:r>
+          </a:p>
+        </p:txBody>
+      </p:sp>
+      <p:sp>
+        <p:nvSpPr>
+          <p:cNvPr id="5" name="TextBox 4"/>
+          <p:cNvSpPr txBox="1"/>
+          <p:nvPr/>
+        </p:nvSpPr>
+        <p:spPr>
+          <a:xfrm>
+            <a:off x="1097280" y="2103120"/>
+            <a:ext cx="9966960" cy="640080"/>
+          </a:xfrm>
+          <a:prstGeom prst="rect">
+            <a:avLst/>
+          </a:prstGeom>
+          <a:noFill/>
+        </p:spPr>
+        <p:txBody>
+          <a:bodyPr wrap="square">
+            <a:spAutoFit/>
+          </a:bodyPr>
+          <a:lstStyle/>
+          <a:p>
+            <a:pPr algn="l">
+              <a:defRPr sz="2800" b="1" i="0">
+                <a:solidFill>
+                  <a:srgbClr val="FFFFFF"/>
+                </a:solidFill>
+                <a:latin typeface="Calibri"/>
+              </a:defRPr>
+            </a:pPr>
+            <a:r>
+              <a:t>Iryna Peretiatko</a:t>
+            </a:r>
+          </a:p>
+        </p:txBody>
+      </p:sp>
+      <p:sp>
+        <p:nvSpPr>
+          <p:cNvPr id="6" name="TextBox 5"/>
+          <p:cNvSpPr txBox="1"/>
+          <p:nvPr/>
+        </p:nvSpPr>
+        <p:spPr>
+          <a:xfrm>
+            <a:off x="1097280" y="2743200"/>
+            <a:ext cx="9966960" cy="365760"/>
+          </a:xfrm>
+          <a:prstGeom prst="rect">
+            <a:avLst/>
+          </a:prstGeom>
+          <a:noFill/>
+        </p:spPr>
+        <p:txBody>
+          <a:bodyPr wrap="square">
+            <a:spAutoFit/>
+          </a:bodyPr>
+          <a:lstStyle/>
+          <a:p>
+            <a:pPr algn="l">
+              <a:defRPr sz="1400" b="0" i="0">
+                <a:solidFill>
+                  <a:srgbClr val="8F95A3"/>
+                </a:solidFill>
+                <a:latin typeface="Calibri"/>
+              </a:defRPr>
+            </a:pPr>
+            <a:r>
+              <a:t>March 11</a:t>
+            </a:r>
+          </a:p>
+        </p:txBody>
+      </p:sp>
+      <p:sp>
+        <p:nvSpPr>
+          <p:cNvPr id="7" name="TextBox 6"/>
+          <p:cNvSpPr txBox="1"/>
+          <p:nvPr/>
+        </p:nvSpPr>
+        <p:spPr>
+          <a:xfrm>
+            <a:off x="1097280" y="3291840"/>
+            <a:ext cx="9966960" cy="914400"/>
+          </a:xfrm>
+          <a:prstGeom prst="rect">
+            <a:avLst/>
+          </a:prstGeom>
+          <a:noFill/>
+        </p:spPr>
+        <p:txBody>
+          <a:bodyPr wrap="square">
+            <a:spAutoFit/>
+          </a:bodyPr>
+          <a:lstStyle/>
+          <a:p>
+            <a:pPr algn="l">
+              <a:defRPr sz="1600" b="0" i="0">
+                <a:solidFill>
+                  <a:srgbClr val="E2E2EA"/>
+                </a:solidFill>
+                <a:latin typeface="Calibri"/>
+              </a:defRPr>
+            </a:pPr>
+            <a:r>
+              <a:t>Wishing you an amazing day filled with joy and celebration!</a:t>
+            </a:r>
+          </a:p>
+        </p:txBody>
+      </p:sp>
+      <p:sp>
+        <p:nvSpPr>
+          <p:cNvPr id="8" name="TextBox 7"/>
+          <p:cNvSpPr txBox="1"/>
+          <p:nvPr/>
+        </p:nvSpPr>
+        <p:spPr>
+          <a:xfrm>
+            <a:off x="1097280" y="4572000"/>
+            <a:ext cx="9966960" cy="457200"/>
+          </a:xfrm>
+          <a:prstGeom prst="rect">
+            <a:avLst/>
+          </a:prstGeom>
+          <a:noFill/>
+        </p:spPr>
+        <p:txBody>
+          <a:bodyPr wrap="square">
+            <a:spAutoFit/>
+          </a:bodyPr>
+          <a:lstStyle/>
+          <a:p>
+            <a:pPr algn="l">
+              <a:defRPr sz="1400" b="0" i="1">
+                <a:solidFill>
+                  <a:srgbClr val="FFB72B"/>
+                </a:solidFill>
+                <a:latin typeface="Calibri"/>
+              </a:defRPr>
+            </a:pPr>
+            <a:r>
+              <a:t>With love, Your Appodeal Team 💜</a:t>
+            </a:r>
+          </a:p>
+        </p:txBody>
+      </p:sp>
+    </p:spTree>
+  </p:cSld>
+  <p:clrMapOvr>
+    <a:masterClrMapping/>
+  </p:clrMapOvr>
+</p:sld>
+</file>
+
+<file path=ppt/slides/slide22.xml><?xml version="1.0" encoding="utf-8"?>
+<p:sld xmlns:a="http://schemas.openxmlformats.org/drawingml/2006/main" xmlns:p="http://schemas.openxmlformats.org/presentationml/2006/main" xmlns:r="http://schemas.openxmlformats.org/officeDocument/2006/relationships">
+  <p:cSld>
+    <p:bg>
+      <p:bgPr>
+        <a:solidFill>
+          <a:srgbClr val="08080C"/>
+        </a:solidFill>
+        <a:effectLst/>
+      </p:bgPr>
+    </p:bg>
+    <p:spTree>
+      <p:nvGrpSpPr>
+        <p:cNvPr id="1" name=""/>
+        <p:cNvGrpSpPr/>
+        <p:nvPr/>
+      </p:nvGrpSpPr>
+      <p:grpSpPr/>
+      <p:sp>
+        <p:nvSpPr>
+          <p:cNvPr id="2" name="Rectangle 1"/>
+          <p:cNvSpPr/>
+          <p:nvPr/>
+        </p:nvSpPr>
+        <p:spPr>
+          <a:xfrm>
+            <a:off x="0" y="365760"/>
+            <a:ext cx="12191695" cy="54864"/>
+          </a:xfrm>
+          <a:prstGeom prst="rect">
+            <a:avLst/>
+          </a:prstGeom>
+          <a:solidFill>
+            <a:srgbClr val="00FFD1"/>
+          </a:solidFill>
+          <a:ln>
+            <a:noFill/>
+          </a:ln>
+        </p:spPr>
+        <p:style>
+          <a:lnRef idx="1">
+            <a:schemeClr val="accent1"/>
+          </a:lnRef>
+          <a:fillRef idx="3">
+            <a:schemeClr val="accent1"/>
+          </a:fillRef>
+          <a:effectRef idx="2">
+            <a:schemeClr val="accent1"/>
+          </a:effectRef>
+          <a:fontRef idx="minor">
+            <a:schemeClr val="lt1"/>
+          </a:fontRef>
+        </p:style>
+        <p:txBody>
+          <a:bodyPr rtlCol="0" anchor="ctr"/>
+          <a:lstStyle/>
+          <a:p>
+            <a:pPr algn="ctr"/>
+          </a:p>
+        </p:txBody>
+      </p:sp>
+      <p:sp>
+        <p:nvSpPr>
+          <p:cNvPr id="3" name="TextBox 2"/>
+          <p:cNvSpPr txBox="1"/>
+          <p:nvPr/>
+        </p:nvSpPr>
+        <p:spPr>
+          <a:xfrm>
+            <a:off x="1097280" y="731520"/>
+            <a:ext cx="3657600" cy="365760"/>
+          </a:xfrm>
+          <a:prstGeom prst="rect">
+            <a:avLst/>
+          </a:prstGeom>
+          <a:noFill/>
+        </p:spPr>
+        <p:txBody>
+          <a:bodyPr wrap="none">
+            <a:spAutoFit/>
+          </a:bodyPr>
+          <a:lstStyle/>
+          <a:p>
+            <a:pPr algn="l">
+              <a:defRPr sz="1000" b="1">
+                <a:solidFill>
+                  <a:srgbClr val="00FFD1"/>
+                </a:solidFill>
+                <a:latin typeface="Calibri"/>
+              </a:defRPr>
+            </a:pPr>
+            <a:r>
+              <a:t>📢  OFFICE LIFE</a:t>
+            </a:r>
+          </a:p>
+        </p:txBody>
+      </p:sp>
+      <p:sp>
+        <p:nvSpPr>
+          <p:cNvPr id="4" name="TextBox 3"/>
+          <p:cNvSpPr txBox="1"/>
+          <p:nvPr/>
+        </p:nvSpPr>
+        <p:spPr>
+          <a:xfrm>
+            <a:off x="1097280" y="1188720"/>
+            <a:ext cx="9966960" cy="731520"/>
+          </a:xfrm>
+          <a:prstGeom prst="rect">
+            <a:avLst/>
+          </a:prstGeom>
+          <a:noFill/>
+        </p:spPr>
+        <p:txBody>
+          <a:bodyPr wrap="square">
+            <a:spAutoFit/>
+          </a:bodyPr>
+          <a:lstStyle/>
+          <a:p>
+            <a:pPr algn="l">
+              <a:defRPr sz="3200" b="1" i="0">
+                <a:solidFill>
+                  <a:srgbClr val="00FFD1"/>
+                </a:solidFill>
+                <a:latin typeface="Calibri"/>
+              </a:defRPr>
+            </a:pPr>
+            <a:r>
+              <a:t>From #general</a:t>
             </a:r>
           </a:p>
         </p:txBody>
@@ -7255,7 +7147,12 @@
               </a:defRPr>
             </a:pPr>
             <a:r>
-              <a:t>What will you ship today?</a:t>
+              <a:t>:wave: Hello everyone &lt;!channel&gt;!</a:t>
+            </a:r>
+            <a:br/>
+            <a:br/>
+            <a:r>
+              <a:t>I’d like to share a cool thing our DevOps tea...</a:t>
             </a:r>
           </a:p>
         </p:txBody>
@@ -7268,8 +7165,57 @@
         </p:nvSpPr>
         <p:spPr>
           <a:xfrm>
-            <a:off x="1371600" y="2926080"/>
-            <a:ext cx="9418320" cy="548640"/>
+            <a:off x="1371600" y="2743200"/>
+            <a:ext cx="9692640" cy="1828800"/>
+          </a:xfrm>
+          <a:prstGeom prst="rect">
+            <a:avLst/>
+          </a:prstGeom>
+          <a:noFill/>
+        </p:spPr>
+        <p:txBody>
+          <a:bodyPr wrap="square">
+            <a:spAutoFit/>
+          </a:bodyPr>
+          <a:lstStyle/>
+          <a:p>
+            <a:pPr algn="l">
+              <a:defRPr sz="1500" b="0" i="1">
+                <a:solidFill>
+                  <a:srgbClr val="E2E2EA"/>
+                </a:solidFill>
+                <a:latin typeface="Calibri"/>
+              </a:defRPr>
+            </a:pPr>
+            <a:r>
+              <a:t>":wave: Hello everyone &lt;!channel&gt;!</a:t>
+            </a:r>
+            <a:br/>
+            <a:br/>
+            <a:r>
+              <a:t>I’d like to share a cool thing our DevOps team has set up for all of us.</a:t>
+            </a:r>
+            <a:br/>
+            <a:r>
+              <a:t>Introducing *&lt;https://coolify.appodeal.com|Coolify&gt;* - a service that allows you to deploy your applications in just a few clicks.</a:t>
+            </a:r>
+            <a:br/>
+            <a:r>
+              <a:t>:memo: I’ve written a short guide on how to use it &lt;https://a"</a:t>
+            </a:r>
+          </a:p>
+        </p:txBody>
+      </p:sp>
+      <p:sp>
+        <p:nvSpPr>
+          <p:cNvPr id="7" name="TextBox 6"/>
+          <p:cNvSpPr txBox="1"/>
+          <p:nvPr/>
+        </p:nvSpPr>
+        <p:spPr>
+          <a:xfrm>
+            <a:off x="1097280" y="4754880"/>
+            <a:ext cx="9966960" cy="365760"/>
           </a:xfrm>
           <a:prstGeom prst="rect">
             <a:avLst/>
@@ -7285,13 +7231,274 @@
             <a:pPr algn="l">
               <a:defRPr sz="1400" b="0" i="0">
                 <a:solidFill>
+                  <a:srgbClr val="8F95A3"/>
+                </a:solidFill>
+                <a:latin typeface="Calibri"/>
+              </a:defRPr>
+            </a:pPr>
+            <a:r>
+              <a:t>— Gleb Krahotkin</a:t>
+            </a:r>
+          </a:p>
+        </p:txBody>
+      </p:sp>
+      <p:sp>
+        <p:nvSpPr>
+          <p:cNvPr id="8" name="TextBox 7"/>
+          <p:cNvSpPr txBox="1"/>
+          <p:nvPr/>
+        </p:nvSpPr>
+        <p:spPr>
+          <a:xfrm>
+            <a:off x="1097280" y="5760720"/>
+            <a:ext cx="9966960" cy="274320"/>
+          </a:xfrm>
+          <a:prstGeom prst="rect">
+            <a:avLst/>
+          </a:prstGeom>
+          <a:noFill/>
+        </p:spPr>
+        <p:txBody>
+          <a:bodyPr wrap="square">
+            <a:spAutoFit/>
+          </a:bodyPr>
+          <a:lstStyle/>
+          <a:p>
+            <a:pPr algn="l">
+              <a:defRPr sz="1100" b="0" i="0">
+                <a:solidFill>
+                  <a:srgbClr val="5C6270"/>
+                </a:solidFill>
+                <a:latin typeface="Calibri"/>
+              </a:defRPr>
+            </a:pPr>
+            <a:r>
+              <a:t>#general</a:t>
+            </a:r>
+          </a:p>
+        </p:txBody>
+      </p:sp>
+    </p:spTree>
+  </p:cSld>
+  <p:clrMapOvr>
+    <a:masterClrMapping/>
+  </p:clrMapOvr>
+</p:sld>
+</file>
+
+<file path=ppt/slides/slide23.xml><?xml version="1.0" encoding="utf-8"?>
+<p:sld xmlns:a="http://schemas.openxmlformats.org/drawingml/2006/main" xmlns:p="http://schemas.openxmlformats.org/presentationml/2006/main" xmlns:r="http://schemas.openxmlformats.org/officeDocument/2006/relationships">
+  <p:cSld>
+    <p:bg>
+      <p:bgPr>
+        <a:solidFill>
+          <a:srgbClr val="08080C"/>
+        </a:solidFill>
+        <a:effectLst/>
+      </p:bgPr>
+    </p:bg>
+    <p:spTree>
+      <p:nvGrpSpPr>
+        <p:cNvPr id="1" name=""/>
+        <p:cNvGrpSpPr/>
+        <p:nvPr/>
+      </p:nvGrpSpPr>
+      <p:grpSpPr/>
+      <p:sp>
+        <p:nvSpPr>
+          <p:cNvPr id="2" name="Rectangle 1"/>
+          <p:cNvSpPr/>
+          <p:nvPr/>
+        </p:nvSpPr>
+        <p:spPr>
+          <a:xfrm>
+            <a:off x="0" y="365760"/>
+            <a:ext cx="12191695" cy="54864"/>
+          </a:xfrm>
+          <a:prstGeom prst="rect">
+            <a:avLst/>
+          </a:prstGeom>
+          <a:solidFill>
+            <a:srgbClr val="00FFD1"/>
+          </a:solidFill>
+          <a:ln>
+            <a:noFill/>
+          </a:ln>
+        </p:spPr>
+        <p:style>
+          <a:lnRef idx="1">
+            <a:schemeClr val="accent1"/>
+          </a:lnRef>
+          <a:fillRef idx="3">
+            <a:schemeClr val="accent1"/>
+          </a:fillRef>
+          <a:effectRef idx="2">
+            <a:schemeClr val="accent1"/>
+          </a:effectRef>
+          <a:fontRef idx="minor">
+            <a:schemeClr val="lt1"/>
+          </a:fontRef>
+        </p:style>
+        <p:txBody>
+          <a:bodyPr rtlCol="0" anchor="ctr"/>
+          <a:lstStyle/>
+          <a:p>
+            <a:pPr algn="ctr"/>
+          </a:p>
+        </p:txBody>
+      </p:sp>
+      <p:sp>
+        <p:nvSpPr>
+          <p:cNvPr id="3" name="TextBox 2"/>
+          <p:cNvSpPr txBox="1"/>
+          <p:nvPr/>
+        </p:nvSpPr>
+        <p:spPr>
+          <a:xfrm>
+            <a:off x="1097280" y="731520"/>
+            <a:ext cx="3657600" cy="365760"/>
+          </a:xfrm>
+          <a:prstGeom prst="rect">
+            <a:avLst/>
+          </a:prstGeom>
+          <a:noFill/>
+        </p:spPr>
+        <p:txBody>
+          <a:bodyPr wrap="none">
+            <a:spAutoFit/>
+          </a:bodyPr>
+          <a:lstStyle/>
+          <a:p>
+            <a:pPr algn="l">
+              <a:defRPr sz="1000" b="1">
+                <a:solidFill>
+                  <a:srgbClr val="00FFD1"/>
+                </a:solidFill>
+                <a:latin typeface="Calibri"/>
+              </a:defRPr>
+            </a:pPr>
+            <a:r>
+              <a:t>📢  OFFICE LIFE</a:t>
+            </a:r>
+          </a:p>
+        </p:txBody>
+      </p:sp>
+      <p:sp>
+        <p:nvSpPr>
+          <p:cNvPr id="4" name="TextBox 3"/>
+          <p:cNvSpPr txBox="1"/>
+          <p:nvPr/>
+        </p:nvSpPr>
+        <p:spPr>
+          <a:xfrm>
+            <a:off x="1097280" y="1188720"/>
+            <a:ext cx="9966960" cy="731520"/>
+          </a:xfrm>
+          <a:prstGeom prst="rect">
+            <a:avLst/>
+          </a:prstGeom>
+          <a:noFill/>
+        </p:spPr>
+        <p:txBody>
+          <a:bodyPr wrap="square">
+            <a:spAutoFit/>
+          </a:bodyPr>
+          <a:lstStyle/>
+          <a:p>
+            <a:pPr algn="l">
+              <a:defRPr sz="3200" b="1" i="0">
+                <a:solidFill>
+                  <a:srgbClr val="00FFD1"/>
+                </a:solidFill>
+                <a:latin typeface="Calibri"/>
+              </a:defRPr>
+            </a:pPr>
+            <a:r>
+              <a:t>From #general</a:t>
+            </a:r>
+          </a:p>
+        </p:txBody>
+      </p:sp>
+      <p:sp>
+        <p:nvSpPr>
+          <p:cNvPr id="5" name="TextBox 4"/>
+          <p:cNvSpPr txBox="1"/>
+          <p:nvPr/>
+        </p:nvSpPr>
+        <p:spPr>
+          <a:xfrm>
+            <a:off x="1097280" y="2103120"/>
+            <a:ext cx="9966960" cy="457200"/>
+          </a:xfrm>
+          <a:prstGeom prst="rect">
+            <a:avLst/>
+          </a:prstGeom>
+          <a:noFill/>
+        </p:spPr>
+        <p:txBody>
+          <a:bodyPr wrap="square">
+            <a:spAutoFit/>
+          </a:bodyPr>
+          <a:lstStyle/>
+          <a:p>
+            <a:pPr algn="l">
+              <a:defRPr sz="1800" b="1" i="0">
+                <a:solidFill>
+                  <a:srgbClr val="FFFFFF"/>
+                </a:solidFill>
+                <a:latin typeface="Calibri"/>
+              </a:defRPr>
+            </a:pPr>
+            <a:r>
+              <a:t>Hi &lt;!here&gt;! :woman-raising-hand: Thank you for joining our *11th Lunch &amp; Learn s...</a:t>
+            </a:r>
+          </a:p>
+        </p:txBody>
+      </p:sp>
+      <p:sp>
+        <p:nvSpPr>
+          <p:cNvPr id="6" name="TextBox 5"/>
+          <p:cNvSpPr txBox="1"/>
+          <p:nvPr/>
+        </p:nvSpPr>
+        <p:spPr>
+          <a:xfrm>
+            <a:off x="1371600" y="2743200"/>
+            <a:ext cx="9692640" cy="1828800"/>
+          </a:xfrm>
+          <a:prstGeom prst="rect">
+            <a:avLst/>
+          </a:prstGeom>
+          <a:noFill/>
+        </p:spPr>
+        <p:txBody>
+          <a:bodyPr wrap="square">
+            <a:spAutoFit/>
+          </a:bodyPr>
+          <a:lstStyle/>
+          <a:p>
+            <a:pPr algn="l">
+              <a:defRPr sz="1500" b="0" i="1">
+                <a:solidFill>
                   <a:srgbClr val="E2E2EA"/>
                 </a:solidFill>
                 <a:latin typeface="Calibri"/>
               </a:defRPr>
             </a:pPr>
             <a:r>
-              <a:t>What's the next feature you're excited to build?</a:t>
+              <a:t>"Hi &lt;!here&gt;! :woman-raising-hand: Thank you for joining our *11th Lunch &amp; Learn session!* :fire:</a:t>
+            </a:r>
+            <a:br/>
+            <a:r>
+              <a:t>A big thank-you to &lt;@U23FJLW5S&gt; for a very interesting presentation :heart:</a:t>
+            </a:r>
+            <a:br/>
+            <a:r>
+              <a:t>Below you can find:</a:t>
+            </a:r>
+            <a:br/>
+            <a:r>
+              <a:t>• :movie_camera: &lt;https://app.fireflies.ai/view/Lunch-and-Learn-How-we-detect-fraud-traffic-by-Timofey-Levan"</a:t>
             </a:r>
           </a:p>
         </p:txBody>
@@ -7304,8 +7511,8 @@
         </p:nvSpPr>
         <p:spPr>
           <a:xfrm>
-            <a:off x="1371600" y="3657600"/>
-            <a:ext cx="9418320" cy="548640"/>
+            <a:off x="1097280" y="4754880"/>
+            <a:ext cx="9966960" cy="365760"/>
           </a:xfrm>
           <a:prstGeom prst="rect">
             <a:avLst/>
@@ -7321,13 +7528,319 @@
             <a:pPr algn="l">
               <a:defRPr sz="1400" b="0" i="0">
                 <a:solidFill>
+                  <a:srgbClr val="8F95A3"/>
+                </a:solidFill>
+                <a:latin typeface="Calibri"/>
+              </a:defRPr>
+            </a:pPr>
+            <a:r>
+              <a:t>— Katarzyna Raniszewska</a:t>
+            </a:r>
+          </a:p>
+        </p:txBody>
+      </p:sp>
+      <p:sp>
+        <p:nvSpPr>
+          <p:cNvPr id="8" name="TextBox 7"/>
+          <p:cNvSpPr txBox="1"/>
+          <p:nvPr/>
+        </p:nvSpPr>
+        <p:spPr>
+          <a:xfrm>
+            <a:off x="1097280" y="5760720"/>
+            <a:ext cx="9966960" cy="274320"/>
+          </a:xfrm>
+          <a:prstGeom prst="rect">
+            <a:avLst/>
+          </a:prstGeom>
+          <a:noFill/>
+        </p:spPr>
+        <p:txBody>
+          <a:bodyPr wrap="square">
+            <a:spAutoFit/>
+          </a:bodyPr>
+          <a:lstStyle/>
+          <a:p>
+            <a:pPr algn="l">
+              <a:defRPr sz="1100" b="0" i="0">
+                <a:solidFill>
+                  <a:srgbClr val="5C6270"/>
+                </a:solidFill>
+                <a:latin typeface="Calibri"/>
+              </a:defRPr>
+            </a:pPr>
+            <a:r>
+              <a:t>#general</a:t>
+            </a:r>
+          </a:p>
+        </p:txBody>
+      </p:sp>
+    </p:spTree>
+  </p:cSld>
+  <p:clrMapOvr>
+    <a:masterClrMapping/>
+  </p:clrMapOvr>
+</p:sld>
+</file>
+
+<file path=ppt/slides/slide24.xml><?xml version="1.0" encoding="utf-8"?>
+<p:sld xmlns:a="http://schemas.openxmlformats.org/drawingml/2006/main" xmlns:p="http://schemas.openxmlformats.org/presentationml/2006/main" xmlns:r="http://schemas.openxmlformats.org/officeDocument/2006/relationships">
+  <p:cSld>
+    <p:bg>
+      <p:bgPr>
+        <a:solidFill>
+          <a:srgbClr val="08080C"/>
+        </a:solidFill>
+        <a:effectLst/>
+      </p:bgPr>
+    </p:bg>
+    <p:spTree>
+      <p:nvGrpSpPr>
+        <p:cNvPr id="1" name=""/>
+        <p:cNvGrpSpPr/>
+        <p:nvPr/>
+      </p:nvGrpSpPr>
+      <p:grpSpPr/>
+      <p:sp>
+        <p:nvSpPr>
+          <p:cNvPr id="2" name="Rectangle 1"/>
+          <p:cNvSpPr/>
+          <p:nvPr/>
+        </p:nvSpPr>
+        <p:spPr>
+          <a:xfrm>
+            <a:off x="0" y="365760"/>
+            <a:ext cx="12191695" cy="54864"/>
+          </a:xfrm>
+          <a:prstGeom prst="rect">
+            <a:avLst/>
+          </a:prstGeom>
+          <a:solidFill>
+            <a:srgbClr val="00FFD1"/>
+          </a:solidFill>
+          <a:ln>
+            <a:noFill/>
+          </a:ln>
+        </p:spPr>
+        <p:style>
+          <a:lnRef idx="1">
+            <a:schemeClr val="accent1"/>
+          </a:lnRef>
+          <a:fillRef idx="3">
+            <a:schemeClr val="accent1"/>
+          </a:fillRef>
+          <a:effectRef idx="2">
+            <a:schemeClr val="accent1"/>
+          </a:effectRef>
+          <a:fontRef idx="minor">
+            <a:schemeClr val="lt1"/>
+          </a:fontRef>
+        </p:style>
+        <p:txBody>
+          <a:bodyPr rtlCol="0" anchor="ctr"/>
+          <a:lstStyle/>
+          <a:p>
+            <a:pPr algn="ctr"/>
+          </a:p>
+        </p:txBody>
+      </p:sp>
+      <p:sp>
+        <p:nvSpPr>
+          <p:cNvPr id="3" name="TextBox 2"/>
+          <p:cNvSpPr txBox="1"/>
+          <p:nvPr/>
+        </p:nvSpPr>
+        <p:spPr>
+          <a:xfrm>
+            <a:off x="1097280" y="731520"/>
+            <a:ext cx="3657600" cy="365760"/>
+          </a:xfrm>
+          <a:prstGeom prst="rect">
+            <a:avLst/>
+          </a:prstGeom>
+          <a:noFill/>
+        </p:spPr>
+        <p:txBody>
+          <a:bodyPr wrap="none">
+            <a:spAutoFit/>
+          </a:bodyPr>
+          <a:lstStyle/>
+          <a:p>
+            <a:pPr algn="l">
+              <a:defRPr sz="1000" b="1">
+                <a:solidFill>
+                  <a:srgbClr val="00FFD1"/>
+                </a:solidFill>
+                <a:latin typeface="Calibri"/>
+              </a:defRPr>
+            </a:pPr>
+            <a:r>
+              <a:t>📢  OFFICE LIFE</a:t>
+            </a:r>
+          </a:p>
+        </p:txBody>
+      </p:sp>
+      <p:sp>
+        <p:nvSpPr>
+          <p:cNvPr id="4" name="TextBox 3"/>
+          <p:cNvSpPr txBox="1"/>
+          <p:nvPr/>
+        </p:nvSpPr>
+        <p:spPr>
+          <a:xfrm>
+            <a:off x="1097280" y="1188720"/>
+            <a:ext cx="9966960" cy="731520"/>
+          </a:xfrm>
+          <a:prstGeom prst="rect">
+            <a:avLst/>
+          </a:prstGeom>
+          <a:noFill/>
+        </p:spPr>
+        <p:txBody>
+          <a:bodyPr wrap="square">
+            <a:spAutoFit/>
+          </a:bodyPr>
+          <a:lstStyle/>
+          <a:p>
+            <a:pPr algn="l">
+              <a:defRPr sz="3200" b="1" i="0">
+                <a:solidFill>
+                  <a:srgbClr val="00FFD1"/>
+                </a:solidFill>
+                <a:latin typeface="Calibri"/>
+              </a:defRPr>
+            </a:pPr>
+            <a:r>
+              <a:t>From #general</a:t>
+            </a:r>
+          </a:p>
+        </p:txBody>
+      </p:sp>
+      <p:sp>
+        <p:nvSpPr>
+          <p:cNvPr id="5" name="TextBox 4"/>
+          <p:cNvSpPr txBox="1"/>
+          <p:nvPr/>
+        </p:nvSpPr>
+        <p:spPr>
+          <a:xfrm>
+            <a:off x="1097280" y="2103120"/>
+            <a:ext cx="9966960" cy="457200"/>
+          </a:xfrm>
+          <a:prstGeom prst="rect">
+            <a:avLst/>
+          </a:prstGeom>
+          <a:noFill/>
+        </p:spPr>
+        <p:txBody>
+          <a:bodyPr wrap="square">
+            <a:spAutoFit/>
+          </a:bodyPr>
+          <a:lstStyle/>
+          <a:p>
+            <a:pPr algn="l">
+              <a:defRPr sz="1800" b="1" i="0">
+                <a:solidFill>
+                  <a:srgbClr val="FFFFFF"/>
+                </a:solidFill>
+                <a:latin typeface="Calibri"/>
+              </a:defRPr>
+            </a:pPr>
+            <a:r>
+              <a:t>&lt;!channel&gt; Team,</a:t>
+            </a:r>
+            <a:br/>
+            <a:r>
+              <a:t>Anna is &lt;https://appodeal.slack.com/archives/C08RDS0MU2F/p17730...</a:t>
+            </a:r>
+          </a:p>
+        </p:txBody>
+      </p:sp>
+      <p:sp>
+        <p:nvSpPr>
+          <p:cNvPr id="6" name="TextBox 5"/>
+          <p:cNvSpPr txBox="1"/>
+          <p:nvPr/>
+        </p:nvSpPr>
+        <p:spPr>
+          <a:xfrm>
+            <a:off x="1371600" y="2743200"/>
+            <a:ext cx="9692640" cy="1828800"/>
+          </a:xfrm>
+          <a:prstGeom prst="rect">
+            <a:avLst/>
+          </a:prstGeom>
+          <a:noFill/>
+        </p:spPr>
+        <p:txBody>
+          <a:bodyPr wrap="square">
+            <a:spAutoFit/>
+          </a:bodyPr>
+          <a:lstStyle/>
+          <a:p>
+            <a:pPr algn="l">
+              <a:defRPr sz="1500" b="0" i="1">
+                <a:solidFill>
                   <a:srgbClr val="E2E2EA"/>
                 </a:solidFill>
                 <a:latin typeface="Calibri"/>
               </a:defRPr>
             </a:pPr>
             <a:r>
-              <a:t>How can we improve our user experience?</a:t>
+              <a:t>"&lt;!channel&gt; Team,</a:t>
+            </a:r>
+            <a:br/>
+            <a:r>
+              <a:t>Anna is &lt;https://appodeal.slack.com/archives/C08RDS0MU2F/p1773043372580949|starting&gt; a reading club around the book _The 4 Disciplines of Execution_, and I encourage everyone to join.</a:t>
+            </a:r>
+            <a:br/>
+            <a:br/>
+            <a:r>
+              <a:t>The book focuses on four core concepts:</a:t>
+            </a:r>
+            <a:br/>
+            <a:r>
+              <a:t>• *Wildly Important Goals (WIGs)*</a:t>
+            </a:r>
+            <a:br/>
+            <a:r>
+              <a:t>• *Leading and Lagging M"</a:t>
+            </a:r>
+          </a:p>
+        </p:txBody>
+      </p:sp>
+      <p:sp>
+        <p:nvSpPr>
+          <p:cNvPr id="7" name="TextBox 6"/>
+          <p:cNvSpPr txBox="1"/>
+          <p:nvPr/>
+        </p:nvSpPr>
+        <p:spPr>
+          <a:xfrm>
+            <a:off x="1097280" y="4754880"/>
+            <a:ext cx="9966960" cy="365760"/>
+          </a:xfrm>
+          <a:prstGeom prst="rect">
+            <a:avLst/>
+          </a:prstGeom>
+          <a:noFill/>
+        </p:spPr>
+        <p:txBody>
+          <a:bodyPr wrap="square">
+            <a:spAutoFit/>
+          </a:bodyPr>
+          <a:lstStyle/>
+          <a:p>
+            <a:pPr algn="l">
+              <a:defRPr sz="1400" b="0" i="0">
+                <a:solidFill>
+                  <a:srgbClr val="8F95A3"/>
+                </a:solidFill>
+                <a:latin typeface="Calibri"/>
+              </a:defRPr>
+            </a:pPr>
+            <a:r>
+              <a:t>— Pavel Golubev</a:t>
             </a:r>
           </a:p>
         </p:txBody>
@@ -7335,42 +7848,6 @@
       <p:sp>
         <p:nvSpPr>
           <p:cNvPr id="8" name="TextBox 7"/>
-          <p:cNvSpPr txBox="1"/>
-          <p:nvPr/>
-        </p:nvSpPr>
-        <p:spPr>
-          <a:xfrm>
-            <a:off x="1097280" y="4754880"/>
-            <a:ext cx="9966960" cy="731520"/>
-          </a:xfrm>
-          <a:prstGeom prst="rect">
-            <a:avLst/>
-          </a:prstGeom>
-          <a:noFill/>
-        </p:spPr>
-        <p:txBody>
-          <a:bodyPr wrap="square">
-            <a:spAutoFit/>
-          </a:bodyPr>
-          <a:lstStyle/>
-          <a:p>
-            <a:pPr algn="l">
-              <a:defRPr sz="1500" b="0" i="1">
-                <a:solidFill>
-                  <a:srgbClr val="E2E2EA"/>
-                </a:solidFill>
-                <a:latin typeface="Calibri"/>
-              </a:defRPr>
-            </a:pPr>
-            <a:r>
-              <a:t>We BUILD solutions that SERVE OTHERS</a:t>
-            </a:r>
-          </a:p>
-        </p:txBody>
-      </p:sp>
-      <p:sp>
-        <p:nvSpPr>
-          <p:cNvPr id="9" name="TextBox 8"/>
           <p:cNvSpPr txBox="1"/>
           <p:nvPr/>
         </p:nvSpPr>
@@ -7445,7 +7922,7 @@
             <a:avLst/>
           </a:prstGeom>
           <a:solidFill>
-            <a:srgbClr val="4CAF50"/>
+            <a:srgbClr val="FFB72B"/>
           </a:solidFill>
           <a:ln>
             <a:noFill/>
@@ -7498,13 +7975,13 @@
             <a:pPr algn="l">
               <a:defRPr sz="1000" b="1">
                 <a:solidFill>
-                  <a:srgbClr val="4CAF50"/>
-                </a:solidFill>
-                <a:latin typeface="Calibri"/>
-              </a:defRPr>
-            </a:pPr>
-            <a:r>
-              <a:t>🚀  WIN</a:t>
+                  <a:srgbClr val="FFB72B"/>
+                </a:solidFill>
+                <a:latin typeface="Calibri"/>
+              </a:defRPr>
+            </a:pPr>
+            <a:r>
+              <a:t>🎂  CELEBRATION</a:t>
             </a:r>
           </a:p>
         </p:txBody>
@@ -7534,13 +8011,13 @@
             <a:pPr algn="l">
               <a:defRPr sz="3200" b="1" i="0">
                 <a:solidFill>
-                  <a:srgbClr val="4CAF50"/>
-                </a:solidFill>
-                <a:latin typeface="Calibri"/>
-              </a:defRPr>
-            </a:pPr>
-            <a:r>
-              <a:t>DevOps Innovation</a:t>
+                  <a:srgbClr val="FFB72B"/>
+                </a:solidFill>
+                <a:latin typeface="Calibri"/>
+              </a:defRPr>
+            </a:pPr>
+            <a:r>
+              <a:t>Happy Birthday!</a:t>
             </a:r>
           </a:p>
         </p:txBody>
@@ -7554,29 +8031,29 @@
         <p:spPr>
           <a:xfrm>
             <a:off x="1097280" y="2103120"/>
-            <a:ext cx="4572000" cy="822960"/>
-          </a:xfrm>
-          <a:prstGeom prst="rect">
-            <a:avLst/>
-          </a:prstGeom>
-          <a:noFill/>
-        </p:spPr>
-        <p:txBody>
-          <a:bodyPr wrap="square">
-            <a:spAutoFit/>
-          </a:bodyPr>
-          <a:lstStyle/>
-          <a:p>
-            <a:pPr algn="l">
-              <a:defRPr sz="4800" b="1" i="0">
-                <a:solidFill>
-                  <a:srgbClr val="4CAF50"/>
-                </a:solidFill>
-                <a:latin typeface="Calibri"/>
-              </a:defRPr>
-            </a:pPr>
-            <a:r>
-              <a:t>98</a:t>
+            <a:ext cx="9966960" cy="640080"/>
+          </a:xfrm>
+          <a:prstGeom prst="rect">
+            <a:avLst/>
+          </a:prstGeom>
+          <a:noFill/>
+        </p:spPr>
+        <p:txBody>
+          <a:bodyPr wrap="square">
+            <a:spAutoFit/>
+          </a:bodyPr>
+          <a:lstStyle/>
+          <a:p>
+            <a:pPr algn="l">
+              <a:defRPr sz="2800" b="1" i="0">
+                <a:solidFill>
+                  <a:srgbClr val="FFFFFF"/>
+                </a:solidFill>
+                <a:latin typeface="Calibri"/>
+              </a:defRPr>
+            </a:pPr>
+            <a:r>
+              <a:t>Liliya Garifullina</a:t>
             </a:r>
           </a:p>
         </p:txBody>
@@ -7589,22 +8066,22 @@
         </p:nvSpPr>
         <p:spPr>
           <a:xfrm>
-            <a:off x="1097280" y="2834640"/>
-            <a:ext cx="4572000" cy="365760"/>
-          </a:xfrm>
-          <a:prstGeom prst="rect">
-            <a:avLst/>
-          </a:prstGeom>
-          <a:noFill/>
-        </p:spPr>
-        <p:txBody>
-          <a:bodyPr wrap="square">
-            <a:spAutoFit/>
-          </a:bodyPr>
-          <a:lstStyle/>
-          <a:p>
-            <a:pPr algn="l">
-              <a:defRPr sz="1200" b="0" i="0">
+            <a:off x="1097280" y="2743200"/>
+            <a:ext cx="9966960" cy="365760"/>
+          </a:xfrm>
+          <a:prstGeom prst="rect">
+            <a:avLst/>
+          </a:prstGeom>
+          <a:noFill/>
+        </p:spPr>
+        <p:txBody>
+          <a:bodyPr wrap="square">
+            <a:spAutoFit/>
+          </a:bodyPr>
+          <a:lstStyle/>
+          <a:p>
+            <a:pPr algn="l">
+              <a:defRPr sz="1400" b="0" i="0">
                 <a:solidFill>
                   <a:srgbClr val="8F95A3"/>
                 </a:solidFill>
@@ -7612,7 +8089,7 @@
               </a:defRPr>
             </a:pPr>
             <a:r>
-              <a:t>reactions</a:t>
+              <a:t>March 11</a:t>
             </a:r>
           </a:p>
         </p:txBody>
@@ -7626,21 +8103,21 @@
         <p:spPr>
           <a:xfrm>
             <a:off x="1097280" y="3291840"/>
-            <a:ext cx="9966960" cy="365760"/>
-          </a:xfrm>
-          <a:prstGeom prst="rect">
-            <a:avLst/>
-          </a:prstGeom>
-          <a:noFill/>
-        </p:spPr>
-        <p:txBody>
-          <a:bodyPr wrap="square">
-            <a:spAutoFit/>
-          </a:bodyPr>
-          <a:lstStyle/>
-          <a:p>
-            <a:pPr algn="l">
-              <a:defRPr sz="1400" b="0" i="0">
+            <a:ext cx="9966960" cy="914400"/>
+          </a:xfrm>
+          <a:prstGeom prst="rect">
+            <a:avLst/>
+          </a:prstGeom>
+          <a:noFill/>
+        </p:spPr>
+        <p:txBody>
+          <a:bodyPr wrap="square">
+            <a:spAutoFit/>
+          </a:bodyPr>
+          <a:lstStyle/>
+          <a:p>
+            <a:pPr algn="l">
+              <a:defRPr sz="1600" b="0" i="0">
                 <a:solidFill>
                   <a:srgbClr val="E2E2EA"/>
                 </a:solidFill>
@@ -7648,7 +8125,7 @@
               </a:defRPr>
             </a:pPr>
             <a:r>
-              <a:t>by Gleb Krahotkin &amp; DevOps Team</a:t>
+              <a:t>Wishing you an amazing day filled with joy and celebration!</a:t>
             </a:r>
           </a:p>
         </p:txBody>
@@ -7661,7 +8138,7 @@
         </p:nvSpPr>
         <p:spPr>
           <a:xfrm>
-            <a:off x="1097280" y="3840480"/>
+            <a:off x="1097280" y="4572000"/>
             <a:ext cx="9966960" cy="457200"/>
           </a:xfrm>
           <a:prstGeom prst="rect">
@@ -7676,87 +8153,15 @@
           <a:lstStyle/>
           <a:p>
             <a:pPr algn="l">
-              <a:defRPr sz="1800" b="1" i="0">
-                <a:solidFill>
-                  <a:srgbClr val="FFFFFF"/>
-                </a:solidFill>
-                <a:latin typeface="Calibri"/>
-              </a:defRPr>
-            </a:pPr>
-            <a:r>
-              <a:t>Coolify Platform Launch Success!</a:t>
-            </a:r>
-          </a:p>
-        </p:txBody>
-      </p:sp>
-      <p:sp>
-        <p:nvSpPr>
-          <p:cNvPr id="9" name="TextBox 8"/>
-          <p:cNvSpPr txBox="1"/>
-          <p:nvPr/>
-        </p:nvSpPr>
-        <p:spPr>
-          <a:xfrm>
-            <a:off x="1097280" y="4389120"/>
-            <a:ext cx="9966960" cy="914400"/>
-          </a:xfrm>
-          <a:prstGeom prst="rect">
-            <a:avLst/>
-          </a:prstGeom>
-          <a:noFill/>
-        </p:spPr>
-        <p:txBody>
-          <a:bodyPr wrap="square">
-            <a:spAutoFit/>
-          </a:bodyPr>
-          <a:lstStyle/>
-          <a:p>
-            <a:pPr algn="l">
-              <a:defRPr sz="1400" b="0" i="0">
-                <a:solidFill>
-                  <a:srgbClr val="E2E2EA"/>
-                </a:solidFill>
-                <a:latin typeface="Calibri"/>
-              </a:defRPr>
-            </a:pPr>
-            <a:r>
-              <a:t>New deployment service allows applications to be deployed in just a few clicks</a:t>
-            </a:r>
-          </a:p>
-        </p:txBody>
-      </p:sp>
-      <p:sp>
-        <p:nvSpPr>
-          <p:cNvPr id="10" name="TextBox 9"/>
-          <p:cNvSpPr txBox="1"/>
-          <p:nvPr/>
-        </p:nvSpPr>
-        <p:spPr>
-          <a:xfrm>
-            <a:off x="1097280" y="5486400"/>
-            <a:ext cx="9966960" cy="457200"/>
-          </a:xfrm>
-          <a:prstGeom prst="rect">
-            <a:avLst/>
-          </a:prstGeom>
-          <a:noFill/>
-        </p:spPr>
-        <p:txBody>
-          <a:bodyPr wrap="square">
-            <a:spAutoFit/>
-          </a:bodyPr>
-          <a:lstStyle/>
-          <a:p>
-            <a:pPr algn="l">
-              <a:defRPr sz="1300" b="0" i="1">
-                <a:solidFill>
-                  <a:srgbClr val="8F95A3"/>
-                </a:solidFill>
-                <a:latin typeface="Calibri"/>
-              </a:defRPr>
-            </a:pPr>
-            <a:r>
-              <a:t>💬 "Making development faster and more accessible for everyone"</a:t>
+              <a:defRPr sz="1400" b="0" i="1">
+                <a:solidFill>
+                  <a:srgbClr val="FFB72B"/>
+                </a:solidFill>
+                <a:latin typeface="Calibri"/>
+              </a:defRPr>
+            </a:pPr>
+            <a:r>
+              <a:t>With love, Your Appodeal Team 💜</a:t>
             </a:r>
           </a:p>
         </p:txBody>
@@ -7802,7 +8207,7 @@
             <a:avLst/>
           </a:prstGeom>
           <a:solidFill>
-            <a:srgbClr val="FFB74D"/>
+            <a:srgbClr val="FFB72B"/>
           </a:solidFill>
           <a:ln>
             <a:noFill/>
@@ -7855,13 +8260,13 @@
             <a:pPr algn="l">
               <a:defRPr sz="1000" b="1">
                 <a:solidFill>
-                  <a:srgbClr val="FFB74D"/>
-                </a:solidFill>
-                <a:latin typeface="Calibri"/>
-              </a:defRPr>
-            </a:pPr>
-            <a:r>
-              <a:t>👏  CLAPS</a:t>
+                  <a:srgbClr val="FFB72B"/>
+                </a:solidFill>
+                <a:latin typeface="Calibri"/>
+              </a:defRPr>
+            </a:pPr>
+            <a:r>
+              <a:t>🎂  CELEBRATION</a:t>
             </a:r>
           </a:p>
         </p:txBody>
@@ -7891,13 +8296,13 @@
             <a:pPr algn="l">
               <a:defRPr sz="3200" b="1" i="0">
                 <a:solidFill>
-                  <a:srgbClr val="FFB74D"/>
-                </a:solidFill>
-                <a:latin typeface="Calibri"/>
-              </a:defRPr>
-            </a:pPr>
-            <a:r>
-              <a:t>Outstanding Recognition</a:t>
+                  <a:srgbClr val="FFB72B"/>
+                </a:solidFill>
+                <a:latin typeface="Calibri"/>
+              </a:defRPr>
+            </a:pPr>
+            <a:r>
+              <a:t>Happy Birthday!</a:t>
             </a:r>
           </a:p>
         </p:txBody>
@@ -7911,7 +8316,7 @@
         <p:spPr>
           <a:xfrm>
             <a:off x="1097280" y="2103120"/>
-            <a:ext cx="2743200" cy="548640"/>
+            <a:ext cx="9966960" cy="640080"/>
           </a:xfrm>
           <a:prstGeom prst="rect">
             <a:avLst/>
@@ -7927,13 +8332,13 @@
             <a:pPr algn="l">
               <a:defRPr sz="2800" b="1" i="0">
                 <a:solidFill>
-                  <a:srgbClr val="FFB74D"/>
-                </a:solidFill>
-                <a:latin typeface="Calibri"/>
-              </a:defRPr>
-            </a:pPr>
-            <a:r>
-              <a:t>50</a:t>
+                  <a:srgbClr val="FFFFFF"/>
+                </a:solidFill>
+                <a:latin typeface="Calibri"/>
+              </a:defRPr>
+            </a:pPr>
+            <a:r>
+              <a:t>Roman de las Heras</a:t>
             </a:r>
           </a:p>
         </p:txBody>
@@ -7946,7 +8351,7 @@
         </p:nvSpPr>
         <p:spPr>
           <a:xfrm>
-            <a:off x="1097280" y="2651760"/>
+            <a:off x="1097280" y="2743200"/>
             <a:ext cx="9966960" cy="365760"/>
           </a:xfrm>
           <a:prstGeom prst="rect">
@@ -7963,49 +8368,49 @@
             <a:pPr algn="l">
               <a:defRPr sz="1400" b="0" i="0">
                 <a:solidFill>
+                  <a:srgbClr val="8F95A3"/>
+                </a:solidFill>
+                <a:latin typeface="Calibri"/>
+              </a:defRPr>
+            </a:pPr>
+            <a:r>
+              <a:t>March 11</a:t>
+            </a:r>
+          </a:p>
+        </p:txBody>
+      </p:sp>
+      <p:sp>
+        <p:nvSpPr>
+          <p:cNvPr id="7" name="TextBox 6"/>
+          <p:cNvSpPr txBox="1"/>
+          <p:nvPr/>
+        </p:nvSpPr>
+        <p:spPr>
+          <a:xfrm>
+            <a:off x="1097280" y="3291840"/>
+            <a:ext cx="9966960" cy="914400"/>
+          </a:xfrm>
+          <a:prstGeom prst="rect">
+            <a:avLst/>
+          </a:prstGeom>
+          <a:noFill/>
+        </p:spPr>
+        <p:txBody>
+          <a:bodyPr wrap="square">
+            <a:spAutoFit/>
+          </a:bodyPr>
+          <a:lstStyle/>
+          <a:p>
+            <a:pPr algn="l">
+              <a:defRPr sz="1600" b="0" i="0">
+                <a:solidFill>
                   <a:srgbClr val="E2E2EA"/>
                 </a:solidFill>
                 <a:latin typeface="Calibri"/>
               </a:defRPr>
             </a:pPr>
             <a:r>
-              <a:t>from pavel.savinskiy</a:t>
-            </a:r>
-          </a:p>
-        </p:txBody>
-      </p:sp>
-      <p:sp>
-        <p:nvSpPr>
-          <p:cNvPr id="7" name="TextBox 6"/>
-          <p:cNvSpPr txBox="1"/>
-          <p:nvPr/>
-        </p:nvSpPr>
-        <p:spPr>
-          <a:xfrm>
-            <a:off x="1097280" y="3108960"/>
-            <a:ext cx="9966960" cy="365760"/>
-          </a:xfrm>
-          <a:prstGeom prst="rect">
-            <a:avLst/>
-          </a:prstGeom>
-          <a:noFill/>
-        </p:spPr>
-        <p:txBody>
-          <a:bodyPr wrap="square">
-            <a:spAutoFit/>
-          </a:bodyPr>
-          <a:lstStyle/>
-          <a:p>
-            <a:pPr algn="l">
-              <a:defRPr sz="1400" b="1" i="0">
-                <a:solidFill>
-                  <a:srgbClr val="FFFFFF"/>
-                </a:solidFill>
-                <a:latin typeface="Calibri"/>
-              </a:defRPr>
-            </a:pPr>
-            <a:r>
-              <a:t>to: sergeydesigner</a:t>
+              <a:t>Wishing you an amazing day filled with joy and celebration!</a:t>
             </a:r>
           </a:p>
         </p:txBody>
@@ -8018,43 +8423,7 @@
         </p:nvSpPr>
         <p:spPr>
           <a:xfrm>
-            <a:off x="1097280" y="3749039"/>
-            <a:ext cx="9966960" cy="1097280"/>
-          </a:xfrm>
-          <a:prstGeom prst="rect">
-            <a:avLst/>
-          </a:prstGeom>
-          <a:noFill/>
-        </p:spPr>
-        <p:txBody>
-          <a:bodyPr wrap="square">
-            <a:spAutoFit/>
-          </a:bodyPr>
-          <a:lstStyle/>
-          <a:p>
-            <a:pPr algn="l">
-              <a:defRPr sz="1500" b="0" i="1">
-                <a:solidFill>
-                  <a:srgbClr val="E2E2EA"/>
-                </a:solidFill>
-                <a:latin typeface="Calibri"/>
-              </a:defRPr>
-            </a:pPr>
-            <a:r>
-              <a:t>"Exceptional design work and creativity"</a:t>
-            </a:r>
-          </a:p>
-        </p:txBody>
-      </p:sp>
-      <p:sp>
-        <p:nvSpPr>
-          <p:cNvPr id="9" name="TextBox 8"/>
-          <p:cNvSpPr txBox="1"/>
-          <p:nvPr/>
-        </p:nvSpPr>
-        <p:spPr>
-          <a:xfrm>
-            <a:off x="1097280" y="5120640"/>
+            <a:off x="1097280" y="4572000"/>
             <a:ext cx="9966960" cy="457200"/>
           </a:xfrm>
           <a:prstGeom prst="rect">
@@ -8069,15 +8438,15 @@
           <a:lstStyle/>
           <a:p>
             <a:pPr algn="l">
-              <a:defRPr sz="1200" b="1" i="0">
-                <a:solidFill>
-                  <a:srgbClr val="FFB74D"/>
-                </a:solidFill>
-                <a:latin typeface="Calibri"/>
-              </a:defRPr>
-            </a:pPr>
-            <a:r>
-              <a:t>EXCELLENCE · CREATIVITY</a:t>
+              <a:defRPr sz="1400" b="0" i="1">
+                <a:solidFill>
+                  <a:srgbClr val="FFB72B"/>
+                </a:solidFill>
+                <a:latin typeface="Calibri"/>
+              </a:defRPr>
+            </a:pPr>
+            <a:r>
+              <a:t>With love, Your Appodeal Team 💜</a:t>
             </a:r>
           </a:p>
         </p:txBody>
@@ -8123,7 +8492,7 @@
             <a:avLst/>
           </a:prstGeom>
           <a:solidFill>
-            <a:srgbClr val="9C27B0"/>
+            <a:srgbClr val="FFB72B"/>
           </a:solidFill>
           <a:ln>
             <a:noFill/>
@@ -8176,13 +8545,13 @@
             <a:pPr algn="l">
               <a:defRPr sz="1000" b="1">
                 <a:solidFill>
-                  <a:srgbClr val="9C27B0"/>
-                </a:solidFill>
-                <a:latin typeface="Calibri"/>
-              </a:defRPr>
-            </a:pPr>
-            <a:r>
-              <a:t>🎓  EVENT</a:t>
+                  <a:srgbClr val="FFB72B"/>
+                </a:solidFill>
+                <a:latin typeface="Calibri"/>
+              </a:defRPr>
+            </a:pPr>
+            <a:r>
+              <a:t>🎂  CELEBRATION</a:t>
             </a:r>
           </a:p>
         </p:txBody>
@@ -8212,13 +8581,13 @@
             <a:pPr algn="l">
               <a:defRPr sz="3200" b="1" i="0">
                 <a:solidFill>
-                  <a:srgbClr val="9C27B0"/>
-                </a:solidFill>
-                <a:latin typeface="Calibri"/>
-              </a:defRPr>
-            </a:pPr>
-            <a:r>
-              <a:t>Learning &amp; Growth</a:t>
+                  <a:srgbClr val="FFB72B"/>
+                </a:solidFill>
+                <a:latin typeface="Calibri"/>
+              </a:defRPr>
+            </a:pPr>
+            <a:r>
+              <a:t>Happy Birthday!</a:t>
             </a:r>
           </a:p>
         </p:txBody>
@@ -8232,21 +8601,21 @@
         <p:spPr>
           <a:xfrm>
             <a:off x="1097280" y="2103120"/>
-            <a:ext cx="9966960" cy="548640"/>
-          </a:xfrm>
-          <a:prstGeom prst="rect">
-            <a:avLst/>
-          </a:prstGeom>
-          <a:noFill/>
-        </p:spPr>
-        <p:txBody>
-          <a:bodyPr wrap="square">
-            <a:spAutoFit/>
-          </a:bodyPr>
-          <a:lstStyle/>
-          <a:p>
-            <a:pPr algn="l">
-              <a:defRPr sz="2200" b="1" i="0">
+            <a:ext cx="9966960" cy="640080"/>
+          </a:xfrm>
+          <a:prstGeom prst="rect">
+            <a:avLst/>
+          </a:prstGeom>
+          <a:noFill/>
+        </p:spPr>
+        <p:txBody>
+          <a:bodyPr wrap="square">
+            <a:spAutoFit/>
+          </a:bodyPr>
+          <a:lstStyle/>
+          <a:p>
+            <a:pPr algn="l">
+              <a:defRPr sz="2800" b="1" i="0">
                 <a:solidFill>
                   <a:srgbClr val="FFFFFF"/>
                 </a:solidFill>
@@ -8254,7 +8623,7 @@
               </a:defRPr>
             </a:pPr>
             <a:r>
-              <a:t>11th Lunch &amp; Learn Session</a:t>
+              <a:t>Olga Petriakova</a:t>
             </a:r>
           </a:p>
         </p:txBody>
@@ -8282,15 +8651,15 @@
           <a:lstStyle/>
           <a:p>
             <a:pPr algn="l">
-              <a:defRPr sz="1400" b="1" i="0">
-                <a:solidFill>
-                  <a:srgbClr val="9C27B0"/>
-                </a:solidFill>
-                <a:latin typeface="Calibri"/>
-              </a:defRPr>
-            </a:pPr>
-            <a:r>
-              <a:t>Recently completed</a:t>
+              <a:defRPr sz="1400" b="0" i="0">
+                <a:solidFill>
+                  <a:srgbClr val="8F95A3"/>
+                </a:solidFill>
+                <a:latin typeface="Calibri"/>
+              </a:defRPr>
+            </a:pPr>
+            <a:r>
+              <a:t>March 11</a:t>
             </a:r>
           </a:p>
         </p:txBody>
@@ -8304,21 +8673,21 @@
         <p:spPr>
           <a:xfrm>
             <a:off x="1097280" y="3291840"/>
-            <a:ext cx="9966960" cy="1371600"/>
-          </a:xfrm>
-          <a:prstGeom prst="rect">
-            <a:avLst/>
-          </a:prstGeom>
-          <a:noFill/>
-        </p:spPr>
-        <p:txBody>
-          <a:bodyPr wrap="square">
-            <a:spAutoFit/>
-          </a:bodyPr>
-          <a:lstStyle/>
-          <a:p>
-            <a:pPr algn="l">
-              <a:defRPr sz="1500" b="0" i="0">
+            <a:ext cx="9966960" cy="914400"/>
+          </a:xfrm>
+          <a:prstGeom prst="rect">
+            <a:avLst/>
+          </a:prstGeom>
+          <a:noFill/>
+        </p:spPr>
+        <p:txBody>
+          <a:bodyPr wrap="square">
+            <a:spAutoFit/>
+          </a:bodyPr>
+          <a:lstStyle/>
+          <a:p>
+            <a:pPr algn="l">
+              <a:defRPr sz="1600" b="0" i="0">
                 <a:solidFill>
                   <a:srgbClr val="E2E2EA"/>
                 </a:solidFill>
@@ -8326,7 +8695,7 @@
               </a:defRPr>
             </a:pPr>
             <a:r>
-              <a:t>Fraud Traffic Detection presentation by Timofey Levanov with recording available</a:t>
+              <a:t>Wishing you an amazing day filled with joy and celebration!</a:t>
             </a:r>
           </a:p>
         </p:txBody>
@@ -8339,30 +8708,30 @@
         </p:nvSpPr>
         <p:spPr>
           <a:xfrm>
-            <a:off x="1097280" y="5029200"/>
-            <a:ext cx="9966960" cy="365760"/>
-          </a:xfrm>
-          <a:prstGeom prst="rect">
-            <a:avLst/>
-          </a:prstGeom>
-          <a:noFill/>
-        </p:spPr>
-        <p:txBody>
-          <a:bodyPr wrap="square">
-            <a:spAutoFit/>
-          </a:bodyPr>
-          <a:lstStyle/>
-          <a:p>
-            <a:pPr algn="l">
-              <a:defRPr sz="1300" b="0" i="0">
-                <a:solidFill>
-                  <a:srgbClr val="8F95A3"/>
-                </a:solidFill>
-                <a:latin typeface="Calibri"/>
-              </a:defRPr>
-            </a:pPr>
-            <a:r>
-              <a:t>Organized by Katarzyna Raniszewska</a:t>
+            <a:off x="1097280" y="4572000"/>
+            <a:ext cx="9966960" cy="457200"/>
+          </a:xfrm>
+          <a:prstGeom prst="rect">
+            <a:avLst/>
+          </a:prstGeom>
+          <a:noFill/>
+        </p:spPr>
+        <p:txBody>
+          <a:bodyPr wrap="square">
+            <a:spAutoFit/>
+          </a:bodyPr>
+          <a:lstStyle/>
+          <a:p>
+            <a:pPr algn="l">
+              <a:defRPr sz="1400" b="0" i="1">
+                <a:solidFill>
+                  <a:srgbClr val="FFB72B"/>
+                </a:solidFill>
+                <a:latin typeface="Calibri"/>
+              </a:defRPr>
+            </a:pPr>
+            <a:r>
+              <a:t>With love, Your Appodeal Team 💜</a:t>
             </a:r>
           </a:p>
         </p:txBody>
@@ -8408,7 +8777,7 @@
             <a:avLst/>
           </a:prstGeom>
           <a:solidFill>
-            <a:srgbClr val="FF7043"/>
+            <a:srgbClr val="FFB72B"/>
           </a:solidFill>
           <a:ln>
             <a:noFill/>
@@ -8461,13 +8830,13 @@
             <a:pPr algn="l">
               <a:defRPr sz="1000" b="1">
                 <a:solidFill>
-                  <a:srgbClr val="FF7043"/>
-                </a:solidFill>
-                <a:latin typeface="Calibri"/>
-              </a:defRPr>
-            </a:pPr>
-            <a:r>
-              <a:t>🌟  CLAPS</a:t>
+                  <a:srgbClr val="FFB72B"/>
+                </a:solidFill>
+                <a:latin typeface="Calibri"/>
+              </a:defRPr>
+            </a:pPr>
+            <a:r>
+              <a:t>🎂  CELEBRATION</a:t>
             </a:r>
           </a:p>
         </p:txBody>
@@ -8497,13 +8866,13 @@
             <a:pPr algn="l">
               <a:defRPr sz="3200" b="1" i="0">
                 <a:solidFill>
-                  <a:srgbClr val="FF7043"/>
-                </a:solidFill>
-                <a:latin typeface="Calibri"/>
-              </a:defRPr>
-            </a:pPr>
-            <a:r>
-              <a:t>Team Excellence</a:t>
+                  <a:srgbClr val="FFB72B"/>
+                </a:solidFill>
+                <a:latin typeface="Calibri"/>
+              </a:defRPr>
+            </a:pPr>
+            <a:r>
+              <a:t>Happy Birthday!</a:t>
             </a:r>
           </a:p>
         </p:txBody>
@@ -8517,7 +8886,7 @@
         <p:spPr>
           <a:xfrm>
             <a:off x="1097280" y="2103120"/>
-            <a:ext cx="2743200" cy="548640"/>
+            <a:ext cx="9966960" cy="640080"/>
           </a:xfrm>
           <a:prstGeom prst="rect">
             <a:avLst/>
@@ -8533,13 +8902,13 @@
             <a:pPr algn="l">
               <a:defRPr sz="2800" b="1" i="0">
                 <a:solidFill>
-                  <a:srgbClr val="FF7043"/>
-                </a:solidFill>
-                <a:latin typeface="Calibri"/>
-              </a:defRPr>
-            </a:pPr>
-            <a:r>
-              <a:t>50</a:t>
+                  <a:srgbClr val="FFFFFF"/>
+                </a:solidFill>
+                <a:latin typeface="Calibri"/>
+              </a:defRPr>
+            </a:pPr>
+            <a:r>
+              <a:t>Olga Petriakova</a:t>
             </a:r>
           </a:p>
         </p:txBody>
@@ -8552,7 +8921,7 @@
         </p:nvSpPr>
         <p:spPr>
           <a:xfrm>
-            <a:off x="1097280" y="2651760"/>
+            <a:off x="1097280" y="2743200"/>
             <a:ext cx="9966960" cy="365760"/>
           </a:xfrm>
           <a:prstGeom prst="rect">
@@ -8569,49 +8938,49 @@
             <a:pPr algn="l">
               <a:defRPr sz="1400" b="0" i="0">
                 <a:solidFill>
+                  <a:srgbClr val="8F95A3"/>
+                </a:solidFill>
+                <a:latin typeface="Calibri"/>
+              </a:defRPr>
+            </a:pPr>
+            <a:r>
+              <a:t>March 11</a:t>
+            </a:r>
+          </a:p>
+        </p:txBody>
+      </p:sp>
+      <p:sp>
+        <p:nvSpPr>
+          <p:cNvPr id="7" name="TextBox 6"/>
+          <p:cNvSpPr txBox="1"/>
+          <p:nvPr/>
+        </p:nvSpPr>
+        <p:spPr>
+          <a:xfrm>
+            <a:off x="1097280" y="3291840"/>
+            <a:ext cx="9966960" cy="914400"/>
+          </a:xfrm>
+          <a:prstGeom prst="rect">
+            <a:avLst/>
+          </a:prstGeom>
+          <a:noFill/>
+        </p:spPr>
+        <p:txBody>
+          <a:bodyPr wrap="square">
+            <a:spAutoFit/>
+          </a:bodyPr>
+          <a:lstStyle/>
+          <a:p>
+            <a:pPr algn="l">
+              <a:defRPr sz="1600" b="0" i="0">
+                <a:solidFill>
                   <a:srgbClr val="E2E2EA"/>
                 </a:solidFill>
                 <a:latin typeface="Calibri"/>
               </a:defRPr>
             </a:pPr>
             <a:r>
-              <a:t>from Sem Sinchenko</a:t>
-            </a:r>
-          </a:p>
-        </p:txBody>
-      </p:sp>
-      <p:sp>
-        <p:nvSpPr>
-          <p:cNvPr id="7" name="TextBox 6"/>
-          <p:cNvSpPr txBox="1"/>
-          <p:nvPr/>
-        </p:nvSpPr>
-        <p:spPr>
-          <a:xfrm>
-            <a:off x="1097280" y="3108960"/>
-            <a:ext cx="9966960" cy="365760"/>
-          </a:xfrm>
-          <a:prstGeom prst="rect">
-            <a:avLst/>
-          </a:prstGeom>
-          <a:noFill/>
-        </p:spPr>
-        <p:txBody>
-          <a:bodyPr wrap="square">
-            <a:spAutoFit/>
-          </a:bodyPr>
-          <a:lstStyle/>
-          <a:p>
-            <a:pPr algn="l">
-              <a:defRPr sz="1400" b="1" i="0">
-                <a:solidFill>
-                  <a:srgbClr val="FFFFFF"/>
-                </a:solidFill>
-                <a:latin typeface="Calibri"/>
-              </a:defRPr>
-            </a:pPr>
-            <a:r>
-              <a:t>to: Ildar Fatykhov</a:t>
+              <a:t>Wishing you an amazing day filled with joy and celebration!</a:t>
             </a:r>
           </a:p>
         </p:txBody>
@@ -8624,43 +8993,7 @@
         </p:nvSpPr>
         <p:spPr>
           <a:xfrm>
-            <a:off x="1097280" y="3749039"/>
-            <a:ext cx="9966960" cy="1097280"/>
-          </a:xfrm>
-          <a:prstGeom prst="rect">
-            <a:avLst/>
-          </a:prstGeom>
-          <a:noFill/>
-        </p:spPr>
-        <p:txBody>
-          <a:bodyPr wrap="square">
-            <a:spAutoFit/>
-          </a:bodyPr>
-          <a:lstStyle/>
-          <a:p>
-            <a:pPr algn="l">
-              <a:defRPr sz="1500" b="0" i="1">
-                <a:solidFill>
-                  <a:srgbClr val="E2E2EA"/>
-                </a:solidFill>
-                <a:latin typeface="Calibri"/>
-              </a:defRPr>
-            </a:pPr>
-            <a:r>
-              <a:t>"Outstanding technical contributions and leadership"</a:t>
-            </a:r>
-          </a:p>
-        </p:txBody>
-      </p:sp>
-      <p:sp>
-        <p:nvSpPr>
-          <p:cNvPr id="9" name="TextBox 8"/>
-          <p:cNvSpPr txBox="1"/>
-          <p:nvPr/>
-        </p:nvSpPr>
-        <p:spPr>
-          <a:xfrm>
-            <a:off x="1097280" y="5120640"/>
+            <a:off x="1097280" y="4572000"/>
             <a:ext cx="9966960" cy="457200"/>
           </a:xfrm>
           <a:prstGeom prst="rect">
@@ -8675,15 +9008,15 @@
           <a:lstStyle/>
           <a:p>
             <a:pPr algn="l">
-              <a:defRPr sz="1200" b="1" i="0">
-                <a:solidFill>
-                  <a:srgbClr val="FF7043"/>
-                </a:solidFill>
-                <a:latin typeface="Calibri"/>
-              </a:defRPr>
-            </a:pPr>
-            <a:r>
-              <a:t>TECHNICAL EXCELLENCE · LEADERSHIP</a:t>
+              <a:defRPr sz="1400" b="0" i="1">
+                <a:solidFill>
+                  <a:srgbClr val="FFB72B"/>
+                </a:solidFill>
+                <a:latin typeface="Calibri"/>
+              </a:defRPr>
+            </a:pPr>
+            <a:r>
+              <a:t>With love, Your Appodeal Team 💜</a:t>
             </a:r>
           </a:p>
         </p:txBody>
@@ -8729,7 +9062,7 @@
             <a:avLst/>
           </a:prstGeom>
           <a:solidFill>
-            <a:srgbClr val="2196F3"/>
+            <a:srgbClr val="FFB72B"/>
           </a:solidFill>
           <a:ln>
             <a:noFill/>
@@ -8782,13 +9115,13 @@
             <a:pPr algn="l">
               <a:defRPr sz="1000" b="1">
                 <a:solidFill>
-                  <a:srgbClr val="2196F3"/>
-                </a:solidFill>
-                <a:latin typeface="Calibri"/>
-              </a:defRPr>
-            </a:pPr>
-            <a:r>
-              <a:t>📚  RECOMMENDED</a:t>
+                  <a:srgbClr val="FFB72B"/>
+                </a:solidFill>
+                <a:latin typeface="Calibri"/>
+              </a:defRPr>
+            </a:pPr>
+            <a:r>
+              <a:t>🎂  CELEBRATION</a:t>
             </a:r>
           </a:p>
         </p:txBody>
@@ -8818,13 +9151,13 @@
             <a:pPr algn="l">
               <a:defRPr sz="3200" b="1" i="0">
                 <a:solidFill>
-                  <a:srgbClr val="2196F3"/>
-                </a:solidFill>
-                <a:latin typeface="Calibri"/>
-              </a:defRPr>
-            </a:pPr>
-            <a:r>
-              <a:t>Knowledge Sharing</a:t>
+                  <a:srgbClr val="FFB72B"/>
+                </a:solidFill>
+                <a:latin typeface="Calibri"/>
+              </a:defRPr>
+            </a:pPr>
+            <a:r>
+              <a:t>Happy Birthday!</a:t>
             </a:r>
           </a:p>
         </p:txBody>
@@ -8838,29 +9171,29 @@
         <p:spPr>
           <a:xfrm>
             <a:off x="1097280" y="2103120"/>
-            <a:ext cx="457200" cy="365760"/>
-          </a:xfrm>
-          <a:prstGeom prst="rect">
-            <a:avLst/>
-          </a:prstGeom>
-          <a:noFill/>
-        </p:spPr>
-        <p:txBody>
-          <a:bodyPr wrap="square">
-            <a:spAutoFit/>
-          </a:bodyPr>
-          <a:lstStyle/>
-          <a:p>
-            <a:pPr algn="l">
-              <a:defRPr sz="2200" b="1" i="0">
-                <a:solidFill>
-                  <a:srgbClr val="2196F3"/>
-                </a:solidFill>
-                <a:latin typeface="Calibri"/>
-              </a:defRPr>
-            </a:pPr>
-            <a:r>
-              <a:t>01</a:t>
+            <a:ext cx="9966960" cy="640080"/>
+          </a:xfrm>
+          <a:prstGeom prst="rect">
+            <a:avLst/>
+          </a:prstGeom>
+          <a:noFill/>
+        </p:spPr>
+        <p:txBody>
+          <a:bodyPr wrap="square">
+            <a:spAutoFit/>
+          </a:bodyPr>
+          <a:lstStyle/>
+          <a:p>
+            <a:pPr algn="l">
+              <a:defRPr sz="2800" b="1" i="0">
+                <a:solidFill>
+                  <a:srgbClr val="FFFFFF"/>
+                </a:solidFill>
+                <a:latin typeface="Calibri"/>
+              </a:defRPr>
+            </a:pPr>
+            <a:r>
+              <a:t>Alexandra Molchan</a:t>
             </a:r>
           </a:p>
         </p:txBody>
@@ -8873,30 +9206,30 @@
         </p:nvSpPr>
         <p:spPr>
           <a:xfrm>
-            <a:off x="1737360" y="2103120"/>
-            <a:ext cx="9326880" cy="365760"/>
-          </a:xfrm>
-          <a:prstGeom prst="rect">
-            <a:avLst/>
-          </a:prstGeom>
-          <a:noFill/>
-        </p:spPr>
-        <p:txBody>
-          <a:bodyPr wrap="square">
-            <a:spAutoFit/>
-          </a:bodyPr>
-          <a:lstStyle/>
-          <a:p>
-            <a:pPr algn="l">
-              <a:defRPr sz="1600" b="1" i="0">
-                <a:solidFill>
-                  <a:srgbClr val="FFFFFF"/>
-                </a:solidFill>
-                <a:latin typeface="Calibri"/>
-              </a:defRPr>
-            </a:pPr>
-            <a:r>
-              <a:t>The Speaking Coach: Stop Using This Word</a:t>
+            <a:off x="1097280" y="2743200"/>
+            <a:ext cx="9966960" cy="365760"/>
+          </a:xfrm>
+          <a:prstGeom prst="rect">
+            <a:avLst/>
+          </a:prstGeom>
+          <a:noFill/>
+        </p:spPr>
+        <p:txBody>
+          <a:bodyPr wrap="square">
+            <a:spAutoFit/>
+          </a:bodyPr>
+          <a:lstStyle/>
+          <a:p>
+            <a:pPr algn="l">
+              <a:defRPr sz="1400" b="0" i="0">
+                <a:solidFill>
+                  <a:srgbClr val="8F95A3"/>
+                </a:solidFill>
+                <a:latin typeface="Calibri"/>
+              </a:defRPr>
+            </a:pPr>
+            <a:r>
+              <a:t>March 11</a:t>
             </a:r>
           </a:p>
         </p:txBody>
@@ -8909,22 +9242,22 @@
         </p:nvSpPr>
         <p:spPr>
           <a:xfrm>
-            <a:off x="1737360" y="2423160"/>
-            <a:ext cx="9326880" cy="365760"/>
-          </a:xfrm>
-          <a:prstGeom prst="rect">
-            <a:avLst/>
-          </a:prstGeom>
-          <a:noFill/>
-        </p:spPr>
-        <p:txBody>
-          <a:bodyPr wrap="square">
-            <a:spAutoFit/>
-          </a:bodyPr>
-          <a:lstStyle/>
-          <a:p>
-            <a:pPr algn="l">
-              <a:defRPr sz="1200" b="0" i="0">
+            <a:off x="1097280" y="3291840"/>
+            <a:ext cx="9966960" cy="914400"/>
+          </a:xfrm>
+          <a:prstGeom prst="rect">
+            <a:avLst/>
+          </a:prstGeom>
+          <a:noFill/>
+        </p:spPr>
+        <p:txBody>
+          <a:bodyPr wrap="square">
+            <a:spAutoFit/>
+          </a:bodyPr>
+          <a:lstStyle/>
+          <a:p>
+            <a:pPr algn="l">
+              <a:defRPr sz="1600" b="0" i="0">
                 <a:solidFill>
                   <a:srgbClr val="E2E2EA"/>
                 </a:solidFill>
@@ -8932,7 +9265,7 @@
               </a:defRPr>
             </a:pPr>
             <a:r>
-              <a:t>Communication tips that make you sound more confident and credible</a:t>
+              <a:t>Wishing you an amazing day filled with joy and celebration!</a:t>
             </a:r>
           </a:p>
         </p:txBody>
@@ -8945,66 +9278,30 @@
         </p:nvSpPr>
         <p:spPr>
           <a:xfrm>
-            <a:off x="1737360" y="2743200"/>
-            <a:ext cx="9326880" cy="274320"/>
-          </a:xfrm>
-          <a:prstGeom prst="rect">
-            <a:avLst/>
-          </a:prstGeom>
-          <a:noFill/>
-        </p:spPr>
-        <p:txBody>
-          <a:bodyPr wrap="square">
-            <a:spAutoFit/>
-          </a:bodyPr>
-          <a:lstStyle/>
-          <a:p>
-            <a:pPr algn="l">
-              <a:defRPr sz="1100" b="0" i="0">
-                <a:solidFill>
-                  <a:srgbClr val="8F95A3"/>
-                </a:solidFill>
-                <a:latin typeface="Calibri"/>
-              </a:defRPr>
-            </a:pPr>
-            <a:r>
-              <a:t>Shared by Maria Plendukova · 2</a:t>
-            </a:r>
-          </a:p>
-        </p:txBody>
-      </p:sp>
-      <p:sp>
-        <p:nvSpPr>
-          <p:cNvPr id="9" name="TextBox 8"/>
-          <p:cNvSpPr txBox="1"/>
-          <p:nvPr/>
-        </p:nvSpPr>
-        <p:spPr>
-          <a:xfrm>
-            <a:off x="1097280" y="5943600"/>
-            <a:ext cx="9966960" cy="274320"/>
-          </a:xfrm>
-          <a:prstGeom prst="rect">
-            <a:avLst/>
-          </a:prstGeom>
-          <a:noFill/>
-        </p:spPr>
-        <p:txBody>
-          <a:bodyPr wrap="square">
-            <a:spAutoFit/>
-          </a:bodyPr>
-          <a:lstStyle/>
-          <a:p>
-            <a:pPr algn="l">
-              <a:defRPr sz="1100" b="0" i="0">
-                <a:solidFill>
-                  <a:srgbClr val="5C6270"/>
-                </a:solidFill>
-                <a:latin typeface="Calibri"/>
-              </a:defRPr>
-            </a:pPr>
-            <a:r>
-              <a:t>#general-chat</a:t>
+            <a:off x="1097280" y="4572000"/>
+            <a:ext cx="9966960" cy="457200"/>
+          </a:xfrm>
+          <a:prstGeom prst="rect">
+            <a:avLst/>
+          </a:prstGeom>
+          <a:noFill/>
+        </p:spPr>
+        <p:txBody>
+          <a:bodyPr wrap="square">
+            <a:spAutoFit/>
+          </a:bodyPr>
+          <a:lstStyle/>
+          <a:p>
+            <a:pPr algn="l">
+              <a:defRPr sz="1400" b="0" i="1">
+                <a:solidFill>
+                  <a:srgbClr val="FFB72B"/>
+                </a:solidFill>
+                <a:latin typeface="Calibri"/>
+              </a:defRPr>
+            </a:pPr>
+            <a:r>
+              <a:t>With love, Your Appodeal Team 💜</a:t>
             </a:r>
           </a:p>
         </p:txBody>
@@ -9050,7 +9347,7 @@
             <a:avLst/>
           </a:prstGeom>
           <a:solidFill>
-            <a:srgbClr val="4CAF50"/>
+            <a:srgbClr val="FFB72B"/>
           </a:solidFill>
           <a:ln>
             <a:noFill/>
@@ -9103,13 +9400,13 @@
             <a:pPr algn="l">
               <a:defRPr sz="1000" b="1">
                 <a:solidFill>
-                  <a:srgbClr val="4CAF50"/>
-                </a:solidFill>
-                <a:latin typeface="Calibri"/>
-              </a:defRPr>
-            </a:pPr>
-            <a:r>
-              <a:t>💰  MILESTONE</a:t>
+                  <a:srgbClr val="FFB72B"/>
+                </a:solidFill>
+                <a:latin typeface="Calibri"/>
+              </a:defRPr>
+            </a:pPr>
+            <a:r>
+              <a:t>🎂  CELEBRATION</a:t>
             </a:r>
           </a:p>
         </p:txBody>
@@ -9139,13 +9436,13 @@
             <a:pPr algn="l">
               <a:defRPr sz="3200" b="1" i="0">
                 <a:solidFill>
-                  <a:srgbClr val="4CAF50"/>
-                </a:solidFill>
-                <a:latin typeface="Calibri"/>
-              </a:defRPr>
-            </a:pPr>
-            <a:r>
-              <a:t>Financial Milestone</a:t>
+                  <a:srgbClr val="FFB72B"/>
+                </a:solidFill>
+                <a:latin typeface="Calibri"/>
+              </a:defRPr>
+            </a:pPr>
+            <a:r>
+              <a:t>Happy Birthday!</a:t>
             </a:r>
           </a:p>
         </p:txBody>
@@ -9159,29 +9456,29 @@
         <p:spPr>
           <a:xfrm>
             <a:off x="1097280" y="2103120"/>
-            <a:ext cx="4572000" cy="822960"/>
-          </a:xfrm>
-          <a:prstGeom prst="rect">
-            <a:avLst/>
-          </a:prstGeom>
-          <a:noFill/>
-        </p:spPr>
-        <p:txBody>
-          <a:bodyPr wrap="square">
-            <a:spAutoFit/>
-          </a:bodyPr>
-          <a:lstStyle/>
-          <a:p>
-            <a:pPr algn="l">
-              <a:defRPr sz="5200" b="1" i="0">
-                <a:solidFill>
-                  <a:srgbClr val="4CAF50"/>
-                </a:solidFill>
-                <a:latin typeface="Calibri"/>
-              </a:defRPr>
-            </a:pPr>
-            <a:r>
-              <a:t>40%</a:t>
+            <a:ext cx="9966960" cy="640080"/>
+          </a:xfrm>
+          <a:prstGeom prst="rect">
+            <a:avLst/>
+          </a:prstGeom>
+          <a:noFill/>
+        </p:spPr>
+        <p:txBody>
+          <a:bodyPr wrap="square">
+            <a:spAutoFit/>
+          </a:bodyPr>
+          <a:lstStyle/>
+          <a:p>
+            <a:pPr algn="l">
+              <a:defRPr sz="2800" b="1" i="0">
+                <a:solidFill>
+                  <a:srgbClr val="FFFFFF"/>
+                </a:solidFill>
+                <a:latin typeface="Calibri"/>
+              </a:defRPr>
+            </a:pPr>
+            <a:r>
+              <a:t>Sergei Bashkirtsev</a:t>
             </a:r>
           </a:p>
         </p:txBody>
@@ -9194,22 +9491,22 @@
         </p:nvSpPr>
         <p:spPr>
           <a:xfrm>
-            <a:off x="1097280" y="2926080"/>
-            <a:ext cx="4572000" cy="365760"/>
-          </a:xfrm>
-          <a:prstGeom prst="rect">
-            <a:avLst/>
-          </a:prstGeom>
-          <a:noFill/>
-        </p:spPr>
-        <p:txBody>
-          <a:bodyPr wrap="square">
-            <a:spAutoFit/>
-          </a:bodyPr>
-          <a:lstStyle/>
-          <a:p>
-            <a:pPr algn="l">
-              <a:defRPr sz="1100" b="0" i="0">
+            <a:off x="1097280" y="2743200"/>
+            <a:ext cx="9966960" cy="365760"/>
+          </a:xfrm>
+          <a:prstGeom prst="rect">
+            <a:avLst/>
+          </a:prstGeom>
+          <a:noFill/>
+        </p:spPr>
+        <p:txBody>
+          <a:bodyPr wrap="square">
+            <a:spAutoFit/>
+          </a:bodyPr>
+          <a:lstStyle/>
+          <a:p>
+            <a:pPr algn="l">
+              <a:defRPr sz="1400" b="0" i="0">
                 <a:solidFill>
                   <a:srgbClr val="8F95A3"/>
                 </a:solidFill>
@@ -9217,7 +9514,7 @@
               </a:defRPr>
             </a:pPr>
             <a:r>
-              <a:t>YoY Growth Projected</a:t>
+              <a:t>March 11</a:t>
             </a:r>
           </a:p>
         </p:txBody>
@@ -9230,7 +9527,43 @@
         </p:nvSpPr>
         <p:spPr>
           <a:xfrm>
-            <a:off x="1097280" y="3566160"/>
+            <a:off x="1097280" y="3291840"/>
+            <a:ext cx="9966960" cy="914400"/>
+          </a:xfrm>
+          <a:prstGeom prst="rect">
+            <a:avLst/>
+          </a:prstGeom>
+          <a:noFill/>
+        </p:spPr>
+        <p:txBody>
+          <a:bodyPr wrap="square">
+            <a:spAutoFit/>
+          </a:bodyPr>
+          <a:lstStyle/>
+          <a:p>
+            <a:pPr algn="l">
+              <a:defRPr sz="1600" b="0" i="0">
+                <a:solidFill>
+                  <a:srgbClr val="E2E2EA"/>
+                </a:solidFill>
+                <a:latin typeface="Calibri"/>
+              </a:defRPr>
+            </a:pPr>
+            <a:r>
+              <a:t>Wishing you an amazing day filled with joy and celebration!</a:t>
+            </a:r>
+          </a:p>
+        </p:txBody>
+      </p:sp>
+      <p:sp>
+        <p:nvSpPr>
+          <p:cNvPr id="8" name="TextBox 7"/>
+          <p:cNvSpPr txBox="1"/>
+          <p:nvPr/>
+        </p:nvSpPr>
+        <p:spPr>
+          <a:xfrm>
+            <a:off x="1097280" y="4572000"/>
             <a:ext cx="9966960" cy="457200"/>
           </a:xfrm>
           <a:prstGeom prst="rect">
@@ -9245,51 +9578,15 @@
           <a:lstStyle/>
           <a:p>
             <a:pPr algn="l">
-              <a:defRPr sz="1800" b="1" i="0">
-                <a:solidFill>
-                  <a:srgbClr val="FFFFFF"/>
-                </a:solidFill>
-                <a:latin typeface="Calibri"/>
-              </a:defRPr>
-            </a:pPr>
-            <a:r>
-              <a:t>Impressive Growth Trajectory</a:t>
-            </a:r>
-          </a:p>
-        </p:txBody>
-      </p:sp>
-      <p:sp>
-        <p:nvSpPr>
-          <p:cNvPr id="8" name="TextBox 7"/>
-          <p:cNvSpPr txBox="1"/>
-          <p:nvPr/>
-        </p:nvSpPr>
-        <p:spPr>
-          <a:xfrm>
-            <a:off x="1097280" y="4206240"/>
-            <a:ext cx="9966960" cy="1371600"/>
-          </a:xfrm>
-          <a:prstGeom prst="rect">
-            <a:avLst/>
-          </a:prstGeom>
-          <a:noFill/>
-        </p:spPr>
-        <p:txBody>
-          <a:bodyPr wrap="square">
-            <a:spAutoFit/>
-          </a:bodyPr>
-          <a:lstStyle/>
-          <a:p>
-            <a:pPr algn="l">
-              <a:defRPr sz="1500" b="0" i="0">
-                <a:solidFill>
-                  <a:srgbClr val="E2E2EA"/>
-                </a:solidFill>
-                <a:latin typeface="Calibri"/>
-              </a:defRPr>
-            </a:pPr>
-            <a:r>
-              <a:t>Company reaching new heights with strong fundamentals and sustainable growth</a:t>
+              <a:defRPr sz="1400" b="0" i="1">
+                <a:solidFill>
+                  <a:srgbClr val="FFB72B"/>
+                </a:solidFill>
+                <a:latin typeface="Calibri"/>
+              </a:defRPr>
+            </a:pPr>
+            <a:r>
+              <a:t>With love, Your Appodeal Team 💜</a:t>
             </a:r>
           </a:p>
         </p:txBody>
@@ -9335,7 +9632,7 @@
             <a:avLst/>
           </a:prstGeom>
           <a:solidFill>
-            <a:srgbClr val="FF9800"/>
+            <a:srgbClr val="FFB72B"/>
           </a:solidFill>
           <a:ln>
             <a:noFill/>
@@ -9388,13 +9685,13 @@
             <a:pPr algn="l">
               <a:defRPr sz="1000" b="1">
                 <a:solidFill>
-                  <a:srgbClr val="FF9800"/>
-                </a:solidFill>
-                <a:latin typeface="Calibri"/>
-              </a:defRPr>
-            </a:pPr>
-            <a:r>
-              <a:t>🤝  CLAPS</a:t>
+                  <a:srgbClr val="FFB72B"/>
+                </a:solidFill>
+                <a:latin typeface="Calibri"/>
+              </a:defRPr>
+            </a:pPr>
+            <a:r>
+              <a:t>🎂  CELEBRATION</a:t>
             </a:r>
           </a:p>
         </p:txBody>
@@ -9424,13 +9721,13 @@
             <a:pPr algn="l">
               <a:defRPr sz="3200" b="1" i="0">
                 <a:solidFill>
-                  <a:srgbClr val="FF9800"/>
-                </a:solidFill>
-                <a:latin typeface="Calibri"/>
-              </a:defRPr>
-            </a:pPr>
-            <a:r>
-              <a:t>Team Collaboration</a:t>
+                  <a:srgbClr val="FFB72B"/>
+                </a:solidFill>
+                <a:latin typeface="Calibri"/>
+              </a:defRPr>
+            </a:pPr>
+            <a:r>
+              <a:t>Happy Birthday!</a:t>
             </a:r>
           </a:p>
         </p:txBody>
@@ -9444,7 +9741,7 @@
         <p:spPr>
           <a:xfrm>
             <a:off x="1097280" y="2103120"/>
-            <a:ext cx="2743200" cy="548640"/>
+            <a:ext cx="9966960" cy="640080"/>
           </a:xfrm>
           <a:prstGeom prst="rect">
             <a:avLst/>
@@ -9460,13 +9757,13 @@
             <a:pPr algn="l">
               <a:defRPr sz="2800" b="1" i="0">
                 <a:solidFill>
-                  <a:srgbClr val="FF9800"/>
-                </a:solidFill>
-                <a:latin typeface="Calibri"/>
-              </a:defRPr>
-            </a:pPr>
-            <a:r>
-              <a:t>40</a:t>
+                  <a:srgbClr val="FFFFFF"/>
+                </a:solidFill>
+                <a:latin typeface="Calibri"/>
+              </a:defRPr>
+            </a:pPr>
+            <a:r>
+              <a:t>Roman Shakhanov</a:t>
             </a:r>
           </a:p>
         </p:txBody>
@@ -9479,7 +9776,7 @@
         </p:nvSpPr>
         <p:spPr>
           <a:xfrm>
-            <a:off x="1097280" y="2651760"/>
+            <a:off x="1097280" y="2743200"/>
             <a:ext cx="9966960" cy="365760"/>
           </a:xfrm>
           <a:prstGeom prst="rect">
@@ -9496,49 +9793,49 @@
             <a:pPr algn="l">
               <a:defRPr sz="1400" b="0" i="0">
                 <a:solidFill>
+                  <a:srgbClr val="8F95A3"/>
+                </a:solidFill>
+                <a:latin typeface="Calibri"/>
+              </a:defRPr>
+            </a:pPr>
+            <a:r>
+              <a:t>March 11</a:t>
+            </a:r>
+          </a:p>
+        </p:txBody>
+      </p:sp>
+      <p:sp>
+        <p:nvSpPr>
+          <p:cNvPr id="7" name="TextBox 6"/>
+          <p:cNvSpPr txBox="1"/>
+          <p:nvPr/>
+        </p:nvSpPr>
+        <p:spPr>
+          <a:xfrm>
+            <a:off x="1097280" y="3291840"/>
+            <a:ext cx="9966960" cy="914400"/>
+          </a:xfrm>
+          <a:prstGeom prst="rect">
+            <a:avLst/>
+          </a:prstGeom>
+          <a:noFill/>
+        </p:spPr>
+        <p:txBody>
+          <a:bodyPr wrap="square">
+            <a:spAutoFit/>
+          </a:bodyPr>
+          <a:lstStyle/>
+          <a:p>
+            <a:pPr algn="l">
+              <a:defRPr sz="1600" b="0" i="0">
+                <a:solidFill>
                   <a:srgbClr val="E2E2EA"/>
                 </a:solidFill>
                 <a:latin typeface="Calibri"/>
               </a:defRPr>
             </a:pPr>
             <a:r>
-              <a:t>from Anastasia Sokolova</a:t>
-            </a:r>
-          </a:p>
-        </p:txBody>
-      </p:sp>
-      <p:sp>
-        <p:nvSpPr>
-          <p:cNvPr id="7" name="TextBox 6"/>
-          <p:cNvSpPr txBox="1"/>
-          <p:nvPr/>
-        </p:nvSpPr>
-        <p:spPr>
-          <a:xfrm>
-            <a:off x="1097280" y="3108960"/>
-            <a:ext cx="9966960" cy="365760"/>
-          </a:xfrm>
-          <a:prstGeom prst="rect">
-            <a:avLst/>
-          </a:prstGeom>
-          <a:noFill/>
-        </p:spPr>
-        <p:txBody>
-          <a:bodyPr wrap="square">
-            <a:spAutoFit/>
-          </a:bodyPr>
-          <a:lstStyle/>
-          <a:p>
-            <a:pPr algn="l">
-              <a:defRPr sz="1400" b="1" i="0">
-                <a:solidFill>
-                  <a:srgbClr val="FFFFFF"/>
-                </a:solidFill>
-                <a:latin typeface="Calibri"/>
-              </a:defRPr>
-            </a:pPr>
-            <a:r>
-              <a:t>to: Sasha Sakovich</a:t>
+              <a:t>Wishing you an amazing day filled with joy and celebration!</a:t>
             </a:r>
           </a:p>
         </p:txBody>
@@ -9551,43 +9848,7 @@
         </p:nvSpPr>
         <p:spPr>
           <a:xfrm>
-            <a:off x="1097280" y="3749039"/>
-            <a:ext cx="9966960" cy="1097280"/>
-          </a:xfrm>
-          <a:prstGeom prst="rect">
-            <a:avLst/>
-          </a:prstGeom>
-          <a:noFill/>
-        </p:spPr>
-        <p:txBody>
-          <a:bodyPr wrap="square">
-            <a:spAutoFit/>
-          </a:bodyPr>
-          <a:lstStyle/>
-          <a:p>
-            <a:pPr algn="l">
-              <a:defRPr sz="1500" b="0" i="1">
-                <a:solidFill>
-                  <a:srgbClr val="E2E2EA"/>
-                </a:solidFill>
-                <a:latin typeface="Calibri"/>
-              </a:defRPr>
-            </a:pPr>
-            <a:r>
-              <a:t>"Exceptional teamwork and collaboration"</a:t>
-            </a:r>
-          </a:p>
-        </p:txBody>
-      </p:sp>
-      <p:sp>
-        <p:nvSpPr>
-          <p:cNvPr id="9" name="TextBox 8"/>
-          <p:cNvSpPr txBox="1"/>
-          <p:nvPr/>
-        </p:nvSpPr>
-        <p:spPr>
-          <a:xfrm>
-            <a:off x="1097280" y="5120640"/>
+            <a:off x="1097280" y="4572000"/>
             <a:ext cx="9966960" cy="457200"/>
           </a:xfrm>
           <a:prstGeom prst="rect">
@@ -9602,15 +9863,15 @@
           <a:lstStyle/>
           <a:p>
             <a:pPr algn="l">
-              <a:defRPr sz="1200" b="1" i="0">
-                <a:solidFill>
-                  <a:srgbClr val="FF9800"/>
-                </a:solidFill>
-                <a:latin typeface="Calibri"/>
-              </a:defRPr>
-            </a:pPr>
-            <a:r>
-              <a:t>TEAMWORK · COLLABORATION</a:t>
+              <a:defRPr sz="1400" b="0" i="1">
+                <a:solidFill>
+                  <a:srgbClr val="FFB72B"/>
+                </a:solidFill>
+                <a:latin typeface="Calibri"/>
+              </a:defRPr>
+            </a:pPr>
+            <a:r>
+              <a:t>With love, Your Appodeal Team 💜</a:t>
             </a:r>
           </a:p>
         </p:txBody>
